--- a/assets/figures-editable/c1-c2/c1-e29.pptx
+++ b/assets/figures-editable/c1-c2/c1-e29.pptx
@@ -7,7 +7,7 @@
   <p:sldIdLst>
     <p:sldId id="256" r:id="rId7"/>
   </p:sldIdLst>
-  <p:sldSz cx="11948160" cy="7924799" type="screen4x3"/>
+  <p:sldSz cx="12191695" cy="6858000" type="screen4x3"/>
   <p:notesSz cx="6858000" cy="9144000"/>
   <p:defaultTextStyle>
     <a:defPPr>
@@ -3098,14 +3098,14 @@
       <p:grpSpPr/>
       <p:sp>
         <p:nvSpPr>
-          <p:cNvPr id="2" name="text1" descr="sci-ppt:C1-E29-001"/>
+          <p:cNvPr id="2" name="C1-E29 text 0" descr="sci-ppt:o000"/>
           <p:cNvSpPr txBox="1"/>
           <p:nvPr/>
         </p:nvSpPr>
         <p:spPr>
           <a:xfrm>
-            <a:off x="316992" y="268224"/>
-            <a:ext cx="11277600" cy="359054"/>
+            <a:off x="274320" y="118872"/>
+            <a:ext cx="11612880" cy="340105"/>
           </a:xfrm>
           <a:prstGeom prst="rect">
             <a:avLst/>
@@ -3114,7 +3114,7 @@
           <a:effectLst/>
         </p:spPr>
         <p:txBody>
-          <a:bodyPr wrap="none" lIns="27432" rIns="27432" tIns="18288" bIns="18288" anchor="ctr">
+          <a:bodyPr wrap="none" lIns="18288" rIns="18288" tIns="18288" bIns="18288" anchor="t">
             <a:spAutoFit/>
           </a:bodyPr>
           <a:lstStyle/>
@@ -3125,33 +3125,428 @@
               </a:spcAft>
             </a:pPr>
             <a:r>
-              <a:rPr sz="1823" b="0" i="0">
+              <a:rPr sz="1900" b="1" i="0">
                 <a:solidFill>
                   <a:srgbClr val="8EDBD4"/>
                 </a:solidFill>
                 <a:latin typeface="Arial"/>
               </a:rPr>
-              <a:t>C1-E29 | Physical-variable diagram</a:t>
-            </a:r>
-          </a:p>
-        </p:txBody>
-      </p:sp>
-      <p:sp>
-        <p:nvSpPr>
-          <p:cNvPr id="3" name="rect2" descr="sci-ppt:C1-E29-002"/>
+              <a:t>C1-E29 · Inviscid pre-impact moving-interface closure</a:t>
+            </a:r>
+          </a:p>
+        </p:txBody>
+      </p:sp>
+      <p:sp>
+        <p:nvSpPr>
+          <p:cNvPr id="3" name="C1-E29 round_rect 1" descr="sci-ppt:o001"/>
           <p:cNvSpPr/>
           <p:nvPr/>
         </p:nvSpPr>
         <p:spPr>
           <a:xfrm>
-            <a:off x="1341120" y="1524000"/>
-            <a:ext cx="9144000" cy="2438400"/>
+            <a:off x="365760" y="914400"/>
+            <a:ext cx="5486400" cy="4937760"/>
+          </a:xfrm>
+          <a:prstGeom prst="roundRect">
+            <a:avLst/>
+          </a:prstGeom>
+          <a:solidFill>
+            <a:srgbClr val="213E4B"/>
+          </a:solidFill>
+          <a:ln w="20320">
+            <a:solidFill>
+              <a:srgbClr val="8EDBD4"/>
+            </a:solidFill>
+          </a:ln>
+          <a:effectLst/>
+        </p:spPr>
+        <p:txBody>
+          <a:bodyPr rtlCol="0" anchor="ctr"/>
+          <a:lstStyle/>
+          <a:p>
+            <a:pPr algn="ctr"/>
+          </a:p>
+        </p:txBody>
+      </p:sp>
+      <p:sp>
+        <p:nvSpPr>
+          <p:cNvPr id="4" name="C1-E29 text 2" descr="sci-ppt:o002"/>
+          <p:cNvSpPr txBox="1"/>
+          <p:nvPr/>
+        </p:nvSpPr>
+        <p:spPr>
+          <a:xfrm>
+            <a:off x="475488" y="969264"/>
+            <a:ext cx="5266944" cy="254889"/>
           </a:xfrm>
           <a:prstGeom prst="rect">
             <a:avLst/>
           </a:prstGeom>
           <a:noFill/>
-          <a:ln w="19050">
+          <a:effectLst/>
+        </p:spPr>
+        <p:txBody>
+          <a:bodyPr wrap="none" lIns="18288" rIns="18288" tIns="18288" bIns="18288" anchor="t">
+            <a:spAutoFit/>
+          </a:bodyPr>
+          <a:lstStyle/>
+          <a:p>
+            <a:pPr algn="l">
+              <a:spcAft>
+                <a:spcPts val="0"/>
+              </a:spcAft>
+            </a:pPr>
+            <a:r>
+              <a:rPr sz="1350" b="1" i="0">
+                <a:solidFill>
+                  <a:srgbClr val="8EDBD4"/>
+                </a:solidFill>
+                <a:latin typeface="Arial"/>
+              </a:rPr>
+              <a:t>A shape that is not a sphere</a:t>
+            </a:r>
+          </a:p>
+        </p:txBody>
+      </p:sp>
+      <p:sp>
+        <p:nvSpPr>
+          <p:cNvPr id="5" name="C1-E29 polygon 3" descr="sci-ppt:o003"/>
+          <p:cNvSpPr/>
+          <p:nvPr/>
+        </p:nvSpPr>
+        <p:spPr>
+          <a:xfrm>
+            <a:off x="1685048" y="2628162"/>
+            <a:ext cx="3152676" cy="1510235"/>
+          </a:xfrm>
+          <a:custGeom>
+            <a:avLst/>
+            <a:gdLst/>
+            <a:ahLst/>
+            <a:cxnLst/>
+            <a:rect l="l" t="t" r="r" b="b"/>
+            <a:pathLst>
+              <a:path w="3152676" h="1510235">
+                <a:moveTo>
+                  <a:pt x="3152676" y="755118"/>
+                </a:moveTo>
+                <a:lnTo>
+                  <a:pt x="3142764" y="653859"/>
+                </a:lnTo>
+                <a:lnTo>
+                  <a:pt x="3113333" y="554796"/>
+                </a:lnTo>
+                <a:lnTo>
+                  <a:pt x="3065286" y="460027"/>
+                </a:lnTo>
+                <a:lnTo>
+                  <a:pt x="3000076" y="371460"/>
+                </a:lnTo>
+                <a:lnTo>
+                  <a:pt x="2919636" y="290738"/>
+                </a:lnTo>
+                <a:lnTo>
+                  <a:pt x="2826287" y="219163"/>
+                </a:lnTo>
+                <a:lnTo>
+                  <a:pt x="2722620" y="157652"/>
+                </a:lnTo>
+                <a:lnTo>
+                  <a:pt x="2611377" y="106709"/>
+                </a:lnTo>
+                <a:lnTo>
+                  <a:pt x="2495317" y="66415"/>
+                </a:lnTo>
+                <a:lnTo>
+                  <a:pt x="2377091" y="36444"/>
+                </a:lnTo>
+                <a:lnTo>
+                  <a:pt x="2259126" y="16100"/>
+                </a:lnTo>
+                <a:lnTo>
+                  <a:pt x="2143517" y="4370"/>
+                </a:lnTo>
+                <a:lnTo>
+                  <a:pt x="2031947" y="0"/>
+                </a:lnTo>
+                <a:lnTo>
+                  <a:pt x="1925628" y="1567"/>
+                </a:lnTo>
+                <a:lnTo>
+                  <a:pt x="1825274" y="7579"/>
+                </a:lnTo>
+                <a:lnTo>
+                  <a:pt x="1731097" y="16558"/>
+                </a:lnTo>
+                <a:lnTo>
+                  <a:pt x="1642835" y="27128"/>
+                </a:lnTo>
+                <a:lnTo>
+                  <a:pt x="1559811" y="38100"/>
+                </a:lnTo>
+                <a:lnTo>
+                  <a:pt x="1481003" y="48531"/>
+                </a:lnTo>
+                <a:lnTo>
+                  <a:pt x="1405150" y="57780"/>
+                </a:lnTo>
+                <a:lnTo>
+                  <a:pt x="1330852" y="65538"/>
+                </a:lnTo>
+                <a:lnTo>
+                  <a:pt x="1256693" y="71837"/>
+                </a:lnTo>
+                <a:lnTo>
+                  <a:pt x="1181351" y="77041"/>
+                </a:lnTo>
+                <a:lnTo>
+                  <a:pt x="1103709" y="81818"/>
+                </a:lnTo>
+                <a:lnTo>
+                  <a:pt x="1022946" y="87087"/>
+                </a:lnTo>
+                <a:lnTo>
+                  <a:pt x="938617" y="93960"/>
+                </a:lnTo>
+                <a:lnTo>
+                  <a:pt x="850701" y="103658"/>
+                </a:lnTo>
+                <a:lnTo>
+                  <a:pt x="759630" y="117436"/>
+                </a:lnTo>
+                <a:lnTo>
+                  <a:pt x="666282" y="136495"/>
+                </a:lnTo>
+                <a:lnTo>
+                  <a:pt x="571959" y="161898"/>
+                </a:lnTo>
+                <a:lnTo>
+                  <a:pt x="478324" y="194498"/>
+                </a:lnTo>
+                <a:lnTo>
+                  <a:pt x="387331" y="234875"/>
+                </a:lnTo>
+                <a:lnTo>
+                  <a:pt x="301117" y="283286"/>
+                </a:lnTo>
+                <a:lnTo>
+                  <a:pt x="221907" y="339636"/>
+                </a:lnTo>
+                <a:lnTo>
+                  <a:pt x="151885" y="403475"/>
+                </a:lnTo>
+                <a:lnTo>
+                  <a:pt x="93089" y="474001"/>
+                </a:lnTo>
+                <a:lnTo>
+                  <a:pt x="47298" y="550094"/>
+                </a:lnTo>
+                <a:lnTo>
+                  <a:pt x="15937" y="630371"/>
+                </a:lnTo>
+                <a:lnTo>
+                  <a:pt x="0" y="713242"/>
+                </a:lnTo>
+                <a:lnTo>
+                  <a:pt x="0" y="796993"/>
+                </a:lnTo>
+                <a:lnTo>
+                  <a:pt x="15937" y="879864"/>
+                </a:lnTo>
+                <a:lnTo>
+                  <a:pt x="47298" y="960141"/>
+                </a:lnTo>
+                <a:lnTo>
+                  <a:pt x="93089" y="1036234"/>
+                </a:lnTo>
+                <a:lnTo>
+                  <a:pt x="151885" y="1106760"/>
+                </a:lnTo>
+                <a:lnTo>
+                  <a:pt x="221907" y="1170599"/>
+                </a:lnTo>
+                <a:lnTo>
+                  <a:pt x="301117" y="1226949"/>
+                </a:lnTo>
+                <a:lnTo>
+                  <a:pt x="387331" y="1275360"/>
+                </a:lnTo>
+                <a:lnTo>
+                  <a:pt x="478324" y="1315737"/>
+                </a:lnTo>
+                <a:lnTo>
+                  <a:pt x="571959" y="1348337"/>
+                </a:lnTo>
+                <a:lnTo>
+                  <a:pt x="666282" y="1373740"/>
+                </a:lnTo>
+                <a:lnTo>
+                  <a:pt x="759630" y="1392799"/>
+                </a:lnTo>
+                <a:lnTo>
+                  <a:pt x="850701" y="1406577"/>
+                </a:lnTo>
+                <a:lnTo>
+                  <a:pt x="938617" y="1416275"/>
+                </a:lnTo>
+                <a:lnTo>
+                  <a:pt x="1022946" y="1423148"/>
+                </a:lnTo>
+                <a:lnTo>
+                  <a:pt x="1103709" y="1428417"/>
+                </a:lnTo>
+                <a:lnTo>
+                  <a:pt x="1181351" y="1433194"/>
+                </a:lnTo>
+                <a:lnTo>
+                  <a:pt x="1256693" y="1438398"/>
+                </a:lnTo>
+                <a:lnTo>
+                  <a:pt x="1330852" y="1444697"/>
+                </a:lnTo>
+                <a:lnTo>
+                  <a:pt x="1405150" y="1452455"/>
+                </a:lnTo>
+                <a:lnTo>
+                  <a:pt x="1481003" y="1461704"/>
+                </a:lnTo>
+                <a:lnTo>
+                  <a:pt x="1559811" y="1472135"/>
+                </a:lnTo>
+                <a:lnTo>
+                  <a:pt x="1642835" y="1483107"/>
+                </a:lnTo>
+                <a:lnTo>
+                  <a:pt x="1731097" y="1493677"/>
+                </a:lnTo>
+                <a:lnTo>
+                  <a:pt x="1825274" y="1502656"/>
+                </a:lnTo>
+                <a:lnTo>
+                  <a:pt x="1925628" y="1508668"/>
+                </a:lnTo>
+                <a:lnTo>
+                  <a:pt x="2031947" y="1510235"/>
+                </a:lnTo>
+                <a:lnTo>
+                  <a:pt x="2143517" y="1505865"/>
+                </a:lnTo>
+                <a:lnTo>
+                  <a:pt x="2259126" y="1494135"/>
+                </a:lnTo>
+                <a:lnTo>
+                  <a:pt x="2377091" y="1473791"/>
+                </a:lnTo>
+                <a:lnTo>
+                  <a:pt x="2495317" y="1443820"/>
+                </a:lnTo>
+                <a:lnTo>
+                  <a:pt x="2611377" y="1403526"/>
+                </a:lnTo>
+                <a:lnTo>
+                  <a:pt x="2722620" y="1352583"/>
+                </a:lnTo>
+                <a:lnTo>
+                  <a:pt x="2826287" y="1291072"/>
+                </a:lnTo>
+                <a:lnTo>
+                  <a:pt x="2919636" y="1219497"/>
+                </a:lnTo>
+                <a:lnTo>
+                  <a:pt x="3000076" y="1138775"/>
+                </a:lnTo>
+                <a:lnTo>
+                  <a:pt x="3065286" y="1050208"/>
+                </a:lnTo>
+                <a:lnTo>
+                  <a:pt x="3113333" y="955439"/>
+                </a:lnTo>
+                <a:lnTo>
+                  <a:pt x="3142764" y="856376"/>
+                </a:lnTo>
+                <a:lnTo>
+                  <a:pt x="3152676" y="755118"/>
+                </a:lnTo>
+                <a:close/>
+              </a:path>
+            </a:pathLst>
+          </a:custGeom>
+          <a:solidFill>
+            <a:srgbClr val="0C1820"/>
+          </a:solidFill>
+          <a:ln w="30480">
+            <a:solidFill>
+              <a:srgbClr val="F2B880"/>
+            </a:solidFill>
+          </a:ln>
+          <a:effectLst/>
+        </p:spPr>
+        <p:txBody>
+          <a:bodyPr rtlCol="0" anchor="ctr"/>
+          <a:lstStyle/>
+          <a:p>
+            <a:pPr algn="ctr"/>
+          </a:p>
+        </p:txBody>
+      </p:sp>
+      <p:sp>
+        <p:nvSpPr>
+          <p:cNvPr id="6" name="C1-E29 text 4" descr="sci-ppt:o004"/>
+          <p:cNvSpPr txBox="1"/>
+          <p:nvPr/>
+        </p:nvSpPr>
+        <p:spPr>
+          <a:xfrm>
+            <a:off x="2743200" y="3291840"/>
+            <a:ext cx="731520" cy="355599"/>
+          </a:xfrm>
+          <a:prstGeom prst="rect">
+            <a:avLst/>
+          </a:prstGeom>
+          <a:noFill/>
+          <a:effectLst/>
+        </p:spPr>
+        <p:txBody>
+          <a:bodyPr wrap="none" lIns="18288" rIns="18288" tIns="18288" bIns="18288" anchor="t">
+            <a:spAutoFit/>
+          </a:bodyPr>
+          <a:lstStyle/>
+          <a:p>
+            <a:pPr algn="ctr">
+              <a:spcAft>
+                <a:spcPts val="0"/>
+              </a:spcAft>
+            </a:pPr>
+            <a:r>
+              <a:rPr sz="2000" b="1" i="0">
+                <a:solidFill>
+                  <a:srgbClr val="F2B880"/>
+                </a:solidFill>
+                <a:latin typeface="Arial"/>
+              </a:rPr>
+              <a:t>Γ</a:t>
+            </a:r>
+          </a:p>
+        </p:txBody>
+      </p:sp>
+      <p:sp>
+        <p:nvSpPr>
+          <p:cNvPr id="7" name="C1-E29 rect 5" descr="sci-ppt:o005"/>
+          <p:cNvSpPr/>
+          <p:nvPr/>
+        </p:nvSpPr>
+        <p:spPr>
+          <a:xfrm>
+            <a:off x="731520" y="5394960"/>
+            <a:ext cx="4754880" cy="237744"/>
+          </a:xfrm>
+          <a:prstGeom prst="rect">
+            <a:avLst/>
+          </a:prstGeom>
+          <a:solidFill>
+            <a:srgbClr val="3A5362"/>
+          </a:solidFill>
+          <a:ln w="16510">
             <a:solidFill>
               <a:srgbClr val="B4C7D2"/>
             </a:solidFill>
@@ -3166,53 +3561,593 @@
           </a:p>
         </p:txBody>
       </p:sp>
-      <p:sp>
-        <p:nvSpPr>
-          <p:cNvPr id="4" name="ellipse3" descr="sci-ppt:C1-E29-003"/>
-          <p:cNvSpPr/>
-          <p:nvPr/>
-        </p:nvSpPr>
-        <p:spPr>
-          <a:xfrm>
-            <a:off x="2682240" y="1950720"/>
-            <a:ext cx="1584960" cy="1584960"/>
-          </a:xfrm>
-          <a:prstGeom prst="ellipse">
-            <a:avLst/>
-          </a:prstGeom>
-          <a:solidFill>
-            <a:srgbClr val="213E4B"/>
-          </a:solidFill>
-          <a:ln w="21590">
+      <p:cxnSp>
+        <p:nvCxnSpPr>
+          <p:cNvPr id="8" name="C1-E29 line 6" descr="sci-ppt:o006"/>
+          <p:cNvCxnSpPr/>
+          <p:nvPr/>
+        </p:nvCxnSpPr>
+        <p:spPr>
+          <a:xfrm>
+            <a:off x="749808" y="5632704"/>
+            <a:ext cx="137160" cy="155448"/>
+          </a:xfrm>
+          <a:prstGeom prst="line">
+            <a:avLst/>
+          </a:prstGeom>
+          <a:ln w="12700">
             <a:solidFill>
               <a:srgbClr val="B4C7D2"/>
             </a:solidFill>
           </a:ln>
           <a:effectLst/>
         </p:spPr>
-        <p:txBody>
-          <a:bodyPr rtlCol="0" anchor="ctr"/>
-          <a:lstStyle/>
-          <a:p>
-            <a:pPr algn="ctr"/>
-          </a:p>
-        </p:txBody>
-      </p:sp>
+      </p:cxnSp>
       <p:cxnSp>
         <p:nvCxnSpPr>
-          <p:cNvPr id="5" name="arrow4" descr="sci-ppt:C1-E29-004"/>
+          <p:cNvPr id="9" name="C1-E29 line 7" descr="sci-ppt:o007"/>
           <p:cNvCxnSpPr/>
           <p:nvPr/>
         </p:nvCxnSpPr>
         <p:spPr>
           <a:xfrm>
-            <a:off x="4267200" y="2743200"/>
-            <a:ext cx="4023360" cy="0"/>
+            <a:off x="932688" y="5632704"/>
+            <a:ext cx="137160" cy="155448"/>
           </a:xfrm>
           <a:prstGeom prst="line">
             <a:avLst/>
           </a:prstGeom>
-          <a:ln w="25400">
+          <a:ln w="12700">
+            <a:solidFill>
+              <a:srgbClr val="B4C7D2"/>
+            </a:solidFill>
+          </a:ln>
+          <a:effectLst/>
+        </p:spPr>
+      </p:cxnSp>
+      <p:cxnSp>
+        <p:nvCxnSpPr>
+          <p:cNvPr id="10" name="C1-E29 line 8" descr="sci-ppt:o008"/>
+          <p:cNvCxnSpPr/>
+          <p:nvPr/>
+        </p:nvCxnSpPr>
+        <p:spPr>
+          <a:xfrm>
+            <a:off x="1115568" y="5632704"/>
+            <a:ext cx="137160" cy="155448"/>
+          </a:xfrm>
+          <a:prstGeom prst="line">
+            <a:avLst/>
+          </a:prstGeom>
+          <a:ln w="12700">
+            <a:solidFill>
+              <a:srgbClr val="B4C7D2"/>
+            </a:solidFill>
+          </a:ln>
+          <a:effectLst/>
+        </p:spPr>
+      </p:cxnSp>
+      <p:cxnSp>
+        <p:nvCxnSpPr>
+          <p:cNvPr id="11" name="C1-E29 line 9" descr="sci-ppt:o009"/>
+          <p:cNvCxnSpPr/>
+          <p:nvPr/>
+        </p:nvCxnSpPr>
+        <p:spPr>
+          <a:xfrm>
+            <a:off x="1298448" y="5632704"/>
+            <a:ext cx="137160" cy="155448"/>
+          </a:xfrm>
+          <a:prstGeom prst="line">
+            <a:avLst/>
+          </a:prstGeom>
+          <a:ln w="12700">
+            <a:solidFill>
+              <a:srgbClr val="B4C7D2"/>
+            </a:solidFill>
+          </a:ln>
+          <a:effectLst/>
+        </p:spPr>
+      </p:cxnSp>
+      <p:cxnSp>
+        <p:nvCxnSpPr>
+          <p:cNvPr id="12" name="C1-E29 line 10" descr="sci-ppt:o010"/>
+          <p:cNvCxnSpPr/>
+          <p:nvPr/>
+        </p:nvCxnSpPr>
+        <p:spPr>
+          <a:xfrm>
+            <a:off x="1481328" y="5632704"/>
+            <a:ext cx="137160" cy="155448"/>
+          </a:xfrm>
+          <a:prstGeom prst="line">
+            <a:avLst/>
+          </a:prstGeom>
+          <a:ln w="12700">
+            <a:solidFill>
+              <a:srgbClr val="B4C7D2"/>
+            </a:solidFill>
+          </a:ln>
+          <a:effectLst/>
+        </p:spPr>
+      </p:cxnSp>
+      <p:cxnSp>
+        <p:nvCxnSpPr>
+          <p:cNvPr id="13" name="C1-E29 line 11" descr="sci-ppt:o011"/>
+          <p:cNvCxnSpPr/>
+          <p:nvPr/>
+        </p:nvCxnSpPr>
+        <p:spPr>
+          <a:xfrm>
+            <a:off x="1664208" y="5632704"/>
+            <a:ext cx="137160" cy="155448"/>
+          </a:xfrm>
+          <a:prstGeom prst="line">
+            <a:avLst/>
+          </a:prstGeom>
+          <a:ln w="12700">
+            <a:solidFill>
+              <a:srgbClr val="B4C7D2"/>
+            </a:solidFill>
+          </a:ln>
+          <a:effectLst/>
+        </p:spPr>
+      </p:cxnSp>
+      <p:cxnSp>
+        <p:nvCxnSpPr>
+          <p:cNvPr id="14" name="C1-E29 line 12" descr="sci-ppt:o012"/>
+          <p:cNvCxnSpPr/>
+          <p:nvPr/>
+        </p:nvCxnSpPr>
+        <p:spPr>
+          <a:xfrm>
+            <a:off x="1847088" y="5632704"/>
+            <a:ext cx="137160" cy="155448"/>
+          </a:xfrm>
+          <a:prstGeom prst="line">
+            <a:avLst/>
+          </a:prstGeom>
+          <a:ln w="12700">
+            <a:solidFill>
+              <a:srgbClr val="B4C7D2"/>
+            </a:solidFill>
+          </a:ln>
+          <a:effectLst/>
+        </p:spPr>
+      </p:cxnSp>
+      <p:cxnSp>
+        <p:nvCxnSpPr>
+          <p:cNvPr id="15" name="C1-E29 line 13" descr="sci-ppt:o013"/>
+          <p:cNvCxnSpPr/>
+          <p:nvPr/>
+        </p:nvCxnSpPr>
+        <p:spPr>
+          <a:xfrm>
+            <a:off x="2029968" y="5632704"/>
+            <a:ext cx="137160" cy="155448"/>
+          </a:xfrm>
+          <a:prstGeom prst="line">
+            <a:avLst/>
+          </a:prstGeom>
+          <a:ln w="12700">
+            <a:solidFill>
+              <a:srgbClr val="B4C7D2"/>
+            </a:solidFill>
+          </a:ln>
+          <a:effectLst/>
+        </p:spPr>
+      </p:cxnSp>
+      <p:cxnSp>
+        <p:nvCxnSpPr>
+          <p:cNvPr id="16" name="C1-E29 line 14" descr="sci-ppt:o014"/>
+          <p:cNvCxnSpPr/>
+          <p:nvPr/>
+        </p:nvCxnSpPr>
+        <p:spPr>
+          <a:xfrm>
+            <a:off x="2212848" y="5632704"/>
+            <a:ext cx="137160" cy="155448"/>
+          </a:xfrm>
+          <a:prstGeom prst="line">
+            <a:avLst/>
+          </a:prstGeom>
+          <a:ln w="12700">
+            <a:solidFill>
+              <a:srgbClr val="B4C7D2"/>
+            </a:solidFill>
+          </a:ln>
+          <a:effectLst/>
+        </p:spPr>
+      </p:cxnSp>
+      <p:cxnSp>
+        <p:nvCxnSpPr>
+          <p:cNvPr id="17" name="C1-E29 line 15" descr="sci-ppt:o015"/>
+          <p:cNvCxnSpPr/>
+          <p:nvPr/>
+        </p:nvCxnSpPr>
+        <p:spPr>
+          <a:xfrm>
+            <a:off x="2395728" y="5632704"/>
+            <a:ext cx="137160" cy="155448"/>
+          </a:xfrm>
+          <a:prstGeom prst="line">
+            <a:avLst/>
+          </a:prstGeom>
+          <a:ln w="12700">
+            <a:solidFill>
+              <a:srgbClr val="B4C7D2"/>
+            </a:solidFill>
+          </a:ln>
+          <a:effectLst/>
+        </p:spPr>
+      </p:cxnSp>
+      <p:cxnSp>
+        <p:nvCxnSpPr>
+          <p:cNvPr id="18" name="C1-E29 line 16" descr="sci-ppt:o016"/>
+          <p:cNvCxnSpPr/>
+          <p:nvPr/>
+        </p:nvCxnSpPr>
+        <p:spPr>
+          <a:xfrm>
+            <a:off x="2578608" y="5632704"/>
+            <a:ext cx="137160" cy="155448"/>
+          </a:xfrm>
+          <a:prstGeom prst="line">
+            <a:avLst/>
+          </a:prstGeom>
+          <a:ln w="12700">
+            <a:solidFill>
+              <a:srgbClr val="B4C7D2"/>
+            </a:solidFill>
+          </a:ln>
+          <a:effectLst/>
+        </p:spPr>
+      </p:cxnSp>
+      <p:cxnSp>
+        <p:nvCxnSpPr>
+          <p:cNvPr id="19" name="C1-E29 line 17" descr="sci-ppt:o017"/>
+          <p:cNvCxnSpPr/>
+          <p:nvPr/>
+        </p:nvCxnSpPr>
+        <p:spPr>
+          <a:xfrm>
+            <a:off x="2761488" y="5632704"/>
+            <a:ext cx="137160" cy="155448"/>
+          </a:xfrm>
+          <a:prstGeom prst="line">
+            <a:avLst/>
+          </a:prstGeom>
+          <a:ln w="12700">
+            <a:solidFill>
+              <a:srgbClr val="B4C7D2"/>
+            </a:solidFill>
+          </a:ln>
+          <a:effectLst/>
+        </p:spPr>
+      </p:cxnSp>
+      <p:cxnSp>
+        <p:nvCxnSpPr>
+          <p:cNvPr id="20" name="C1-E29 line 18" descr="sci-ppt:o018"/>
+          <p:cNvCxnSpPr/>
+          <p:nvPr/>
+        </p:nvCxnSpPr>
+        <p:spPr>
+          <a:xfrm>
+            <a:off x="2944368" y="5632704"/>
+            <a:ext cx="137160" cy="155448"/>
+          </a:xfrm>
+          <a:prstGeom prst="line">
+            <a:avLst/>
+          </a:prstGeom>
+          <a:ln w="12700">
+            <a:solidFill>
+              <a:srgbClr val="B4C7D2"/>
+            </a:solidFill>
+          </a:ln>
+          <a:effectLst/>
+        </p:spPr>
+      </p:cxnSp>
+      <p:cxnSp>
+        <p:nvCxnSpPr>
+          <p:cNvPr id="21" name="C1-E29 line 19" descr="sci-ppt:o019"/>
+          <p:cNvCxnSpPr/>
+          <p:nvPr/>
+        </p:nvCxnSpPr>
+        <p:spPr>
+          <a:xfrm>
+            <a:off x="3127248" y="5632704"/>
+            <a:ext cx="137160" cy="155448"/>
+          </a:xfrm>
+          <a:prstGeom prst="line">
+            <a:avLst/>
+          </a:prstGeom>
+          <a:ln w="12700">
+            <a:solidFill>
+              <a:srgbClr val="B4C7D2"/>
+            </a:solidFill>
+          </a:ln>
+          <a:effectLst/>
+        </p:spPr>
+      </p:cxnSp>
+      <p:cxnSp>
+        <p:nvCxnSpPr>
+          <p:cNvPr id="22" name="C1-E29 line 20" descr="sci-ppt:o020"/>
+          <p:cNvCxnSpPr/>
+          <p:nvPr/>
+        </p:nvCxnSpPr>
+        <p:spPr>
+          <a:xfrm>
+            <a:off x="3310128" y="5632704"/>
+            <a:ext cx="137160" cy="155448"/>
+          </a:xfrm>
+          <a:prstGeom prst="line">
+            <a:avLst/>
+          </a:prstGeom>
+          <a:ln w="12700">
+            <a:solidFill>
+              <a:srgbClr val="B4C7D2"/>
+            </a:solidFill>
+          </a:ln>
+          <a:effectLst/>
+        </p:spPr>
+      </p:cxnSp>
+      <p:cxnSp>
+        <p:nvCxnSpPr>
+          <p:cNvPr id="23" name="C1-E29 line 21" descr="sci-ppt:o021"/>
+          <p:cNvCxnSpPr/>
+          <p:nvPr/>
+        </p:nvCxnSpPr>
+        <p:spPr>
+          <a:xfrm>
+            <a:off x="3493008" y="5632704"/>
+            <a:ext cx="137160" cy="155448"/>
+          </a:xfrm>
+          <a:prstGeom prst="line">
+            <a:avLst/>
+          </a:prstGeom>
+          <a:ln w="12700">
+            <a:solidFill>
+              <a:srgbClr val="B4C7D2"/>
+            </a:solidFill>
+          </a:ln>
+          <a:effectLst/>
+        </p:spPr>
+      </p:cxnSp>
+      <p:cxnSp>
+        <p:nvCxnSpPr>
+          <p:cNvPr id="24" name="C1-E29 line 22" descr="sci-ppt:o022"/>
+          <p:cNvCxnSpPr/>
+          <p:nvPr/>
+        </p:nvCxnSpPr>
+        <p:spPr>
+          <a:xfrm>
+            <a:off x="3675887" y="5632704"/>
+            <a:ext cx="137161" cy="155448"/>
+          </a:xfrm>
+          <a:prstGeom prst="line">
+            <a:avLst/>
+          </a:prstGeom>
+          <a:ln w="12700">
+            <a:solidFill>
+              <a:srgbClr val="B4C7D2"/>
+            </a:solidFill>
+          </a:ln>
+          <a:effectLst/>
+        </p:spPr>
+      </p:cxnSp>
+      <p:cxnSp>
+        <p:nvCxnSpPr>
+          <p:cNvPr id="25" name="C1-E29 line 23" descr="sci-ppt:o023"/>
+          <p:cNvCxnSpPr/>
+          <p:nvPr/>
+        </p:nvCxnSpPr>
+        <p:spPr>
+          <a:xfrm>
+            <a:off x="3858768" y="5632704"/>
+            <a:ext cx="137160" cy="155448"/>
+          </a:xfrm>
+          <a:prstGeom prst="line">
+            <a:avLst/>
+          </a:prstGeom>
+          <a:ln w="12700">
+            <a:solidFill>
+              <a:srgbClr val="B4C7D2"/>
+            </a:solidFill>
+          </a:ln>
+          <a:effectLst/>
+        </p:spPr>
+      </p:cxnSp>
+      <p:cxnSp>
+        <p:nvCxnSpPr>
+          <p:cNvPr id="26" name="C1-E29 line 24" descr="sci-ppt:o024"/>
+          <p:cNvCxnSpPr/>
+          <p:nvPr/>
+        </p:nvCxnSpPr>
+        <p:spPr>
+          <a:xfrm>
+            <a:off x="4041648" y="5632704"/>
+            <a:ext cx="137160" cy="155448"/>
+          </a:xfrm>
+          <a:prstGeom prst="line">
+            <a:avLst/>
+          </a:prstGeom>
+          <a:ln w="12700">
+            <a:solidFill>
+              <a:srgbClr val="B4C7D2"/>
+            </a:solidFill>
+          </a:ln>
+          <a:effectLst/>
+        </p:spPr>
+      </p:cxnSp>
+      <p:cxnSp>
+        <p:nvCxnSpPr>
+          <p:cNvPr id="27" name="C1-E29 line 25" descr="sci-ppt:o025"/>
+          <p:cNvCxnSpPr/>
+          <p:nvPr/>
+        </p:nvCxnSpPr>
+        <p:spPr>
+          <a:xfrm>
+            <a:off x="4224528" y="5632704"/>
+            <a:ext cx="137160" cy="155448"/>
+          </a:xfrm>
+          <a:prstGeom prst="line">
+            <a:avLst/>
+          </a:prstGeom>
+          <a:ln w="12700">
+            <a:solidFill>
+              <a:srgbClr val="B4C7D2"/>
+            </a:solidFill>
+          </a:ln>
+          <a:effectLst/>
+        </p:spPr>
+      </p:cxnSp>
+      <p:cxnSp>
+        <p:nvCxnSpPr>
+          <p:cNvPr id="28" name="C1-E29 line 26" descr="sci-ppt:o026"/>
+          <p:cNvCxnSpPr/>
+          <p:nvPr/>
+        </p:nvCxnSpPr>
+        <p:spPr>
+          <a:xfrm>
+            <a:off x="4407407" y="5632704"/>
+            <a:ext cx="137161" cy="155448"/>
+          </a:xfrm>
+          <a:prstGeom prst="line">
+            <a:avLst/>
+          </a:prstGeom>
+          <a:ln w="12700">
+            <a:solidFill>
+              <a:srgbClr val="B4C7D2"/>
+            </a:solidFill>
+          </a:ln>
+          <a:effectLst/>
+        </p:spPr>
+      </p:cxnSp>
+      <p:cxnSp>
+        <p:nvCxnSpPr>
+          <p:cNvPr id="29" name="C1-E29 line 27" descr="sci-ppt:o027"/>
+          <p:cNvCxnSpPr/>
+          <p:nvPr/>
+        </p:nvCxnSpPr>
+        <p:spPr>
+          <a:xfrm>
+            <a:off x="4590288" y="5632704"/>
+            <a:ext cx="137160" cy="155448"/>
+          </a:xfrm>
+          <a:prstGeom prst="line">
+            <a:avLst/>
+          </a:prstGeom>
+          <a:ln w="12700">
+            <a:solidFill>
+              <a:srgbClr val="B4C7D2"/>
+            </a:solidFill>
+          </a:ln>
+          <a:effectLst/>
+        </p:spPr>
+      </p:cxnSp>
+      <p:cxnSp>
+        <p:nvCxnSpPr>
+          <p:cNvPr id="30" name="C1-E29 line 28" descr="sci-ppt:o028"/>
+          <p:cNvCxnSpPr/>
+          <p:nvPr/>
+        </p:nvCxnSpPr>
+        <p:spPr>
+          <a:xfrm>
+            <a:off x="4773168" y="5632704"/>
+            <a:ext cx="137160" cy="155448"/>
+          </a:xfrm>
+          <a:prstGeom prst="line">
+            <a:avLst/>
+          </a:prstGeom>
+          <a:ln w="12700">
+            <a:solidFill>
+              <a:srgbClr val="B4C7D2"/>
+            </a:solidFill>
+          </a:ln>
+          <a:effectLst/>
+        </p:spPr>
+      </p:cxnSp>
+      <p:cxnSp>
+        <p:nvCxnSpPr>
+          <p:cNvPr id="31" name="C1-E29 line 29" descr="sci-ppt:o029"/>
+          <p:cNvCxnSpPr/>
+          <p:nvPr/>
+        </p:nvCxnSpPr>
+        <p:spPr>
+          <a:xfrm>
+            <a:off x="4956048" y="5632704"/>
+            <a:ext cx="137160" cy="155448"/>
+          </a:xfrm>
+          <a:prstGeom prst="line">
+            <a:avLst/>
+          </a:prstGeom>
+          <a:ln w="12700">
+            <a:solidFill>
+              <a:srgbClr val="B4C7D2"/>
+            </a:solidFill>
+          </a:ln>
+          <a:effectLst/>
+        </p:spPr>
+      </p:cxnSp>
+      <p:cxnSp>
+        <p:nvCxnSpPr>
+          <p:cNvPr id="32" name="C1-E29 line 30" descr="sci-ppt:o030"/>
+          <p:cNvCxnSpPr/>
+          <p:nvPr/>
+        </p:nvCxnSpPr>
+        <p:spPr>
+          <a:xfrm>
+            <a:off x="5138928" y="5632704"/>
+            <a:ext cx="137160" cy="155448"/>
+          </a:xfrm>
+          <a:prstGeom prst="line">
+            <a:avLst/>
+          </a:prstGeom>
+          <a:ln w="12700">
+            <a:solidFill>
+              <a:srgbClr val="B4C7D2"/>
+            </a:solidFill>
+          </a:ln>
+          <a:effectLst/>
+        </p:spPr>
+      </p:cxnSp>
+      <p:cxnSp>
+        <p:nvCxnSpPr>
+          <p:cNvPr id="33" name="C1-E29 line 31" descr="sci-ppt:o031"/>
+          <p:cNvCxnSpPr/>
+          <p:nvPr/>
+        </p:nvCxnSpPr>
+        <p:spPr>
+          <a:xfrm>
+            <a:off x="5321807" y="5632704"/>
+            <a:ext cx="137161" cy="155448"/>
+          </a:xfrm>
+          <a:prstGeom prst="line">
+            <a:avLst/>
+          </a:prstGeom>
+          <a:ln w="12700">
+            <a:solidFill>
+              <a:srgbClr val="B4C7D2"/>
+            </a:solidFill>
+          </a:ln>
+          <a:effectLst/>
+        </p:spPr>
+      </p:cxnSp>
+      <p:cxnSp>
+        <p:nvCxnSpPr>
+          <p:cNvPr id="34" name="C1-E29 arrow 32" descr="sci-ppt:o032"/>
+          <p:cNvCxnSpPr/>
+          <p:nvPr/>
+        </p:nvCxnSpPr>
+        <p:spPr>
+          <a:xfrm>
+            <a:off x="4837724" y="3383280"/>
+            <a:ext cx="502920" cy="0"/>
+          </a:xfrm>
+          <a:prstGeom prst="line">
+            <a:avLst/>
+          </a:prstGeom>
+          <a:ln w="27940">
             <a:solidFill>
               <a:srgbClr val="8EDBD4"/>
             </a:solidFill>
@@ -3222,16 +4157,136 @@
           <a:effectLst/>
         </p:spPr>
       </p:cxnSp>
-      <p:sp>
-        <p:nvSpPr>
-          <p:cNvPr id="6" name="text5" descr="sci-ppt:C1-E29-005"/>
+      <p:cxnSp>
+        <p:nvCxnSpPr>
+          <p:cNvPr id="35" name="C1-E29 arrow 33" descr="sci-ppt:o033"/>
+          <p:cNvCxnSpPr/>
+          <p:nvPr/>
+        </p:nvCxnSpPr>
+        <p:spPr>
+          <a:xfrm flipV="1">
+            <a:off x="3698885" y="2192509"/>
+            <a:ext cx="251460" cy="435542"/>
+          </a:xfrm>
+          <a:prstGeom prst="line">
+            <a:avLst/>
+          </a:prstGeom>
+          <a:ln w="27940">
+            <a:solidFill>
+              <a:srgbClr val="8EDBD4"/>
+            </a:solidFill>
+            <a:headEnd type="none" w="med" len="med"/>
+            <a:tailEnd type="triangle" w="med" len="med"/>
+          </a:ln>
+          <a:effectLst/>
+        </p:spPr>
+      </p:cxnSp>
+      <p:cxnSp>
+        <p:nvCxnSpPr>
+          <p:cNvPr id="36" name="C1-E29 arrow 34" descr="sci-ppt:o034"/>
+          <p:cNvCxnSpPr/>
+          <p:nvPr/>
+        </p:nvCxnSpPr>
+        <p:spPr>
+          <a:xfrm flipH="1" flipV="1">
+            <a:off x="2343287" y="2289437"/>
+            <a:ext cx="251460" cy="435541"/>
+          </a:xfrm>
+          <a:prstGeom prst="line">
+            <a:avLst/>
+          </a:prstGeom>
+          <a:ln w="27940">
+            <a:solidFill>
+              <a:srgbClr val="8EDBD4"/>
+            </a:solidFill>
+            <a:headEnd type="none" w="med" len="med"/>
+            <a:tailEnd type="triangle" w="med" len="med"/>
+          </a:ln>
+          <a:effectLst/>
+        </p:spPr>
+      </p:cxnSp>
+      <p:cxnSp>
+        <p:nvCxnSpPr>
+          <p:cNvPr id="37" name="C1-E29 arrow 35" descr="sci-ppt:o035"/>
+          <p:cNvCxnSpPr/>
+          <p:nvPr/>
+        </p:nvCxnSpPr>
+        <p:spPr>
+          <a:xfrm flipH="1">
+            <a:off x="1180124" y="3383280"/>
+            <a:ext cx="502920" cy="0"/>
+          </a:xfrm>
+          <a:prstGeom prst="line">
+            <a:avLst/>
+          </a:prstGeom>
+          <a:ln w="27940">
+            <a:solidFill>
+              <a:srgbClr val="8EDBD4"/>
+            </a:solidFill>
+            <a:headEnd type="none" w="med" len="med"/>
+            <a:tailEnd type="triangle" w="med" len="med"/>
+          </a:ln>
+          <a:effectLst/>
+        </p:spPr>
+      </p:cxnSp>
+      <p:cxnSp>
+        <p:nvCxnSpPr>
+          <p:cNvPr id="38" name="C1-E29 arrow 36" descr="sci-ppt:o036"/>
+          <p:cNvCxnSpPr/>
+          <p:nvPr/>
+        </p:nvCxnSpPr>
+        <p:spPr>
+          <a:xfrm flipH="1">
+            <a:off x="2343287" y="4041581"/>
+            <a:ext cx="251460" cy="435541"/>
+          </a:xfrm>
+          <a:prstGeom prst="line">
+            <a:avLst/>
+          </a:prstGeom>
+          <a:ln w="27940">
+            <a:solidFill>
+              <a:srgbClr val="8EDBD4"/>
+            </a:solidFill>
+            <a:headEnd type="none" w="med" len="med"/>
+            <a:tailEnd type="triangle" w="med" len="med"/>
+          </a:ln>
+          <a:effectLst/>
+        </p:spPr>
+      </p:cxnSp>
+      <p:cxnSp>
+        <p:nvCxnSpPr>
+          <p:cNvPr id="39" name="C1-E29 arrow 37" descr="sci-ppt:o037"/>
+          <p:cNvCxnSpPr/>
+          <p:nvPr/>
+        </p:nvCxnSpPr>
+        <p:spPr>
+          <a:xfrm>
+            <a:off x="3698885" y="4138508"/>
+            <a:ext cx="251460" cy="435542"/>
+          </a:xfrm>
+          <a:prstGeom prst="line">
+            <a:avLst/>
+          </a:prstGeom>
+          <a:ln w="27940">
+            <a:solidFill>
+              <a:srgbClr val="8EDBD4"/>
+            </a:solidFill>
+            <a:headEnd type="none" w="med" len="med"/>
+            <a:tailEnd type="triangle" w="med" len="med"/>
+          </a:ln>
+          <a:effectLst/>
+        </p:spPr>
+      </p:cxnSp>
+      <p:sp>
+        <p:nvSpPr>
+          <p:cNvPr id="40" name="C1-E29 text 38" descr="sci-ppt:o038"/>
           <p:cNvSpPr txBox="1"/>
           <p:nvPr/>
         </p:nvSpPr>
         <p:spPr>
           <a:xfrm>
-            <a:off x="5120640" y="2072640"/>
-            <a:ext cx="5364480" cy="396849"/>
+            <a:off x="502920" y="4846320"/>
+            <a:ext cx="5212080" cy="417576"/>
           </a:xfrm>
           <a:prstGeom prst="rect">
             <a:avLst/>
@@ -3240,7 +4295,7 @@
           <a:effectLst/>
         </p:spPr>
         <p:txBody>
-          <a:bodyPr wrap="none" lIns="27432" rIns="27432" tIns="18288" bIns="18288" anchor="ctr">
+          <a:bodyPr wrap="none" lIns="18288" rIns="18288" tIns="18288" bIns="18288" anchor="t">
             <a:spAutoFit/>
           </a:bodyPr>
           <a:lstStyle/>
@@ -3251,39 +4306,15 @@
               </a:spcAft>
             </a:pPr>
             <a:r>
-              <a:rPr sz="2016" b="0" i="0">
+              <a:rPr sz="1200" b="0" i="0">
                 <a:solidFill>
                   <a:srgbClr val="E7F0F3"/>
                 </a:solidFill>
                 <a:latin typeface="Arial"/>
               </a:rPr>
-              <a:t>Liquid u(x,t), p(x,t)</a:t>
-            </a:r>
-          </a:p>
-        </p:txBody>
-      </p:sp>
-      <p:sp>
-        <p:nvSpPr>
-          <p:cNvPr id="7" name="text6" descr="sci-ppt:C1-E29-006"/>
-          <p:cNvSpPr txBox="1"/>
-          <p:nvPr/>
-        </p:nvSpPr>
-        <p:spPr>
-          <a:xfrm>
-            <a:off x="7680960" y="3413760"/>
-            <a:ext cx="1950720" cy="359054"/>
-          </a:xfrm>
-          <a:prstGeom prst="rect">
-            <a:avLst/>
-          </a:prstGeom>
-          <a:noFill/>
-          <a:effectLst/>
-        </p:spPr>
-        <p:txBody>
-          <a:bodyPr wrap="none" lIns="27432" rIns="27432" tIns="18288" bIns="18288" anchor="ctr">
-            <a:spAutoFit/>
-          </a:bodyPr>
-          <a:lstStyle/>
+              <a:t>Surface velocity u = ∇φ differs from point to point; the shape</a:t>
+            </a:r>
+          </a:p>
           <a:p>
             <a:pPr algn="l">
               <a:spcAft>
@@ -3291,27 +4322,27 @@
               </a:spcAft>
             </a:pPr>
             <a:r>
-              <a:rPr sz="1823" b="0" i="0">
+              <a:rPr sz="1200" b="0" i="0">
                 <a:solidFill>
                   <a:srgbClr val="E7F0F3"/>
                 </a:solidFill>
                 <a:latin typeface="Arial"/>
               </a:rPr>
-              <a:t>Outlet</a:t>
-            </a:r>
-          </a:p>
-        </p:txBody>
-      </p:sp>
-      <p:sp>
-        <p:nvSpPr>
-          <p:cNvPr id="8" name="text7" descr="sci-ppt:C1-E29-007"/>
+              <a:t>changes as it is carried along.</a:t>
+            </a:r>
+          </a:p>
+        </p:txBody>
+      </p:sp>
+      <p:sp>
+        <p:nvSpPr>
+          <p:cNvPr id="41" name="C1-E29 text 39" descr="sci-ppt:o039"/>
           <p:cNvSpPr txBox="1"/>
           <p:nvPr/>
         </p:nvSpPr>
         <p:spPr>
           <a:xfrm>
-            <a:off x="1584960" y="4206240"/>
-            <a:ext cx="9753600" cy="359054"/>
+            <a:off x="6126480" y="914400"/>
+            <a:ext cx="5669280" cy="262636"/>
           </a:xfrm>
           <a:prstGeom prst="rect">
             <a:avLst/>
@@ -3320,7 +4351,7 @@
           <a:effectLst/>
         </p:spPr>
         <p:txBody>
-          <a:bodyPr wrap="none" lIns="27432" rIns="27432" tIns="18288" bIns="18288" anchor="ctr">
+          <a:bodyPr wrap="none" lIns="18288" rIns="18288" tIns="18288" bIns="18288" anchor="t">
             <a:spAutoFit/>
           </a:bodyPr>
           <a:lstStyle/>
@@ -3331,27 +4362,299 @@
               </a:spcAft>
             </a:pPr>
             <a:r>
-              <a:rPr sz="1823" b="0" i="0">
+              <a:rPr sz="1400" b="1" i="0">
+                <a:solidFill>
+                  <a:srgbClr val="8EDBD4"/>
+                </a:solidFill>
+                <a:latin typeface="Arial"/>
+              </a:rPr>
+              <a:t>Closure loop (inviscid, before impact)</a:t>
+            </a:r>
+          </a:p>
+        </p:txBody>
+      </p:sp>
+      <p:sp>
+        <p:nvSpPr>
+          <p:cNvPr id="42" name="C1-E29 round_rect 40" descr="sci-ppt:o040"/>
+          <p:cNvSpPr/>
+          <p:nvPr/>
+        </p:nvSpPr>
+        <p:spPr>
+          <a:xfrm>
+            <a:off x="6126480" y="1371600"/>
+            <a:ext cx="5715000" cy="914400"/>
+          </a:xfrm>
+          <a:prstGeom prst="roundRect">
+            <a:avLst/>
+          </a:prstGeom>
+          <a:solidFill>
+            <a:srgbClr val="213E4B"/>
+          </a:solidFill>
+          <a:ln w="20320">
+            <a:solidFill>
+              <a:srgbClr val="8EDBD4"/>
+            </a:solidFill>
+          </a:ln>
+          <a:effectLst/>
+        </p:spPr>
+        <p:txBody>
+          <a:bodyPr rtlCol="0" anchor="ctr"/>
+          <a:lstStyle/>
+          <a:p>
+            <a:pPr algn="ctr"/>
+          </a:p>
+        </p:txBody>
+      </p:sp>
+      <p:sp>
+        <p:nvSpPr>
+          <p:cNvPr id="43" name="C1-E29 ellipse 41" descr="sci-ppt:o041"/>
+          <p:cNvSpPr/>
+          <p:nvPr/>
+        </p:nvSpPr>
+        <p:spPr>
+          <a:xfrm>
+            <a:off x="6227064" y="1609344"/>
+            <a:ext cx="438912" cy="438912"/>
+          </a:xfrm>
+          <a:prstGeom prst="ellipse">
+            <a:avLst/>
+          </a:prstGeom>
+          <a:solidFill>
+            <a:srgbClr val="8EDBD4"/>
+          </a:solidFill>
+          <a:ln w="12700">
+            <a:solidFill>
+              <a:srgbClr val="8EDBD4"/>
+            </a:solidFill>
+          </a:ln>
+          <a:effectLst/>
+        </p:spPr>
+        <p:txBody>
+          <a:bodyPr rtlCol="0" anchor="ctr"/>
+          <a:lstStyle/>
+          <a:p>
+            <a:pPr algn="ctr"/>
+          </a:p>
+        </p:txBody>
+      </p:sp>
+      <p:sp>
+        <p:nvSpPr>
+          <p:cNvPr id="44" name="C1-E29 text 42" descr="sci-ppt:o042"/>
+          <p:cNvSpPr txBox="1"/>
+          <p:nvPr/>
+        </p:nvSpPr>
+        <p:spPr>
+          <a:xfrm>
+            <a:off x="6336792" y="1645920"/>
+            <a:ext cx="228600" cy="247142"/>
+          </a:xfrm>
+          <a:prstGeom prst="rect">
+            <a:avLst/>
+          </a:prstGeom>
+          <a:noFill/>
+          <a:effectLst/>
+        </p:spPr>
+        <p:txBody>
+          <a:bodyPr wrap="none" lIns="18288" rIns="18288" tIns="18288" bIns="18288" anchor="t">
+            <a:spAutoFit/>
+          </a:bodyPr>
+          <a:lstStyle/>
+          <a:p>
+            <a:pPr algn="ctr">
+              <a:spcAft>
+                <a:spcPts val="0"/>
+              </a:spcAft>
+            </a:pPr>
+            <a:r>
+              <a:rPr sz="1300" b="1" i="0">
+                <a:solidFill>
+                  <a:srgbClr val="142632"/>
+                </a:solidFill>
+                <a:latin typeface="Arial"/>
+              </a:rPr>
+              <a:t>1</a:t>
+            </a:r>
+          </a:p>
+        </p:txBody>
+      </p:sp>
+      <p:sp>
+        <p:nvSpPr>
+          <p:cNvPr id="45" name="C1-E29 text 43" descr="sci-ppt:o043"/>
+          <p:cNvSpPr txBox="1"/>
+          <p:nvPr/>
+        </p:nvSpPr>
+        <p:spPr>
+          <a:xfrm>
+            <a:off x="6858000" y="1444752"/>
+            <a:ext cx="4892040" cy="247142"/>
+          </a:xfrm>
+          <a:prstGeom prst="rect">
+            <a:avLst/>
+          </a:prstGeom>
+          <a:noFill/>
+          <a:effectLst/>
+        </p:spPr>
+        <p:txBody>
+          <a:bodyPr wrap="none" lIns="18288" rIns="18288" tIns="18288" bIns="18288" anchor="t">
+            <a:spAutoFit/>
+          </a:bodyPr>
+          <a:lstStyle/>
+          <a:p>
+            <a:pPr algn="l">
+              <a:spcAft>
+                <a:spcPts val="0"/>
+              </a:spcAft>
+            </a:pPr>
+            <a:r>
+              <a:rPr sz="1300" b="1" i="0">
+                <a:solidFill>
+                  <a:srgbClr val="8EDBD4"/>
+                </a:solidFill>
+                <a:latin typeface="Arial"/>
+              </a:rPr>
+              <a:t>Known φ on Γ</a:t>
+            </a:r>
+          </a:p>
+        </p:txBody>
+      </p:sp>
+      <p:sp>
+        <p:nvSpPr>
+          <p:cNvPr id="46" name="C1-E29 text 44" descr="sci-ppt:o044"/>
+          <p:cNvSpPr txBox="1"/>
+          <p:nvPr/>
+        </p:nvSpPr>
+        <p:spPr>
+          <a:xfrm>
+            <a:off x="6858000" y="1828800"/>
+            <a:ext cx="4892040" cy="223900"/>
+          </a:xfrm>
+          <a:prstGeom prst="rect">
+            <a:avLst/>
+          </a:prstGeom>
+          <a:noFill/>
+          <a:effectLst/>
+        </p:spPr>
+        <p:txBody>
+          <a:bodyPr wrap="none" lIns="18288" rIns="18288" tIns="18288" bIns="18288" anchor="t">
+            <a:spAutoFit/>
+          </a:bodyPr>
+          <a:lstStyle/>
+          <a:p>
+            <a:pPr algn="l">
+              <a:spcAft>
+                <a:spcPts val="0"/>
+              </a:spcAft>
+            </a:pPr>
+            <a:r>
+              <a:rPr sz="1150" b="0" i="0">
                 <a:solidFill>
                   <a:srgbClr val="E7F0F3"/>
                 </a:solidFill>
                 <a:latin typeface="Arial"/>
               </a:rPr>
-              <a:t>Moving interface Gamma; spatial field required.</a:t>
-            </a:r>
-          </a:p>
-        </p:txBody>
-      </p:sp>
-      <p:sp>
-        <p:nvSpPr>
-          <p:cNvPr id="9" name="text8" descr="sci-ppt:C1-E29-008"/>
+              <a:t>solve ∇²φ = 0 in the liquid</a:t>
+            </a:r>
+          </a:p>
+        </p:txBody>
+      </p:sp>
+      <p:cxnSp>
+        <p:nvCxnSpPr>
+          <p:cNvPr id="47" name="C1-E29 arrow 45" descr="sci-ppt:o045"/>
+          <p:cNvCxnSpPr/>
+          <p:nvPr/>
+        </p:nvCxnSpPr>
+        <p:spPr>
+          <a:xfrm>
+            <a:off x="8961120" y="2286000"/>
+            <a:ext cx="0" cy="182880"/>
+          </a:xfrm>
+          <a:prstGeom prst="line">
+            <a:avLst/>
+          </a:prstGeom>
+          <a:ln w="25400">
+            <a:solidFill>
+              <a:srgbClr val="B4C7D2"/>
+            </a:solidFill>
+            <a:headEnd type="none" w="med" len="med"/>
+            <a:tailEnd type="triangle" w="med" len="med"/>
+          </a:ln>
+          <a:effectLst/>
+        </p:spPr>
+      </p:cxnSp>
+      <p:sp>
+        <p:nvSpPr>
+          <p:cNvPr id="48" name="C1-E29 round_rect 46" descr="sci-ppt:o046"/>
+          <p:cNvSpPr/>
+          <p:nvPr/>
+        </p:nvSpPr>
+        <p:spPr>
+          <a:xfrm>
+            <a:off x="6126480" y="2468880"/>
+            <a:ext cx="5715000" cy="914400"/>
+          </a:xfrm>
+          <a:prstGeom prst="roundRect">
+            <a:avLst/>
+          </a:prstGeom>
+          <a:solidFill>
+            <a:srgbClr val="213E4B"/>
+          </a:solidFill>
+          <a:ln w="20320">
+            <a:solidFill>
+              <a:srgbClr val="7FC8F8"/>
+            </a:solidFill>
+          </a:ln>
+          <a:effectLst/>
+        </p:spPr>
+        <p:txBody>
+          <a:bodyPr rtlCol="0" anchor="ctr"/>
+          <a:lstStyle/>
+          <a:p>
+            <a:pPr algn="ctr"/>
+          </a:p>
+        </p:txBody>
+      </p:sp>
+      <p:sp>
+        <p:nvSpPr>
+          <p:cNvPr id="49" name="C1-E29 ellipse 47" descr="sci-ppt:o047"/>
+          <p:cNvSpPr/>
+          <p:nvPr/>
+        </p:nvSpPr>
+        <p:spPr>
+          <a:xfrm>
+            <a:off x="6227064" y="2706624"/>
+            <a:ext cx="438912" cy="438912"/>
+          </a:xfrm>
+          <a:prstGeom prst="ellipse">
+            <a:avLst/>
+          </a:prstGeom>
+          <a:solidFill>
+            <a:srgbClr val="7FC8F8"/>
+          </a:solidFill>
+          <a:ln w="12700">
+            <a:solidFill>
+              <a:srgbClr val="7FC8F8"/>
+            </a:solidFill>
+          </a:ln>
+          <a:effectLst/>
+        </p:spPr>
+        <p:txBody>
+          <a:bodyPr rtlCol="0" anchor="ctr"/>
+          <a:lstStyle/>
+          <a:p>
+            <a:pPr algn="ctr"/>
+          </a:p>
+        </p:txBody>
+      </p:sp>
+      <p:sp>
+        <p:nvSpPr>
+          <p:cNvPr id="50" name="C1-E29 text 48" descr="sci-ppt:o048"/>
           <p:cNvSpPr txBox="1"/>
           <p:nvPr/>
         </p:nvSpPr>
         <p:spPr>
           <a:xfrm>
-            <a:off x="365760" y="4974336"/>
-            <a:ext cx="5547360" cy="321259"/>
+            <a:off x="6336792" y="2743200"/>
+            <a:ext cx="228600" cy="247142"/>
           </a:xfrm>
           <a:prstGeom prst="rect">
             <a:avLst/>
@@ -3360,7 +4663,47 @@
           <a:effectLst/>
         </p:spPr>
         <p:txBody>
-          <a:bodyPr wrap="none" lIns="27432" rIns="27432" tIns="18288" bIns="18288" anchor="ctr">
+          <a:bodyPr wrap="none" lIns="18288" rIns="18288" tIns="18288" bIns="18288" anchor="t">
+            <a:spAutoFit/>
+          </a:bodyPr>
+          <a:lstStyle/>
+          <a:p>
+            <a:pPr algn="ctr">
+              <a:spcAft>
+                <a:spcPts val="0"/>
+              </a:spcAft>
+            </a:pPr>
+            <a:r>
+              <a:rPr sz="1300" b="1" i="0">
+                <a:solidFill>
+                  <a:srgbClr val="142632"/>
+                </a:solidFill>
+                <a:latin typeface="Arial"/>
+              </a:rPr>
+              <a:t>2</a:t>
+            </a:r>
+          </a:p>
+        </p:txBody>
+      </p:sp>
+      <p:sp>
+        <p:nvSpPr>
+          <p:cNvPr id="51" name="C1-E29 text 49" descr="sci-ppt:o049"/>
+          <p:cNvSpPr txBox="1"/>
+          <p:nvPr/>
+        </p:nvSpPr>
+        <p:spPr>
+          <a:xfrm>
+            <a:off x="6858000" y="2542032"/>
+            <a:ext cx="4892040" cy="247142"/>
+          </a:xfrm>
+          <a:prstGeom prst="rect">
+            <a:avLst/>
+          </a:prstGeom>
+          <a:noFill/>
+          <a:effectLst/>
+        </p:spPr>
+        <p:txBody>
+          <a:bodyPr wrap="none" lIns="18288" rIns="18288" tIns="18288" bIns="18288" anchor="t">
             <a:spAutoFit/>
           </a:bodyPr>
           <a:lstStyle/>
@@ -3371,27 +4714,155 @@
               </a:spcAft>
             </a:pPr>
             <a:r>
-              <a:rPr sz="1632" b="0" i="0">
+              <a:rPr sz="1300" b="1" i="0">
+                <a:solidFill>
+                  <a:srgbClr val="7FC8F8"/>
+                </a:solidFill>
+                <a:latin typeface="Arial"/>
+              </a:rPr>
+              <a:t>u = ∇φ at the surface</a:t>
+            </a:r>
+          </a:p>
+        </p:txBody>
+      </p:sp>
+      <p:sp>
+        <p:nvSpPr>
+          <p:cNvPr id="52" name="C1-E29 text 50" descr="sci-ppt:o050"/>
+          <p:cNvSpPr txBox="1"/>
+          <p:nvPr/>
+        </p:nvSpPr>
+        <p:spPr>
+          <a:xfrm>
+            <a:off x="6858000" y="2926080"/>
+            <a:ext cx="4892040" cy="223900"/>
+          </a:xfrm>
+          <a:prstGeom prst="rect">
+            <a:avLst/>
+          </a:prstGeom>
+          <a:noFill/>
+          <a:effectLst/>
+        </p:spPr>
+        <p:txBody>
+          <a:bodyPr wrap="none" lIns="18288" rIns="18288" tIns="18288" bIns="18288" anchor="t">
+            <a:spAutoFit/>
+          </a:bodyPr>
+          <a:lstStyle/>
+          <a:p>
+            <a:pPr algn="l">
+              <a:spcAft>
+                <a:spcPts val="0"/>
+              </a:spcAft>
+            </a:pPr>
+            <a:r>
+              <a:rPr sz="1150" b="0" i="0">
                 <a:solidFill>
                   <a:srgbClr val="E7F0F3"/>
                 </a:solidFill>
                 <a:latin typeface="Arial"/>
               </a:rPr>
-              <a:t>X(t) ∈ Γ</a:t>
-            </a:r>
-          </a:p>
-        </p:txBody>
-      </p:sp>
-      <p:sp>
-        <p:nvSpPr>
-          <p:cNvPr id="10" name="text9" descr="sci-ppt:C1-E29-009"/>
+              <a:t>normal speed Vₙ = ∂φ/∂n</a:t>
+            </a:r>
+          </a:p>
+        </p:txBody>
+      </p:sp>
+      <p:cxnSp>
+        <p:nvCxnSpPr>
+          <p:cNvPr id="53" name="C1-E29 arrow 51" descr="sci-ppt:o051"/>
+          <p:cNvCxnSpPr/>
+          <p:nvPr/>
+        </p:nvCxnSpPr>
+        <p:spPr>
+          <a:xfrm>
+            <a:off x="8961120" y="3383280"/>
+            <a:ext cx="0" cy="182880"/>
+          </a:xfrm>
+          <a:prstGeom prst="line">
+            <a:avLst/>
+          </a:prstGeom>
+          <a:ln w="25400">
+            <a:solidFill>
+              <a:srgbClr val="B4C7D2"/>
+            </a:solidFill>
+            <a:headEnd type="none" w="med" len="med"/>
+            <a:tailEnd type="triangle" w="med" len="med"/>
+          </a:ln>
+          <a:effectLst/>
+        </p:spPr>
+      </p:cxnSp>
+      <p:sp>
+        <p:nvSpPr>
+          <p:cNvPr id="54" name="C1-E29 round_rect 52" descr="sci-ppt:o052"/>
+          <p:cNvSpPr/>
+          <p:nvPr/>
+        </p:nvSpPr>
+        <p:spPr>
+          <a:xfrm>
+            <a:off x="6126480" y="3566160"/>
+            <a:ext cx="5715000" cy="914400"/>
+          </a:xfrm>
+          <a:prstGeom prst="roundRect">
+            <a:avLst/>
+          </a:prstGeom>
+          <a:solidFill>
+            <a:srgbClr val="213E4B"/>
+          </a:solidFill>
+          <a:ln w="20320">
+            <a:solidFill>
+              <a:srgbClr val="F2B880"/>
+            </a:solidFill>
+          </a:ln>
+          <a:effectLst/>
+        </p:spPr>
+        <p:txBody>
+          <a:bodyPr rtlCol="0" anchor="ctr"/>
+          <a:lstStyle/>
+          <a:p>
+            <a:pPr algn="ctr"/>
+          </a:p>
+        </p:txBody>
+      </p:sp>
+      <p:sp>
+        <p:nvSpPr>
+          <p:cNvPr id="55" name="C1-E29 ellipse 53" descr="sci-ppt:o053"/>
+          <p:cNvSpPr/>
+          <p:nvPr/>
+        </p:nvSpPr>
+        <p:spPr>
+          <a:xfrm>
+            <a:off x="6227064" y="3803904"/>
+            <a:ext cx="438912" cy="438912"/>
+          </a:xfrm>
+          <a:prstGeom prst="ellipse">
+            <a:avLst/>
+          </a:prstGeom>
+          <a:solidFill>
+            <a:srgbClr val="F2B880"/>
+          </a:solidFill>
+          <a:ln w="12700">
+            <a:solidFill>
+              <a:srgbClr val="F2B880"/>
+            </a:solidFill>
+          </a:ln>
+          <a:effectLst/>
+        </p:spPr>
+        <p:txBody>
+          <a:bodyPr rtlCol="0" anchor="ctr"/>
+          <a:lstStyle/>
+          <a:p>
+            <a:pPr algn="ctr"/>
+          </a:p>
+        </p:txBody>
+      </p:sp>
+      <p:sp>
+        <p:nvSpPr>
+          <p:cNvPr id="56" name="C1-E29 text 54" descr="sci-ppt:o054"/>
           <p:cNvSpPr txBox="1"/>
           <p:nvPr/>
         </p:nvSpPr>
         <p:spPr>
           <a:xfrm>
-            <a:off x="365760" y="5266944"/>
-            <a:ext cx="5547360" cy="321259"/>
+            <a:off x="6336792" y="3840480"/>
+            <a:ext cx="228600" cy="247142"/>
           </a:xfrm>
           <a:prstGeom prst="rect">
             <a:avLst/>
@@ -3400,7 +4871,47 @@
           <a:effectLst/>
         </p:spPr>
         <p:txBody>
-          <a:bodyPr wrap="none" lIns="27432" rIns="27432" tIns="18288" bIns="18288" anchor="ctr">
+          <a:bodyPr wrap="none" lIns="18288" rIns="18288" tIns="18288" bIns="18288" anchor="t">
+            <a:spAutoFit/>
+          </a:bodyPr>
+          <a:lstStyle/>
+          <a:p>
+            <a:pPr algn="ctr">
+              <a:spcAft>
+                <a:spcPts val="0"/>
+              </a:spcAft>
+            </a:pPr>
+            <a:r>
+              <a:rPr sz="1300" b="1" i="0">
+                <a:solidFill>
+                  <a:srgbClr val="142632"/>
+                </a:solidFill>
+                <a:latin typeface="Arial"/>
+              </a:rPr>
+              <a:t>3</a:t>
+            </a:r>
+          </a:p>
+        </p:txBody>
+      </p:sp>
+      <p:sp>
+        <p:nvSpPr>
+          <p:cNvPr id="57" name="C1-E29 text 55" descr="sci-ppt:o055"/>
+          <p:cNvSpPr txBox="1"/>
+          <p:nvPr/>
+        </p:nvSpPr>
+        <p:spPr>
+          <a:xfrm>
+            <a:off x="6858000" y="3639312"/>
+            <a:ext cx="4892040" cy="247142"/>
+          </a:xfrm>
+          <a:prstGeom prst="rect">
+            <a:avLst/>
+          </a:prstGeom>
+          <a:noFill/>
+          <a:effectLst/>
+        </p:spPr>
+        <p:txBody>
+          <a:bodyPr wrap="none" lIns="18288" rIns="18288" tIns="18288" bIns="18288" anchor="t">
             <a:spAutoFit/>
           </a:bodyPr>
           <a:lstStyle/>
@@ -3411,27 +4922,155 @@
               </a:spcAft>
             </a:pPr>
             <a:r>
-              <a:rPr sz="1632" b="0" i="0">
+              <a:rPr sz="1300" b="1" i="0">
+                <a:solidFill>
+                  <a:srgbClr val="F2B880"/>
+                </a:solidFill>
+                <a:latin typeface="Arial"/>
+              </a:rPr>
+              <a:t>Advect: dX/dt = u(X, t)</a:t>
+            </a:r>
+          </a:p>
+        </p:txBody>
+      </p:sp>
+      <p:sp>
+        <p:nvSpPr>
+          <p:cNvPr id="58" name="C1-E29 text 56" descr="sci-ppt:o056"/>
+          <p:cNvSpPr txBox="1"/>
+          <p:nvPr/>
+        </p:nvSpPr>
+        <p:spPr>
+          <a:xfrm>
+            <a:off x="6858000" y="4023360"/>
+            <a:ext cx="4892040" cy="223900"/>
+          </a:xfrm>
+          <a:prstGeom prst="rect">
+            <a:avLst/>
+          </a:prstGeom>
+          <a:noFill/>
+          <a:effectLst/>
+        </p:spPr>
+        <p:txBody>
+          <a:bodyPr wrap="none" lIns="18288" rIns="18288" tIns="18288" bIns="18288" anchor="t">
+            <a:spAutoFit/>
+          </a:bodyPr>
+          <a:lstStyle/>
+          <a:p>
+            <a:pPr algn="l">
+              <a:spcAft>
+                <a:spcPts val="0"/>
+              </a:spcAft>
+            </a:pPr>
+            <a:r>
+              <a:rPr sz="1150" b="0" i="0">
                 <a:solidFill>
                   <a:srgbClr val="E7F0F3"/>
                 </a:solidFill>
                 <a:latin typeface="Arial"/>
               </a:rPr>
-              <a:t>φ</a:t>
-            </a:r>
-          </a:p>
-        </p:txBody>
-      </p:sp>
-      <p:sp>
-        <p:nvSpPr>
-          <p:cNvPr id="11" name="text10" descr="sci-ppt:C1-E29-010"/>
+              <a:t>new shape Γ(t + dt), new curvature κ</a:t>
+            </a:r>
+          </a:p>
+        </p:txBody>
+      </p:sp>
+      <p:cxnSp>
+        <p:nvCxnSpPr>
+          <p:cNvPr id="59" name="C1-E29 arrow 57" descr="sci-ppt:o057"/>
+          <p:cNvCxnSpPr/>
+          <p:nvPr/>
+        </p:nvCxnSpPr>
+        <p:spPr>
+          <a:xfrm>
+            <a:off x="8961120" y="4480560"/>
+            <a:ext cx="0" cy="182880"/>
+          </a:xfrm>
+          <a:prstGeom prst="line">
+            <a:avLst/>
+          </a:prstGeom>
+          <a:ln w="25400">
+            <a:solidFill>
+              <a:srgbClr val="B4C7D2"/>
+            </a:solidFill>
+            <a:headEnd type="none" w="med" len="med"/>
+            <a:tailEnd type="triangle" w="med" len="med"/>
+          </a:ln>
+          <a:effectLst/>
+        </p:spPr>
+      </p:cxnSp>
+      <p:sp>
+        <p:nvSpPr>
+          <p:cNvPr id="60" name="C1-E29 round_rect 58" descr="sci-ppt:o058"/>
+          <p:cNvSpPr/>
+          <p:nvPr/>
+        </p:nvSpPr>
+        <p:spPr>
+          <a:xfrm>
+            <a:off x="6126480" y="4663440"/>
+            <a:ext cx="5715000" cy="914400"/>
+          </a:xfrm>
+          <a:prstGeom prst="roundRect">
+            <a:avLst/>
+          </a:prstGeom>
+          <a:solidFill>
+            <a:srgbClr val="213E4B"/>
+          </a:solidFill>
+          <a:ln w="20320">
+            <a:solidFill>
+              <a:srgbClr val="F28BA0"/>
+            </a:solidFill>
+          </a:ln>
+          <a:effectLst/>
+        </p:spPr>
+        <p:txBody>
+          <a:bodyPr rtlCol="0" anchor="ctr"/>
+          <a:lstStyle/>
+          <a:p>
+            <a:pPr algn="ctr"/>
+          </a:p>
+        </p:txBody>
+      </p:sp>
+      <p:sp>
+        <p:nvSpPr>
+          <p:cNvPr id="61" name="C1-E29 ellipse 59" descr="sci-ppt:o059"/>
+          <p:cNvSpPr/>
+          <p:nvPr/>
+        </p:nvSpPr>
+        <p:spPr>
+          <a:xfrm>
+            <a:off x="6227064" y="4901184"/>
+            <a:ext cx="438912" cy="438912"/>
+          </a:xfrm>
+          <a:prstGeom prst="ellipse">
+            <a:avLst/>
+          </a:prstGeom>
+          <a:solidFill>
+            <a:srgbClr val="F28BA0"/>
+          </a:solidFill>
+          <a:ln w="12700">
+            <a:solidFill>
+              <a:srgbClr val="F28BA0"/>
+            </a:solidFill>
+          </a:ln>
+          <a:effectLst/>
+        </p:spPr>
+        <p:txBody>
+          <a:bodyPr rtlCol="0" anchor="ctr"/>
+          <a:lstStyle/>
+          <a:p>
+            <a:pPr algn="ctr"/>
+          </a:p>
+        </p:txBody>
+      </p:sp>
+      <p:sp>
+        <p:nvSpPr>
+          <p:cNvPr id="62" name="C1-E29 text 60" descr="sci-ppt:o060"/>
           <p:cNvSpPr txBox="1"/>
           <p:nvPr/>
         </p:nvSpPr>
         <p:spPr>
           <a:xfrm>
-            <a:off x="365760" y="5559552"/>
-            <a:ext cx="5547360" cy="321259"/>
+            <a:off x="6336792" y="4937760"/>
+            <a:ext cx="228600" cy="247142"/>
           </a:xfrm>
           <a:prstGeom prst="rect">
             <a:avLst/>
@@ -3440,7 +5079,47 @@
           <a:effectLst/>
         </p:spPr>
         <p:txBody>
-          <a:bodyPr wrap="none" lIns="27432" rIns="27432" tIns="18288" bIns="18288" anchor="ctr">
+          <a:bodyPr wrap="none" lIns="18288" rIns="18288" tIns="18288" bIns="18288" anchor="t">
+            <a:spAutoFit/>
+          </a:bodyPr>
+          <a:lstStyle/>
+          <a:p>
+            <a:pPr algn="ctr">
+              <a:spcAft>
+                <a:spcPts val="0"/>
+              </a:spcAft>
+            </a:pPr>
+            <a:r>
+              <a:rPr sz="1300" b="1" i="0">
+                <a:solidFill>
+                  <a:srgbClr val="142632"/>
+                </a:solidFill>
+                <a:latin typeface="Arial"/>
+              </a:rPr>
+              <a:t>4</a:t>
+            </a:r>
+          </a:p>
+        </p:txBody>
+      </p:sp>
+      <p:sp>
+        <p:nvSpPr>
+          <p:cNvPr id="63" name="C1-E29 text 61" descr="sci-ppt:o061"/>
+          <p:cNvSpPr txBox="1"/>
+          <p:nvPr/>
+        </p:nvSpPr>
+        <p:spPr>
+          <a:xfrm>
+            <a:off x="6858000" y="4736592"/>
+            <a:ext cx="4892040" cy="247142"/>
+          </a:xfrm>
+          <a:prstGeom prst="rect">
+            <a:avLst/>
+          </a:prstGeom>
+          <a:noFill/>
+          <a:effectLst/>
+        </p:spPr>
+        <p:txBody>
+          <a:bodyPr wrap="none" lIns="18288" rIns="18288" tIns="18288" bIns="18288" anchor="t">
             <a:spAutoFit/>
           </a:bodyPr>
           <a:lstStyle/>
@@ -3451,27 +5130,67 @@
               </a:spcAft>
             </a:pPr>
             <a:r>
-              <a:rPr sz="1632" b="0" i="0">
+              <a:rPr sz="1300" b="1" i="0">
+                <a:solidFill>
+                  <a:srgbClr val="F28BA0"/>
+                </a:solidFill>
+                <a:latin typeface="Arial"/>
+              </a:rPr>
+              <a:t>Update φ on Γ</a:t>
+            </a:r>
+          </a:p>
+        </p:txBody>
+      </p:sp>
+      <p:sp>
+        <p:nvSpPr>
+          <p:cNvPr id="64" name="C1-E29 text 62" descr="sci-ppt:o062"/>
+          <p:cNvSpPr txBox="1"/>
+          <p:nvPr/>
+        </p:nvSpPr>
+        <p:spPr>
+          <a:xfrm>
+            <a:off x="6858000" y="5120640"/>
+            <a:ext cx="4892040" cy="223900"/>
+          </a:xfrm>
+          <a:prstGeom prst="rect">
+            <a:avLst/>
+          </a:prstGeom>
+          <a:noFill/>
+          <a:effectLst/>
+        </p:spPr>
+        <p:txBody>
+          <a:bodyPr wrap="none" lIns="18288" rIns="18288" tIns="18288" bIns="18288" anchor="t">
+            <a:spAutoFit/>
+          </a:bodyPr>
+          <a:lstStyle/>
+          <a:p>
+            <a:pPr algn="l">
+              <a:spcAft>
+                <a:spcPts val="0"/>
+              </a:spcAft>
+            </a:pPr>
+            <a:r>
+              <a:rPr sz="1150" b="0" i="0">
                 <a:solidFill>
                   <a:srgbClr val="E7F0F3"/>
                 </a:solidFill>
                 <a:latin typeface="Arial"/>
               </a:rPr>
-              <a:t>pb</a:t>
-            </a:r>
-          </a:p>
-        </p:txBody>
-      </p:sp>
-      <p:sp>
-        <p:nvSpPr>
-          <p:cNvPr id="12" name="text11" descr="sci-ppt:C1-E29-011"/>
+              <a:t>Dφ/Dt = ½|u|² + (p∞ − p_b − σκ)/ρ</a:t>
+            </a:r>
+          </a:p>
+        </p:txBody>
+      </p:sp>
+      <p:sp>
+        <p:nvSpPr>
+          <p:cNvPr id="65" name="C1-E29 text 63" descr="sci-ppt:o063"/>
           <p:cNvSpPr txBox="1"/>
           <p:nvPr/>
         </p:nvSpPr>
         <p:spPr>
           <a:xfrm>
-            <a:off x="365760" y="5852160"/>
-            <a:ext cx="5547360" cy="321259"/>
+            <a:off x="6126480" y="5806440"/>
+            <a:ext cx="5669280" cy="433070"/>
           </a:xfrm>
           <a:prstGeom prst="rect">
             <a:avLst/>
@@ -3480,7 +5199,7 @@
           <a:effectLst/>
         </p:spPr>
         <p:txBody>
-          <a:bodyPr wrap="none" lIns="27432" rIns="27432" tIns="18288" bIns="18288" anchor="ctr">
+          <a:bodyPr wrap="none" lIns="18288" rIns="18288" tIns="18288" bIns="18288" anchor="t">
             <a:spAutoFit/>
           </a:bodyPr>
           <a:lstStyle/>
@@ -3491,39 +5210,15 @@
               </a:spcAft>
             </a:pPr>
             <a:r>
-              <a:rPr sz="1632" b="0" i="0">
+              <a:rPr sz="1250" b="0" i="0">
                 <a:solidFill>
-                  <a:srgbClr val="E7F0F3"/>
+                  <a:srgbClr val="F2B880"/>
                 </a:solidFill>
                 <a:latin typeface="Arial"/>
               </a:rPr>
-              <a:t>σ</a:t>
-            </a:r>
-          </a:p>
-        </p:txBody>
-      </p:sp>
-      <p:sp>
-        <p:nvSpPr>
-          <p:cNvPr id="13" name="text12" descr="sci-ppt:C1-E29-012"/>
-          <p:cNvSpPr txBox="1"/>
-          <p:nvPr/>
-        </p:nvSpPr>
-        <p:spPr>
-          <a:xfrm>
-            <a:off x="365760" y="6144768"/>
-            <a:ext cx="5547360" cy="321259"/>
-          </a:xfrm>
-          <a:prstGeom prst="rect">
-            <a:avLst/>
-          </a:prstGeom>
-          <a:noFill/>
-          <a:effectLst/>
-        </p:spPr>
-        <p:txBody>
-          <a:bodyPr wrap="none" lIns="27432" rIns="27432" tIns="18288" bIns="18288" anchor="ctr">
-            <a:spAutoFit/>
-          </a:bodyPr>
-          <a:lstStyle/>
+              <a:t>The shape and the potential evolve together; changing geometry is</a:t>
+            </a:r>
+          </a:p>
           <a:p>
             <a:pPr algn="l">
               <a:spcAft>
@@ -3531,27 +5226,27 @@
               </a:spcAft>
             </a:pPr>
             <a:r>
-              <a:rPr sz="1632" b="0" i="0">
+              <a:rPr sz="1250" b="0" i="0">
                 <a:solidFill>
-                  <a:srgbClr val="E7F0F3"/>
+                  <a:srgbClr val="F2B880"/>
                 </a:solidFill>
                 <a:latin typeface="Arial"/>
               </a:rPr>
-              <a:t>ρ</a:t>
-            </a:r>
-          </a:p>
-        </p:txBody>
-      </p:sp>
-      <p:sp>
-        <p:nvSpPr>
-          <p:cNvPr id="14" name="text13" descr="sci-ppt:C1-E29-013"/>
+              <a:t>what creates focusing.</a:t>
+            </a:r>
+          </a:p>
+        </p:txBody>
+      </p:sp>
+      <p:sp>
+        <p:nvSpPr>
+          <p:cNvPr id="66" name="C1-E29 text 64" descr="sci-ppt:o064"/>
           <p:cNvSpPr txBox="1"/>
           <p:nvPr/>
         </p:nvSpPr>
         <p:spPr>
           <a:xfrm>
-            <a:off x="6156960" y="4974336"/>
-            <a:ext cx="5547360" cy="321259"/>
+            <a:off x="320040" y="6510528"/>
+            <a:ext cx="11521440" cy="200660"/>
           </a:xfrm>
           <a:prstGeom prst="rect">
             <a:avLst/>
@@ -3560,7 +5255,7 @@
           <a:effectLst/>
         </p:spPr>
         <p:txBody>
-          <a:bodyPr wrap="none" lIns="27432" rIns="27432" tIns="18288" bIns="18288" anchor="ctr">
+          <a:bodyPr wrap="none" lIns="18288" rIns="18288" tIns="18288" bIns="18288" anchor="t">
             <a:spAutoFit/>
           </a:bodyPr>
           <a:lstStyle/>
@@ -3571,253 +5266,13 @@
               </a:spcAft>
             </a:pPr>
             <a:r>
-              <a:rPr sz="1632" b="0" i="0">
-                <a:solidFill>
-                  <a:srgbClr val="E7F0F3"/>
-                </a:solidFill>
-                <a:latin typeface="Arial"/>
-              </a:rPr>
-              <a:t>u = ∇φ</a:t>
-            </a:r>
-          </a:p>
-        </p:txBody>
-      </p:sp>
-      <p:sp>
-        <p:nvSpPr>
-          <p:cNvPr id="15" name="text14" descr="sci-ppt:C1-E29-014"/>
-          <p:cNvSpPr txBox="1"/>
-          <p:nvPr/>
-        </p:nvSpPr>
-        <p:spPr>
-          <a:xfrm>
-            <a:off x="6156960" y="5266944"/>
-            <a:ext cx="5547360" cy="321259"/>
-          </a:xfrm>
-          <a:prstGeom prst="rect">
-            <a:avLst/>
-          </a:prstGeom>
-          <a:noFill/>
-          <a:effectLst/>
-        </p:spPr>
-        <p:txBody>
-          <a:bodyPr wrap="none" lIns="27432" rIns="27432" tIns="18288" bIns="18288" anchor="ctr">
-            <a:spAutoFit/>
-          </a:bodyPr>
-          <a:lstStyle/>
-          <a:p>
-            <a:pPr algn="l">
-              <a:spcAft>
-                <a:spcPts val="0"/>
-              </a:spcAft>
-            </a:pPr>
-            <a:r>
-              <a:rPr sz="1632" b="0" i="0">
-                <a:solidFill>
-                  <a:srgbClr val="E7F0F3"/>
-                </a:solidFill>
-                <a:latin typeface="Arial"/>
-              </a:rPr>
-              <a:t>∇²φ = 0</a:t>
-            </a:r>
-          </a:p>
-        </p:txBody>
-      </p:sp>
-      <p:sp>
-        <p:nvSpPr>
-          <p:cNvPr id="16" name="text15" descr="sci-ppt:C1-E29-015"/>
-          <p:cNvSpPr txBox="1"/>
-          <p:nvPr/>
-        </p:nvSpPr>
-        <p:spPr>
-          <a:xfrm>
-            <a:off x="6156960" y="5559552"/>
-            <a:ext cx="5547360" cy="321259"/>
-          </a:xfrm>
-          <a:prstGeom prst="rect">
-            <a:avLst/>
-          </a:prstGeom>
-          <a:noFill/>
-          <a:effectLst/>
-        </p:spPr>
-        <p:txBody>
-          <a:bodyPr wrap="none" lIns="27432" rIns="27432" tIns="18288" bIns="18288" anchor="ctr">
-            <a:spAutoFit/>
-          </a:bodyPr>
-          <a:lstStyle/>
-          <a:p>
-            <a:pPr algn="l">
-              <a:spcAft>
-                <a:spcPts val="0"/>
-              </a:spcAft>
-            </a:pPr>
-            <a:r>
-              <a:rPr sz="1632" b="0" i="0">
-                <a:solidFill>
-                  <a:srgbClr val="E7F0F3"/>
-                </a:solidFill>
-                <a:latin typeface="Arial"/>
-              </a:rPr>
-              <a:t>p∞</a:t>
-            </a:r>
-          </a:p>
-        </p:txBody>
-      </p:sp>
-      <p:sp>
-        <p:nvSpPr>
-          <p:cNvPr id="17" name="text16" descr="sci-ppt:C1-E29-016"/>
-          <p:cNvSpPr txBox="1"/>
-          <p:nvPr/>
-        </p:nvSpPr>
-        <p:spPr>
-          <a:xfrm>
-            <a:off x="6156960" y="5852160"/>
-            <a:ext cx="5547360" cy="321259"/>
-          </a:xfrm>
-          <a:prstGeom prst="rect">
-            <a:avLst/>
-          </a:prstGeom>
-          <a:noFill/>
-          <a:effectLst/>
-        </p:spPr>
-        <p:txBody>
-          <a:bodyPr wrap="none" lIns="27432" rIns="27432" tIns="18288" bIns="18288" anchor="ctr">
-            <a:spAutoFit/>
-          </a:bodyPr>
-          <a:lstStyle/>
-          <a:p>
-            <a:pPr algn="l">
-              <a:spcAft>
-                <a:spcPts val="0"/>
-              </a:spcAft>
-            </a:pPr>
-            <a:r>
-              <a:rPr sz="1632" b="0" i="0">
-                <a:solidFill>
-                  <a:srgbClr val="E7F0F3"/>
-                </a:solidFill>
-                <a:latin typeface="Arial"/>
-              </a:rPr>
-              <a:t>κ</a:t>
-            </a:r>
-          </a:p>
-        </p:txBody>
-      </p:sp>
-      <p:sp>
-        <p:nvSpPr>
-          <p:cNvPr id="18" name="text17" descr="sci-ppt:C1-E29-017"/>
-          <p:cNvSpPr txBox="1"/>
-          <p:nvPr/>
-        </p:nvSpPr>
-        <p:spPr>
-          <a:xfrm>
-            <a:off x="6156960" y="6144768"/>
-            <a:ext cx="5547360" cy="321259"/>
-          </a:xfrm>
-          <a:prstGeom prst="rect">
-            <a:avLst/>
-          </a:prstGeom>
-          <a:noFill/>
-          <a:effectLst/>
-        </p:spPr>
-        <p:txBody>
-          <a:bodyPr wrap="none" lIns="27432" rIns="27432" tIns="18288" bIns="18288" anchor="ctr">
-            <a:spAutoFit/>
-          </a:bodyPr>
-          <a:lstStyle/>
-          <a:p>
-            <a:pPr algn="l">
-              <a:spcAft>
-                <a:spcPts val="0"/>
-              </a:spcAft>
-            </a:pPr>
-            <a:r>
-              <a:rPr sz="1632" b="0" i="0">
-                <a:solidFill>
-                  <a:srgbClr val="E7F0F3"/>
-                </a:solidFill>
-                <a:latin typeface="Arial"/>
-              </a:rPr>
-              <a:t>∂tφ vs Dφ/Dt</a:t>
-            </a:r>
-          </a:p>
-        </p:txBody>
-      </p:sp>
-      <p:sp>
-        <p:nvSpPr>
-          <p:cNvPr id="19" name="text18" descr="sci-ppt:C1-E29-018"/>
-          <p:cNvSpPr txBox="1"/>
-          <p:nvPr/>
-        </p:nvSpPr>
-        <p:spPr>
-          <a:xfrm>
-            <a:off x="365760" y="6632448"/>
-            <a:ext cx="11277600" cy="302361"/>
-          </a:xfrm>
-          <a:prstGeom prst="rect">
-            <a:avLst/>
-          </a:prstGeom>
-          <a:noFill/>
-          <a:effectLst/>
-        </p:spPr>
-        <p:txBody>
-          <a:bodyPr wrap="none" lIns="27432" rIns="27432" tIns="18288" bIns="18288" anchor="ctr">
-            <a:spAutoFit/>
-          </a:bodyPr>
-          <a:lstStyle/>
-          <a:p>
-            <a:pPr algn="l">
-              <a:spcAft>
-                <a:spcPts val="0"/>
-              </a:spcAft>
-            </a:pPr>
-            <a:r>
-              <a:rPr sz="1536" b="0" i="0">
+              <a:rPr sz="1000" b="0" i="0">
                 <a:solidFill>
                   <a:srgbClr val="B4C7D2"/>
                 </a:solidFill>
                 <a:latin typeface="Arial"/>
               </a:rPr>
-              <a:t>Update shape and potential together</a:t>
-            </a:r>
-          </a:p>
-        </p:txBody>
-      </p:sp>
-      <p:sp>
-        <p:nvSpPr>
-          <p:cNvPr id="20" name="text19" descr="sci-ppt:C1-E29-019"/>
-          <p:cNvSpPr txBox="1"/>
-          <p:nvPr/>
-        </p:nvSpPr>
-        <p:spPr>
-          <a:xfrm>
-            <a:off x="365760" y="6925056"/>
-            <a:ext cx="11277600" cy="302361"/>
-          </a:xfrm>
-          <a:prstGeom prst="rect">
-            <a:avLst/>
-          </a:prstGeom>
-          <a:noFill/>
-          <a:effectLst/>
-        </p:spPr>
-        <p:txBody>
-          <a:bodyPr wrap="none" lIns="27432" rIns="27432" tIns="18288" bIns="18288" anchor="ctr">
-            <a:spAutoFit/>
-          </a:bodyPr>
-          <a:lstStyle/>
-          <a:p>
-            <a:pPr algn="l">
-              <a:spcAft>
-                <a:spcPts val="0"/>
-              </a:spcAft>
-            </a:pPr>
-            <a:r>
-              <a:rPr sz="1536" b="0" i="0">
-                <a:solidFill>
-                  <a:srgbClr val="B4C7D2"/>
-                </a:solidFill>
-                <a:latin typeface="Arial"/>
-              </a:rPr>
-              <a:t>Self-impact or jet piercing requires additional topology and compressibility treatment</a:t>
+              <a:t>Schematic of the loop of Eq. C1-E29; the deformed shape is illustrative.</a:t>
             </a:r>
           </a:p>
         </p:txBody>

--- a/assets/figures-editable/c1-c2/c1-e29.pptx
+++ b/assets/figures-editable/c1-c2/c1-e29.pptx
@@ -3131,21 +3131,1842 @@
                 </a:solidFill>
                 <a:latin typeface="Arial"/>
               </a:rPr>
-              <a:t>C1-E29 · Inviscid pre-impact moving-interface closure</a:t>
-            </a:r>
-          </a:p>
-        </p:txBody>
-      </p:sp>
-      <p:sp>
-        <p:nvSpPr>
-          <p:cNvPr id="3" name="C1-E29 round_rect 1" descr="sci-ppt:o001"/>
+              <a:t>C1-E29 · Exact spherical recovery of the potential closure</a:t>
+            </a:r>
+          </a:p>
+        </p:txBody>
+      </p:sp>
+      <p:cxnSp>
+        <p:nvCxnSpPr>
+          <p:cNvPr id="3" name="C1-E29 line 1" descr="sci-ppt:o001"/>
+          <p:cNvCxnSpPr/>
+          <p:nvPr/>
+        </p:nvCxnSpPr>
+        <p:spPr>
+          <a:xfrm>
+            <a:off x="6858000" y="4937760"/>
+            <a:ext cx="4937760" cy="0"/>
+          </a:xfrm>
+          <a:prstGeom prst="line">
+            <a:avLst/>
+          </a:prstGeom>
+          <a:ln w="19050">
+            <a:solidFill>
+              <a:srgbClr val="B4C7D2"/>
+            </a:solidFill>
+          </a:ln>
+          <a:effectLst/>
+        </p:spPr>
+      </p:cxnSp>
+      <p:cxnSp>
+        <p:nvCxnSpPr>
+          <p:cNvPr id="4" name="C1-E29 line 2" descr="sci-ppt:o002"/>
+          <p:cNvCxnSpPr/>
+          <p:nvPr/>
+        </p:nvCxnSpPr>
+        <p:spPr>
+          <a:xfrm>
+            <a:off x="6858000" y="1371600"/>
+            <a:ext cx="0" cy="3566160"/>
+          </a:xfrm>
+          <a:prstGeom prst="line">
+            <a:avLst/>
+          </a:prstGeom>
+          <a:ln w="19050">
+            <a:solidFill>
+              <a:srgbClr val="B4C7D2"/>
+            </a:solidFill>
+          </a:ln>
+          <a:effectLst/>
+        </p:spPr>
+      </p:cxnSp>
+      <p:cxnSp>
+        <p:nvCxnSpPr>
+          <p:cNvPr id="5" name="C1-E29 line 3" descr="sci-ppt:o003"/>
+          <p:cNvCxnSpPr/>
+          <p:nvPr/>
+        </p:nvCxnSpPr>
+        <p:spPr>
+          <a:xfrm>
+            <a:off x="6858000" y="4937760"/>
+            <a:ext cx="0" cy="64008"/>
+          </a:xfrm>
+          <a:prstGeom prst="line">
+            <a:avLst/>
+          </a:prstGeom>
+          <a:ln w="12700">
+            <a:solidFill>
+              <a:srgbClr val="B4C7D2"/>
+            </a:solidFill>
+          </a:ln>
+          <a:effectLst/>
+        </p:spPr>
+      </p:cxnSp>
+      <p:cxnSp>
+        <p:nvCxnSpPr>
+          <p:cNvPr id="6" name="C1-E29 line 4" descr="sci-ppt:o004"/>
+          <p:cNvCxnSpPr/>
+          <p:nvPr/>
+        </p:nvCxnSpPr>
+        <p:spPr>
+          <a:xfrm>
+            <a:off x="6858000" y="1371600"/>
+            <a:ext cx="0" cy="3566160"/>
+          </a:xfrm>
+          <a:prstGeom prst="line">
+            <a:avLst/>
+          </a:prstGeom>
+          <a:ln w="7620">
+            <a:solidFill>
+              <a:srgbClr val="2E4756"/>
+            </a:solidFill>
+          </a:ln>
+          <a:effectLst/>
+        </p:spPr>
+      </p:cxnSp>
+      <p:sp>
+        <p:nvSpPr>
+          <p:cNvPr id="7" name="C1-E29 text 5" descr="sci-ppt:o005"/>
+          <p:cNvSpPr txBox="1"/>
+          <p:nvPr/>
+        </p:nvSpPr>
+        <p:spPr>
+          <a:xfrm>
+            <a:off x="6400800" y="5020056"/>
+            <a:ext cx="914400" cy="208407"/>
+          </a:xfrm>
+          <a:prstGeom prst="rect">
+            <a:avLst/>
+          </a:prstGeom>
+          <a:noFill/>
+          <a:effectLst/>
+        </p:spPr>
+        <p:txBody>
+          <a:bodyPr wrap="none" lIns="18288" rIns="18288" tIns="18288" bIns="18288" anchor="t">
+            <a:spAutoFit/>
+          </a:bodyPr>
+          <a:lstStyle/>
+          <a:p>
+            <a:pPr algn="ctr">
+              <a:spcAft>
+                <a:spcPts val="0"/>
+              </a:spcAft>
+            </a:pPr>
+            <a:r>
+              <a:rPr sz="1050" b="0" i="0">
+                <a:solidFill>
+                  <a:srgbClr val="B4C7D2"/>
+                </a:solidFill>
+                <a:latin typeface="Arial"/>
+              </a:rPr>
+              <a:t>0.0</a:t>
+            </a:r>
+          </a:p>
+        </p:txBody>
+      </p:sp>
+      <p:cxnSp>
+        <p:nvCxnSpPr>
+          <p:cNvPr id="8" name="C1-E29 line 6" descr="sci-ppt:o006"/>
+          <p:cNvCxnSpPr/>
+          <p:nvPr/>
+        </p:nvCxnSpPr>
+        <p:spPr>
+          <a:xfrm>
+            <a:off x="8503920" y="4937760"/>
+            <a:ext cx="0" cy="64008"/>
+          </a:xfrm>
+          <a:prstGeom prst="line">
+            <a:avLst/>
+          </a:prstGeom>
+          <a:ln w="12700">
+            <a:solidFill>
+              <a:srgbClr val="B4C7D2"/>
+            </a:solidFill>
+          </a:ln>
+          <a:effectLst/>
+        </p:spPr>
+      </p:cxnSp>
+      <p:cxnSp>
+        <p:nvCxnSpPr>
+          <p:cNvPr id="9" name="C1-E29 line 7" descr="sci-ppt:o007"/>
+          <p:cNvCxnSpPr/>
+          <p:nvPr/>
+        </p:nvCxnSpPr>
+        <p:spPr>
+          <a:xfrm>
+            <a:off x="8503920" y="1371600"/>
+            <a:ext cx="0" cy="3566160"/>
+          </a:xfrm>
+          <a:prstGeom prst="line">
+            <a:avLst/>
+          </a:prstGeom>
+          <a:ln w="7620">
+            <a:solidFill>
+              <a:srgbClr val="2E4756"/>
+            </a:solidFill>
+          </a:ln>
+          <a:effectLst/>
+        </p:spPr>
+      </p:cxnSp>
+      <p:sp>
+        <p:nvSpPr>
+          <p:cNvPr id="10" name="C1-E29 text 8" descr="sci-ppt:o008"/>
+          <p:cNvSpPr txBox="1"/>
+          <p:nvPr/>
+        </p:nvSpPr>
+        <p:spPr>
+          <a:xfrm>
+            <a:off x="8046720" y="5020056"/>
+            <a:ext cx="914400" cy="208407"/>
+          </a:xfrm>
+          <a:prstGeom prst="rect">
+            <a:avLst/>
+          </a:prstGeom>
+          <a:noFill/>
+          <a:effectLst/>
+        </p:spPr>
+        <p:txBody>
+          <a:bodyPr wrap="none" lIns="18288" rIns="18288" tIns="18288" bIns="18288" anchor="t">
+            <a:spAutoFit/>
+          </a:bodyPr>
+          <a:lstStyle/>
+          <a:p>
+            <a:pPr algn="ctr">
+              <a:spcAft>
+                <a:spcPts val="0"/>
+              </a:spcAft>
+            </a:pPr>
+            <a:r>
+              <a:rPr sz="1050" b="0" i="0">
+                <a:solidFill>
+                  <a:srgbClr val="B4C7D2"/>
+                </a:solidFill>
+                <a:latin typeface="Arial"/>
+              </a:rPr>
+              <a:t>0.5</a:t>
+            </a:r>
+          </a:p>
+        </p:txBody>
+      </p:sp>
+      <p:cxnSp>
+        <p:nvCxnSpPr>
+          <p:cNvPr id="11" name="C1-E29 line 9" descr="sci-ppt:o009"/>
+          <p:cNvCxnSpPr/>
+          <p:nvPr/>
+        </p:nvCxnSpPr>
+        <p:spPr>
+          <a:xfrm>
+            <a:off x="10149840" y="4937760"/>
+            <a:ext cx="0" cy="64008"/>
+          </a:xfrm>
+          <a:prstGeom prst="line">
+            <a:avLst/>
+          </a:prstGeom>
+          <a:ln w="12700">
+            <a:solidFill>
+              <a:srgbClr val="B4C7D2"/>
+            </a:solidFill>
+          </a:ln>
+          <a:effectLst/>
+        </p:spPr>
+      </p:cxnSp>
+      <p:cxnSp>
+        <p:nvCxnSpPr>
+          <p:cNvPr id="12" name="C1-E29 line 10" descr="sci-ppt:o010"/>
+          <p:cNvCxnSpPr/>
+          <p:nvPr/>
+        </p:nvCxnSpPr>
+        <p:spPr>
+          <a:xfrm>
+            <a:off x="10149840" y="1371600"/>
+            <a:ext cx="0" cy="3566160"/>
+          </a:xfrm>
+          <a:prstGeom prst="line">
+            <a:avLst/>
+          </a:prstGeom>
+          <a:ln w="7620">
+            <a:solidFill>
+              <a:srgbClr val="2E4756"/>
+            </a:solidFill>
+          </a:ln>
+          <a:effectLst/>
+        </p:spPr>
+      </p:cxnSp>
+      <p:sp>
+        <p:nvSpPr>
+          <p:cNvPr id="13" name="C1-E29 text 11" descr="sci-ppt:o011"/>
+          <p:cNvSpPr txBox="1"/>
+          <p:nvPr/>
+        </p:nvSpPr>
+        <p:spPr>
+          <a:xfrm>
+            <a:off x="9692640" y="5020056"/>
+            <a:ext cx="914400" cy="208407"/>
+          </a:xfrm>
+          <a:prstGeom prst="rect">
+            <a:avLst/>
+          </a:prstGeom>
+          <a:noFill/>
+          <a:effectLst/>
+        </p:spPr>
+        <p:txBody>
+          <a:bodyPr wrap="none" lIns="18288" rIns="18288" tIns="18288" bIns="18288" anchor="t">
+            <a:spAutoFit/>
+          </a:bodyPr>
+          <a:lstStyle/>
+          <a:p>
+            <a:pPr algn="ctr">
+              <a:spcAft>
+                <a:spcPts val="0"/>
+              </a:spcAft>
+            </a:pPr>
+            <a:r>
+              <a:rPr sz="1050" b="0" i="0">
+                <a:solidFill>
+                  <a:srgbClr val="B4C7D2"/>
+                </a:solidFill>
+                <a:latin typeface="Arial"/>
+              </a:rPr>
+              <a:t>1.0</a:t>
+            </a:r>
+          </a:p>
+        </p:txBody>
+      </p:sp>
+      <p:cxnSp>
+        <p:nvCxnSpPr>
+          <p:cNvPr id="14" name="C1-E29 line 12" descr="sci-ppt:o012"/>
+          <p:cNvCxnSpPr/>
+          <p:nvPr/>
+        </p:nvCxnSpPr>
+        <p:spPr>
+          <a:xfrm>
+            <a:off x="11795760" y="4937760"/>
+            <a:ext cx="0" cy="64008"/>
+          </a:xfrm>
+          <a:prstGeom prst="line">
+            <a:avLst/>
+          </a:prstGeom>
+          <a:ln w="12700">
+            <a:solidFill>
+              <a:srgbClr val="B4C7D2"/>
+            </a:solidFill>
+          </a:ln>
+          <a:effectLst/>
+        </p:spPr>
+      </p:cxnSp>
+      <p:cxnSp>
+        <p:nvCxnSpPr>
+          <p:cNvPr id="15" name="C1-E29 line 13" descr="sci-ppt:o013"/>
+          <p:cNvCxnSpPr/>
+          <p:nvPr/>
+        </p:nvCxnSpPr>
+        <p:spPr>
+          <a:xfrm>
+            <a:off x="11795760" y="1371600"/>
+            <a:ext cx="0" cy="3566160"/>
+          </a:xfrm>
+          <a:prstGeom prst="line">
+            <a:avLst/>
+          </a:prstGeom>
+          <a:ln w="7620">
+            <a:solidFill>
+              <a:srgbClr val="2E4756"/>
+            </a:solidFill>
+          </a:ln>
+          <a:effectLst/>
+        </p:spPr>
+      </p:cxnSp>
+      <p:sp>
+        <p:nvSpPr>
+          <p:cNvPr id="16" name="C1-E29 text 14" descr="sci-ppt:o014"/>
+          <p:cNvSpPr txBox="1"/>
+          <p:nvPr/>
+        </p:nvSpPr>
+        <p:spPr>
+          <a:xfrm>
+            <a:off x="11338560" y="5020056"/>
+            <a:ext cx="914400" cy="208407"/>
+          </a:xfrm>
+          <a:prstGeom prst="rect">
+            <a:avLst/>
+          </a:prstGeom>
+          <a:noFill/>
+          <a:effectLst/>
+        </p:spPr>
+        <p:txBody>
+          <a:bodyPr wrap="none" lIns="18288" rIns="18288" tIns="18288" bIns="18288" anchor="t">
+            <a:spAutoFit/>
+          </a:bodyPr>
+          <a:lstStyle/>
+          <a:p>
+            <a:pPr algn="ctr">
+              <a:spcAft>
+                <a:spcPts val="0"/>
+              </a:spcAft>
+            </a:pPr>
+            <a:r>
+              <a:rPr sz="1050" b="0" i="0">
+                <a:solidFill>
+                  <a:srgbClr val="B4C7D2"/>
+                </a:solidFill>
+                <a:latin typeface="Arial"/>
+              </a:rPr>
+              <a:t>1.5</a:t>
+            </a:r>
+          </a:p>
+        </p:txBody>
+      </p:sp>
+      <p:cxnSp>
+        <p:nvCxnSpPr>
+          <p:cNvPr id="17" name="C1-E29 line 15" descr="sci-ppt:o015"/>
+          <p:cNvCxnSpPr/>
+          <p:nvPr/>
+        </p:nvCxnSpPr>
+        <p:spPr>
+          <a:xfrm>
+            <a:off x="6793992" y="4937760"/>
+            <a:ext cx="64008" cy="0"/>
+          </a:xfrm>
+          <a:prstGeom prst="line">
+            <a:avLst/>
+          </a:prstGeom>
+          <a:ln w="12700">
+            <a:solidFill>
+              <a:srgbClr val="B4C7D2"/>
+            </a:solidFill>
+          </a:ln>
+          <a:effectLst/>
+        </p:spPr>
+      </p:cxnSp>
+      <p:cxnSp>
+        <p:nvCxnSpPr>
+          <p:cNvPr id="18" name="C1-E29 line 16" descr="sci-ppt:o016"/>
+          <p:cNvCxnSpPr/>
+          <p:nvPr/>
+        </p:nvCxnSpPr>
+        <p:spPr>
+          <a:xfrm>
+            <a:off x="6793992" y="4046220"/>
+            <a:ext cx="64008" cy="0"/>
+          </a:xfrm>
+          <a:prstGeom prst="line">
+            <a:avLst/>
+          </a:prstGeom>
+          <a:ln w="12700">
+            <a:solidFill>
+              <a:srgbClr val="B4C7D2"/>
+            </a:solidFill>
+          </a:ln>
+          <a:effectLst/>
+        </p:spPr>
+      </p:cxnSp>
+      <p:cxnSp>
+        <p:nvCxnSpPr>
+          <p:cNvPr id="19" name="C1-E29 line 17" descr="sci-ppt:o017"/>
+          <p:cNvCxnSpPr/>
+          <p:nvPr/>
+        </p:nvCxnSpPr>
+        <p:spPr>
+          <a:xfrm>
+            <a:off x="6858000" y="4046220"/>
+            <a:ext cx="4937760" cy="0"/>
+          </a:xfrm>
+          <a:prstGeom prst="line">
+            <a:avLst/>
+          </a:prstGeom>
+          <a:ln w="7620">
+            <a:solidFill>
+              <a:srgbClr val="2E4756"/>
+            </a:solidFill>
+          </a:ln>
+          <a:effectLst/>
+        </p:spPr>
+      </p:cxnSp>
+      <p:sp>
+        <p:nvSpPr>
+          <p:cNvPr id="20" name="C1-E29 text 18" descr="sci-ppt:o018"/>
+          <p:cNvSpPr txBox="1"/>
+          <p:nvPr/>
+        </p:nvSpPr>
+        <p:spPr>
+          <a:xfrm>
+            <a:off x="5989320" y="3963924"/>
+            <a:ext cx="777240" cy="208407"/>
+          </a:xfrm>
+          <a:prstGeom prst="rect">
+            <a:avLst/>
+          </a:prstGeom>
+          <a:noFill/>
+          <a:effectLst/>
+        </p:spPr>
+        <p:txBody>
+          <a:bodyPr wrap="none" lIns="18288" rIns="18288" tIns="18288" bIns="18288" anchor="t">
+            <a:spAutoFit/>
+          </a:bodyPr>
+          <a:lstStyle/>
+          <a:p>
+            <a:pPr algn="r">
+              <a:spcAft>
+                <a:spcPts val="0"/>
+              </a:spcAft>
+            </a:pPr>
+            <a:r>
+              <a:rPr sz="1050" b="0" i="0">
+                <a:solidFill>
+                  <a:srgbClr val="B4C7D2"/>
+                </a:solidFill>
+                <a:latin typeface="Arial"/>
+              </a:rPr>
+              <a:t>-500</a:t>
+            </a:r>
+          </a:p>
+        </p:txBody>
+      </p:sp>
+      <p:cxnSp>
+        <p:nvCxnSpPr>
+          <p:cNvPr id="21" name="C1-E29 line 19" descr="sci-ppt:o019"/>
+          <p:cNvCxnSpPr/>
+          <p:nvPr/>
+        </p:nvCxnSpPr>
+        <p:spPr>
+          <a:xfrm>
+            <a:off x="6793992" y="3154680"/>
+            <a:ext cx="64008" cy="0"/>
+          </a:xfrm>
+          <a:prstGeom prst="line">
+            <a:avLst/>
+          </a:prstGeom>
+          <a:ln w="12700">
+            <a:solidFill>
+              <a:srgbClr val="B4C7D2"/>
+            </a:solidFill>
+          </a:ln>
+          <a:effectLst/>
+        </p:spPr>
+      </p:cxnSp>
+      <p:cxnSp>
+        <p:nvCxnSpPr>
+          <p:cNvPr id="22" name="C1-E29 line 20" descr="sci-ppt:o020"/>
+          <p:cNvCxnSpPr/>
+          <p:nvPr/>
+        </p:nvCxnSpPr>
+        <p:spPr>
+          <a:xfrm>
+            <a:off x="6858000" y="3154680"/>
+            <a:ext cx="4937760" cy="0"/>
+          </a:xfrm>
+          <a:prstGeom prst="line">
+            <a:avLst/>
+          </a:prstGeom>
+          <a:ln w="7620">
+            <a:solidFill>
+              <a:srgbClr val="2E4756"/>
+            </a:solidFill>
+          </a:ln>
+          <a:effectLst/>
+        </p:spPr>
+      </p:cxnSp>
+      <p:sp>
+        <p:nvSpPr>
+          <p:cNvPr id="23" name="C1-E29 text 21" descr="sci-ppt:o021"/>
+          <p:cNvSpPr txBox="1"/>
+          <p:nvPr/>
+        </p:nvSpPr>
+        <p:spPr>
+          <a:xfrm>
+            <a:off x="5989320" y="3072384"/>
+            <a:ext cx="777240" cy="208407"/>
+          </a:xfrm>
+          <a:prstGeom prst="rect">
+            <a:avLst/>
+          </a:prstGeom>
+          <a:noFill/>
+          <a:effectLst/>
+        </p:spPr>
+        <p:txBody>
+          <a:bodyPr wrap="none" lIns="18288" rIns="18288" tIns="18288" bIns="18288" anchor="t">
+            <a:spAutoFit/>
+          </a:bodyPr>
+          <a:lstStyle/>
+          <a:p>
+            <a:pPr algn="r">
+              <a:spcAft>
+                <a:spcPts val="0"/>
+              </a:spcAft>
+            </a:pPr>
+            <a:r>
+              <a:rPr sz="1050" b="0" i="0">
+                <a:solidFill>
+                  <a:srgbClr val="B4C7D2"/>
+                </a:solidFill>
+                <a:latin typeface="Arial"/>
+              </a:rPr>
+              <a:t>0</a:t>
+            </a:r>
+          </a:p>
+        </p:txBody>
+      </p:sp>
+      <p:cxnSp>
+        <p:nvCxnSpPr>
+          <p:cNvPr id="24" name="C1-E29 line 22" descr="sci-ppt:o022"/>
+          <p:cNvCxnSpPr/>
+          <p:nvPr/>
+        </p:nvCxnSpPr>
+        <p:spPr>
+          <a:xfrm>
+            <a:off x="6793992" y="2263140"/>
+            <a:ext cx="64008" cy="0"/>
+          </a:xfrm>
+          <a:prstGeom prst="line">
+            <a:avLst/>
+          </a:prstGeom>
+          <a:ln w="12700">
+            <a:solidFill>
+              <a:srgbClr val="B4C7D2"/>
+            </a:solidFill>
+          </a:ln>
+          <a:effectLst/>
+        </p:spPr>
+      </p:cxnSp>
+      <p:cxnSp>
+        <p:nvCxnSpPr>
+          <p:cNvPr id="25" name="C1-E29 line 23" descr="sci-ppt:o023"/>
+          <p:cNvCxnSpPr/>
+          <p:nvPr/>
+        </p:nvCxnSpPr>
+        <p:spPr>
+          <a:xfrm>
+            <a:off x="6858000" y="2263140"/>
+            <a:ext cx="4937760" cy="0"/>
+          </a:xfrm>
+          <a:prstGeom prst="line">
+            <a:avLst/>
+          </a:prstGeom>
+          <a:ln w="7620">
+            <a:solidFill>
+              <a:srgbClr val="2E4756"/>
+            </a:solidFill>
+          </a:ln>
+          <a:effectLst/>
+        </p:spPr>
+      </p:cxnSp>
+      <p:sp>
+        <p:nvSpPr>
+          <p:cNvPr id="26" name="C1-E29 text 24" descr="sci-ppt:o024"/>
+          <p:cNvSpPr txBox="1"/>
+          <p:nvPr/>
+        </p:nvSpPr>
+        <p:spPr>
+          <a:xfrm>
+            <a:off x="5989320" y="2180844"/>
+            <a:ext cx="777240" cy="208407"/>
+          </a:xfrm>
+          <a:prstGeom prst="rect">
+            <a:avLst/>
+          </a:prstGeom>
+          <a:noFill/>
+          <a:effectLst/>
+        </p:spPr>
+        <p:txBody>
+          <a:bodyPr wrap="none" lIns="18288" rIns="18288" tIns="18288" bIns="18288" anchor="t">
+            <a:spAutoFit/>
+          </a:bodyPr>
+          <a:lstStyle/>
+          <a:p>
+            <a:pPr algn="r">
+              <a:spcAft>
+                <a:spcPts val="0"/>
+              </a:spcAft>
+            </a:pPr>
+            <a:r>
+              <a:rPr sz="1050" b="0" i="0">
+                <a:solidFill>
+                  <a:srgbClr val="B4C7D2"/>
+                </a:solidFill>
+                <a:latin typeface="Arial"/>
+              </a:rPr>
+              <a:t>500</a:t>
+            </a:r>
+          </a:p>
+        </p:txBody>
+      </p:sp>
+      <p:cxnSp>
+        <p:nvCxnSpPr>
+          <p:cNvPr id="27" name="C1-E29 line 25" descr="sci-ppt:o025"/>
+          <p:cNvCxnSpPr/>
+          <p:nvPr/>
+        </p:nvCxnSpPr>
+        <p:spPr>
+          <a:xfrm>
+            <a:off x="6793992" y="1371600"/>
+            <a:ext cx="64008" cy="0"/>
+          </a:xfrm>
+          <a:prstGeom prst="line">
+            <a:avLst/>
+          </a:prstGeom>
+          <a:ln w="12700">
+            <a:solidFill>
+              <a:srgbClr val="B4C7D2"/>
+            </a:solidFill>
+          </a:ln>
+          <a:effectLst/>
+        </p:spPr>
+      </p:cxnSp>
+      <p:cxnSp>
+        <p:nvCxnSpPr>
+          <p:cNvPr id="28" name="C1-E29 line 26" descr="sci-ppt:o026"/>
+          <p:cNvCxnSpPr/>
+          <p:nvPr/>
+        </p:nvCxnSpPr>
+        <p:spPr>
+          <a:xfrm>
+            <a:off x="6858000" y="1371600"/>
+            <a:ext cx="4937760" cy="0"/>
+          </a:xfrm>
+          <a:prstGeom prst="line">
+            <a:avLst/>
+          </a:prstGeom>
+          <a:ln w="7620">
+            <a:solidFill>
+              <a:srgbClr val="2E4756"/>
+            </a:solidFill>
+          </a:ln>
+          <a:effectLst/>
+        </p:spPr>
+      </p:cxnSp>
+      <p:sp>
+        <p:nvSpPr>
+          <p:cNvPr id="29" name="C1-E29 text 27" descr="sci-ppt:o027"/>
+          <p:cNvSpPr txBox="1"/>
+          <p:nvPr/>
+        </p:nvSpPr>
+        <p:spPr>
+          <a:xfrm>
+            <a:off x="5989320" y="1289304"/>
+            <a:ext cx="777240" cy="208407"/>
+          </a:xfrm>
+          <a:prstGeom prst="rect">
+            <a:avLst/>
+          </a:prstGeom>
+          <a:noFill/>
+          <a:effectLst/>
+        </p:spPr>
+        <p:txBody>
+          <a:bodyPr wrap="none" lIns="18288" rIns="18288" tIns="18288" bIns="18288" anchor="t">
+            <a:spAutoFit/>
+          </a:bodyPr>
+          <a:lstStyle/>
+          <a:p>
+            <a:pPr algn="r">
+              <a:spcAft>
+                <a:spcPts val="0"/>
+              </a:spcAft>
+            </a:pPr>
+            <a:r>
+              <a:rPr sz="1050" b="0" i="0">
+                <a:solidFill>
+                  <a:srgbClr val="B4C7D2"/>
+                </a:solidFill>
+                <a:latin typeface="Arial"/>
+              </a:rPr>
+              <a:t>1000</a:t>
+            </a:r>
+          </a:p>
+        </p:txBody>
+      </p:sp>
+      <p:sp>
+        <p:nvSpPr>
+          <p:cNvPr id="30" name="C1-E29 text 28" descr="sci-ppt:o028"/>
+          <p:cNvSpPr txBox="1"/>
+          <p:nvPr/>
+        </p:nvSpPr>
+        <p:spPr>
+          <a:xfrm>
+            <a:off x="6858000" y="5221224"/>
+            <a:ext cx="4937760" cy="231648"/>
+          </a:xfrm>
+          <a:prstGeom prst="rect">
+            <a:avLst/>
+          </a:prstGeom>
+          <a:noFill/>
+          <a:effectLst/>
+        </p:spPr>
+        <p:txBody>
+          <a:bodyPr wrap="none" lIns="18288" rIns="18288" tIns="18288" bIns="18288" anchor="t">
+            <a:spAutoFit/>
+          </a:bodyPr>
+          <a:lstStyle/>
+          <a:p>
+            <a:pPr algn="ctr">
+              <a:spcAft>
+                <a:spcPts val="0"/>
+              </a:spcAft>
+            </a:pPr>
+            <a:r>
+              <a:rPr sz="1200" b="0" i="0">
+                <a:solidFill>
+                  <a:srgbClr val="E7F0F3"/>
+                </a:solidFill>
+                <a:latin typeface="Arial"/>
+              </a:rPr>
+              <a:t>t  (µs)</a:t>
+            </a:r>
+          </a:p>
+        </p:txBody>
+      </p:sp>
+      <p:sp>
+        <p:nvSpPr>
+          <p:cNvPr id="31" name="C1-E29 text 29" descr="sci-ppt:o029"/>
+          <p:cNvSpPr txBox="1"/>
+          <p:nvPr/>
+        </p:nvSpPr>
+        <p:spPr>
+          <a:xfrm>
+            <a:off x="6309360" y="1024128"/>
+            <a:ext cx="4937760" cy="231648"/>
+          </a:xfrm>
+          <a:prstGeom prst="rect">
+            <a:avLst/>
+          </a:prstGeom>
+          <a:noFill/>
+          <a:effectLst/>
+        </p:spPr>
+        <p:txBody>
+          <a:bodyPr wrap="none" lIns="18288" rIns="18288" tIns="18288" bIns="18288" anchor="t">
+            <a:spAutoFit/>
+          </a:bodyPr>
+          <a:lstStyle/>
+          <a:p>
+            <a:pPr algn="l">
+              <a:spcAft>
+                <a:spcPts val="0"/>
+              </a:spcAft>
+            </a:pPr>
+            <a:r>
+              <a:rPr sz="1200" b="0" i="0">
+                <a:solidFill>
+                  <a:srgbClr val="E7F0F3"/>
+                </a:solidFill>
+                <a:latin typeface="Arial"/>
+              </a:rPr>
+              <a:t>closure terms (m²/s²)</a:t>
+            </a:r>
+          </a:p>
+        </p:txBody>
+      </p:sp>
+      <p:cxnSp>
+        <p:nvCxnSpPr>
+          <p:cNvPr id="32" name="C1-E29 line 30" descr="sci-ppt:o030"/>
+          <p:cNvCxnSpPr/>
+          <p:nvPr/>
+        </p:nvCxnSpPr>
+        <p:spPr>
+          <a:xfrm>
+            <a:off x="6858000" y="3154680"/>
+            <a:ext cx="4937760" cy="0"/>
+          </a:xfrm>
+          <a:prstGeom prst="line">
+            <a:avLst/>
+          </a:prstGeom>
+          <a:ln w="15240">
+            <a:solidFill>
+              <a:srgbClr val="2E4756"/>
+            </a:solidFill>
+          </a:ln>
+          <a:effectLst/>
+        </p:spPr>
+      </p:cxnSp>
+      <p:sp>
+        <p:nvSpPr>
+          <p:cNvPr id="33" name="C1-E29 polygon 31" descr="sci-ppt:o031"/>
           <p:cNvSpPr/>
           <p:nvPr/>
         </p:nvSpPr>
         <p:spPr>
           <a:xfrm>
+            <a:off x="6865408" y="2992514"/>
+            <a:ext cx="4922943" cy="1712408"/>
+          </a:xfrm>
+          <a:custGeom>
+            <a:avLst/>
+            <a:gdLst/>
+            <a:ahLst/>
+            <a:cxnLst/>
+            <a:rect l="l" t="t" r="r" b="b"/>
+            <a:pathLst>
+              <a:path w="4922943" h="1712408">
+                <a:moveTo>
+                  <a:pt x="0" y="1712408"/>
+                </a:moveTo>
+                <a:lnTo>
+                  <a:pt x="34573" y="1688080"/>
+                </a:lnTo>
+                <a:lnTo>
+                  <a:pt x="69146" y="1631989"/>
+                </a:lnTo>
+                <a:lnTo>
+                  <a:pt x="103719" y="1549311"/>
+                </a:lnTo>
+                <a:lnTo>
+                  <a:pt x="138292" y="1446964"/>
+                </a:lnTo>
+                <a:lnTo>
+                  <a:pt x="172865" y="1332373"/>
+                </a:lnTo>
+                <a:lnTo>
+                  <a:pt x="207438" y="1212425"/>
+                </a:lnTo>
+                <a:lnTo>
+                  <a:pt x="242011" y="1092797"/>
+                </a:lnTo>
+                <a:lnTo>
+                  <a:pt x="276584" y="977692"/>
+                </a:lnTo>
+                <a:lnTo>
+                  <a:pt x="311157" y="869882"/>
+                </a:lnTo>
+                <a:lnTo>
+                  <a:pt x="345730" y="770923"/>
+                </a:lnTo>
+                <a:lnTo>
+                  <a:pt x="380303" y="681450"/>
+                </a:lnTo>
+                <a:lnTo>
+                  <a:pt x="414876" y="601445"/>
+                </a:lnTo>
+                <a:lnTo>
+                  <a:pt x="449449" y="530478"/>
+                </a:lnTo>
+                <a:lnTo>
+                  <a:pt x="484021" y="467878"/>
+                </a:lnTo>
+                <a:lnTo>
+                  <a:pt x="518594" y="412867"/>
+                </a:lnTo>
+                <a:lnTo>
+                  <a:pt x="553167" y="364636"/>
+                </a:lnTo>
+                <a:lnTo>
+                  <a:pt x="587740" y="322400"/>
+                </a:lnTo>
+                <a:lnTo>
+                  <a:pt x="622313" y="285428"/>
+                </a:lnTo>
+                <a:lnTo>
+                  <a:pt x="656886" y="253054"/>
+                </a:lnTo>
+                <a:lnTo>
+                  <a:pt x="691459" y="224686"/>
+                </a:lnTo>
+                <a:lnTo>
+                  <a:pt x="726032" y="199800"/>
+                </a:lnTo>
+                <a:lnTo>
+                  <a:pt x="760605" y="177939"/>
+                </a:lnTo>
+                <a:lnTo>
+                  <a:pt x="795178" y="158705"/>
+                </a:lnTo>
+                <a:lnTo>
+                  <a:pt x="829751" y="141755"/>
+                </a:lnTo>
+                <a:lnTo>
+                  <a:pt x="864324" y="126791"/>
+                </a:lnTo>
+                <a:lnTo>
+                  <a:pt x="898897" y="113557"/>
+                </a:lnTo>
+                <a:lnTo>
+                  <a:pt x="933470" y="101833"/>
+                </a:lnTo>
+                <a:lnTo>
+                  <a:pt x="968043" y="91427"/>
+                </a:lnTo>
+                <a:lnTo>
+                  <a:pt x="1002616" y="82175"/>
+                </a:lnTo>
+                <a:lnTo>
+                  <a:pt x="1037189" y="73935"/>
+                </a:lnTo>
+                <a:lnTo>
+                  <a:pt x="1071762" y="66584"/>
+                </a:lnTo>
+                <a:lnTo>
+                  <a:pt x="1106335" y="60016"/>
+                </a:lnTo>
+                <a:lnTo>
+                  <a:pt x="1140908" y="54138"/>
+                </a:lnTo>
+                <a:lnTo>
+                  <a:pt x="1175481" y="48870"/>
+                </a:lnTo>
+                <a:lnTo>
+                  <a:pt x="1210054" y="44142"/>
+                </a:lnTo>
+                <a:lnTo>
+                  <a:pt x="1244627" y="39893"/>
+                </a:lnTo>
+                <a:lnTo>
+                  <a:pt x="1279200" y="36070"/>
+                </a:lnTo>
+                <a:lnTo>
+                  <a:pt x="1313773" y="32625"/>
+                </a:lnTo>
+                <a:lnTo>
+                  <a:pt x="1348346" y="29518"/>
+                </a:lnTo>
+                <a:lnTo>
+                  <a:pt x="1382919" y="26713"/>
+                </a:lnTo>
+                <a:lnTo>
+                  <a:pt x="1417491" y="24177"/>
+                </a:lnTo>
+                <a:lnTo>
+                  <a:pt x="1452064" y="21884"/>
+                </a:lnTo>
+                <a:lnTo>
+                  <a:pt x="1486637" y="19807"/>
+                </a:lnTo>
+                <a:lnTo>
+                  <a:pt x="1521210" y="17926"/>
+                </a:lnTo>
+                <a:lnTo>
+                  <a:pt x="1555783" y="16220"/>
+                </a:lnTo>
+                <a:lnTo>
+                  <a:pt x="1590356" y="14673"/>
+                </a:lnTo>
+                <a:lnTo>
+                  <a:pt x="1624929" y="13268"/>
+                </a:lnTo>
+                <a:lnTo>
+                  <a:pt x="1659502" y="11992"/>
+                </a:lnTo>
+                <a:lnTo>
+                  <a:pt x="1694075" y="10833"/>
+                </a:lnTo>
+                <a:lnTo>
+                  <a:pt x="1728648" y="9780"/>
+                </a:lnTo>
+                <a:lnTo>
+                  <a:pt x="1763221" y="8822"/>
+                </a:lnTo>
+                <a:lnTo>
+                  <a:pt x="1797794" y="7951"/>
+                </a:lnTo>
+                <a:lnTo>
+                  <a:pt x="1832367" y="7160"/>
+                </a:lnTo>
+                <a:lnTo>
+                  <a:pt x="1866940" y="6440"/>
+                </a:lnTo>
+                <a:lnTo>
+                  <a:pt x="1901513" y="5786"/>
+                </a:lnTo>
+                <a:lnTo>
+                  <a:pt x="1936086" y="5191"/>
+                </a:lnTo>
+                <a:lnTo>
+                  <a:pt x="1970659" y="4650"/>
+                </a:lnTo>
+                <a:lnTo>
+                  <a:pt x="2005232" y="4159"/>
+                </a:lnTo>
+                <a:lnTo>
+                  <a:pt x="2039805" y="3713"/>
+                </a:lnTo>
+                <a:lnTo>
+                  <a:pt x="2074378" y="3308"/>
+                </a:lnTo>
+                <a:lnTo>
+                  <a:pt x="2108951" y="2941"/>
+                </a:lnTo>
+                <a:lnTo>
+                  <a:pt x="2143524" y="2608"/>
+                </a:lnTo>
+                <a:lnTo>
+                  <a:pt x="2178097" y="2307"/>
+                </a:lnTo>
+                <a:lnTo>
+                  <a:pt x="2212670" y="2034"/>
+                </a:lnTo>
+                <a:lnTo>
+                  <a:pt x="2247243" y="1788"/>
+                </a:lnTo>
+                <a:lnTo>
+                  <a:pt x="2281816" y="1567"/>
+                </a:lnTo>
+                <a:lnTo>
+                  <a:pt x="2316389" y="1367"/>
+                </a:lnTo>
+                <a:lnTo>
+                  <a:pt x="2350961" y="1187"/>
+                </a:lnTo>
+                <a:lnTo>
+                  <a:pt x="2385534" y="1026"/>
+                </a:lnTo>
+                <a:lnTo>
+                  <a:pt x="2420107" y="882"/>
+                </a:lnTo>
+                <a:lnTo>
+                  <a:pt x="2454680" y="754"/>
+                </a:lnTo>
+                <a:lnTo>
+                  <a:pt x="2489253" y="640"/>
+                </a:lnTo>
+                <a:lnTo>
+                  <a:pt x="2523826" y="539"/>
+                </a:lnTo>
+                <a:lnTo>
+                  <a:pt x="2558399" y="449"/>
+                </a:lnTo>
+                <a:lnTo>
+                  <a:pt x="2592972" y="371"/>
+                </a:lnTo>
+                <a:lnTo>
+                  <a:pt x="2627545" y="302"/>
+                </a:lnTo>
+                <a:lnTo>
+                  <a:pt x="2662118" y="243"/>
+                </a:lnTo>
+                <a:lnTo>
+                  <a:pt x="2696691" y="192"/>
+                </a:lnTo>
+                <a:lnTo>
+                  <a:pt x="2731264" y="148"/>
+                </a:lnTo>
+                <a:lnTo>
+                  <a:pt x="2765837" y="112"/>
+                </a:lnTo>
+                <a:lnTo>
+                  <a:pt x="2800410" y="81"/>
+                </a:lnTo>
+                <a:lnTo>
+                  <a:pt x="2834983" y="57"/>
+                </a:lnTo>
+                <a:lnTo>
+                  <a:pt x="2869556" y="37"/>
+                </a:lnTo>
+                <a:lnTo>
+                  <a:pt x="2904129" y="22"/>
+                </a:lnTo>
+                <a:lnTo>
+                  <a:pt x="2938702" y="11"/>
+                </a:lnTo>
+                <a:lnTo>
+                  <a:pt x="2973275" y="4"/>
+                </a:lnTo>
+                <a:lnTo>
+                  <a:pt x="3007848" y="1"/>
+                </a:lnTo>
+                <a:lnTo>
+                  <a:pt x="3042421" y="0"/>
+                </a:lnTo>
+                <a:lnTo>
+                  <a:pt x="3076994" y="2"/>
+                </a:lnTo>
+                <a:lnTo>
+                  <a:pt x="3111567" y="7"/>
+                </a:lnTo>
+                <a:lnTo>
+                  <a:pt x="3146140" y="13"/>
+                </a:lnTo>
+                <a:lnTo>
+                  <a:pt x="3180713" y="22"/>
+                </a:lnTo>
+                <a:lnTo>
+                  <a:pt x="3215286" y="32"/>
+                </a:lnTo>
+                <a:lnTo>
+                  <a:pt x="3249859" y="43"/>
+                </a:lnTo>
+                <a:lnTo>
+                  <a:pt x="3284432" y="56"/>
+                </a:lnTo>
+                <a:lnTo>
+                  <a:pt x="3319004" y="69"/>
+                </a:lnTo>
+                <a:lnTo>
+                  <a:pt x="3353577" y="83"/>
+                </a:lnTo>
+                <a:lnTo>
+                  <a:pt x="3388150" y="98"/>
+                </a:lnTo>
+                <a:lnTo>
+                  <a:pt x="3422723" y="113"/>
+                </a:lnTo>
+                <a:lnTo>
+                  <a:pt x="3457296" y="128"/>
+                </a:lnTo>
+                <a:lnTo>
+                  <a:pt x="3491869" y="144"/>
+                </a:lnTo>
+                <a:lnTo>
+                  <a:pt x="3526442" y="159"/>
+                </a:lnTo>
+                <a:lnTo>
+                  <a:pt x="3561015" y="175"/>
+                </a:lnTo>
+                <a:lnTo>
+                  <a:pt x="3595588" y="190"/>
+                </a:lnTo>
+                <a:lnTo>
+                  <a:pt x="3630161" y="205"/>
+                </a:lnTo>
+                <a:lnTo>
+                  <a:pt x="3664734" y="220"/>
+                </a:lnTo>
+                <a:lnTo>
+                  <a:pt x="3699307" y="234"/>
+                </a:lnTo>
+                <a:lnTo>
+                  <a:pt x="3733880" y="247"/>
+                </a:lnTo>
+                <a:lnTo>
+                  <a:pt x="3768453" y="260"/>
+                </a:lnTo>
+                <a:lnTo>
+                  <a:pt x="3803026" y="273"/>
+                </a:lnTo>
+                <a:lnTo>
+                  <a:pt x="3837599" y="284"/>
+                </a:lnTo>
+                <a:lnTo>
+                  <a:pt x="3872172" y="295"/>
+                </a:lnTo>
+                <a:lnTo>
+                  <a:pt x="3906745" y="305"/>
+                </a:lnTo>
+                <a:lnTo>
+                  <a:pt x="3941318" y="314"/>
+                </a:lnTo>
+                <a:lnTo>
+                  <a:pt x="3975891" y="322"/>
+                </a:lnTo>
+                <a:lnTo>
+                  <a:pt x="4010464" y="329"/>
+                </a:lnTo>
+                <a:lnTo>
+                  <a:pt x="4045037" y="335"/>
+                </a:lnTo>
+                <a:lnTo>
+                  <a:pt x="4079610" y="340"/>
+                </a:lnTo>
+                <a:lnTo>
+                  <a:pt x="4114183" y="345"/>
+                </a:lnTo>
+                <a:lnTo>
+                  <a:pt x="4148756" y="348"/>
+                </a:lnTo>
+                <a:lnTo>
+                  <a:pt x="4183329" y="350"/>
+                </a:lnTo>
+                <a:lnTo>
+                  <a:pt x="4217902" y="351"/>
+                </a:lnTo>
+                <a:lnTo>
+                  <a:pt x="4252474" y="351"/>
+                </a:lnTo>
+                <a:lnTo>
+                  <a:pt x="4287047" y="350"/>
+                </a:lnTo>
+                <a:lnTo>
+                  <a:pt x="4321620" y="347"/>
+                </a:lnTo>
+                <a:lnTo>
+                  <a:pt x="4356193" y="344"/>
+                </a:lnTo>
+                <a:lnTo>
+                  <a:pt x="4390766" y="340"/>
+                </a:lnTo>
+                <a:lnTo>
+                  <a:pt x="4425339" y="335"/>
+                </a:lnTo>
+                <a:lnTo>
+                  <a:pt x="4459912" y="328"/>
+                </a:lnTo>
+                <a:lnTo>
+                  <a:pt x="4494485" y="321"/>
+                </a:lnTo>
+                <a:lnTo>
+                  <a:pt x="4529058" y="313"/>
+                </a:lnTo>
+                <a:lnTo>
+                  <a:pt x="4563631" y="304"/>
+                </a:lnTo>
+                <a:lnTo>
+                  <a:pt x="4598204" y="294"/>
+                </a:lnTo>
+                <a:lnTo>
+                  <a:pt x="4632777" y="283"/>
+                </a:lnTo>
+                <a:lnTo>
+                  <a:pt x="4667350" y="271"/>
+                </a:lnTo>
+                <a:lnTo>
+                  <a:pt x="4701923" y="259"/>
+                </a:lnTo>
+                <a:lnTo>
+                  <a:pt x="4736496" y="246"/>
+                </a:lnTo>
+                <a:lnTo>
+                  <a:pt x="4771069" y="232"/>
+                </a:lnTo>
+                <a:lnTo>
+                  <a:pt x="4805642" y="218"/>
+                </a:lnTo>
+                <a:lnTo>
+                  <a:pt x="4840215" y="204"/>
+                </a:lnTo>
+                <a:lnTo>
+                  <a:pt x="4874788" y="189"/>
+                </a:lnTo>
+                <a:lnTo>
+                  <a:pt x="4909361" y="173"/>
+                </a:lnTo>
+                <a:lnTo>
+                  <a:pt x="4922943" y="167"/>
+                </a:lnTo>
+              </a:path>
+            </a:pathLst>
+          </a:custGeom>
+          <a:noFill/>
+          <a:ln w="40640">
+            <a:solidFill>
+              <a:srgbClr val="8EDBD4"/>
+            </a:solidFill>
+          </a:ln>
+          <a:effectLst/>
+        </p:spPr>
+        <p:txBody>
+          <a:bodyPr rtlCol="0" anchor="ctr"/>
+          <a:lstStyle/>
+          <a:p>
+            <a:pPr algn="ctr"/>
+          </a:p>
+        </p:txBody>
+      </p:sp>
+      <p:sp>
+        <p:nvSpPr>
+          <p:cNvPr id="34" name="C1-E29 polygon 32" descr="sci-ppt:o032"/>
+          <p:cNvSpPr/>
+          <p:nvPr/>
+        </p:nvSpPr>
+        <p:spPr>
+          <a:xfrm>
+            <a:off x="6865408" y="2992514"/>
+            <a:ext cx="4922943" cy="1712430"/>
+          </a:xfrm>
+          <a:custGeom>
+            <a:avLst/>
+            <a:gdLst/>
+            <a:ahLst/>
+            <a:cxnLst/>
+            <a:rect l="l" t="t" r="r" b="b"/>
+            <a:pathLst>
+              <a:path w="4922943" h="1712430">
+                <a:moveTo>
+                  <a:pt x="0" y="1712430"/>
+                </a:moveTo>
+                <a:lnTo>
+                  <a:pt x="34573" y="1688100"/>
+                </a:lnTo>
+                <a:lnTo>
+                  <a:pt x="69146" y="1632005"/>
+                </a:lnTo>
+                <a:lnTo>
+                  <a:pt x="103719" y="1549323"/>
+                </a:lnTo>
+                <a:lnTo>
+                  <a:pt x="138292" y="1446970"/>
+                </a:lnTo>
+                <a:lnTo>
+                  <a:pt x="172865" y="1332374"/>
+                </a:lnTo>
+                <a:lnTo>
+                  <a:pt x="207438" y="1212422"/>
+                </a:lnTo>
+                <a:lnTo>
+                  <a:pt x="242011" y="1092791"/>
+                </a:lnTo>
+                <a:lnTo>
+                  <a:pt x="276584" y="977685"/>
+                </a:lnTo>
+                <a:lnTo>
+                  <a:pt x="311157" y="869873"/>
+                </a:lnTo>
+                <a:lnTo>
+                  <a:pt x="345730" y="770915"/>
+                </a:lnTo>
+                <a:lnTo>
+                  <a:pt x="380303" y="681442"/>
+                </a:lnTo>
+                <a:lnTo>
+                  <a:pt x="414876" y="601438"/>
+                </a:lnTo>
+                <a:lnTo>
+                  <a:pt x="449449" y="530471"/>
+                </a:lnTo>
+                <a:lnTo>
+                  <a:pt x="484021" y="467873"/>
+                </a:lnTo>
+                <a:lnTo>
+                  <a:pt x="518594" y="412863"/>
+                </a:lnTo>
+                <a:lnTo>
+                  <a:pt x="553167" y="364632"/>
+                </a:lnTo>
+                <a:lnTo>
+                  <a:pt x="587740" y="322397"/>
+                </a:lnTo>
+                <a:lnTo>
+                  <a:pt x="622313" y="285425"/>
+                </a:lnTo>
+                <a:lnTo>
+                  <a:pt x="656886" y="253052"/>
+                </a:lnTo>
+                <a:lnTo>
+                  <a:pt x="691459" y="224684"/>
+                </a:lnTo>
+                <a:lnTo>
+                  <a:pt x="726032" y="199798"/>
+                </a:lnTo>
+                <a:lnTo>
+                  <a:pt x="760605" y="177937"/>
+                </a:lnTo>
+                <a:lnTo>
+                  <a:pt x="795178" y="158704"/>
+                </a:lnTo>
+                <a:lnTo>
+                  <a:pt x="829751" y="141754"/>
+                </a:lnTo>
+                <a:lnTo>
+                  <a:pt x="864324" y="126790"/>
+                </a:lnTo>
+                <a:lnTo>
+                  <a:pt x="898897" y="113557"/>
+                </a:lnTo>
+                <a:lnTo>
+                  <a:pt x="933470" y="101832"/>
+                </a:lnTo>
+                <a:lnTo>
+                  <a:pt x="968043" y="91426"/>
+                </a:lnTo>
+                <a:lnTo>
+                  <a:pt x="1002616" y="82175"/>
+                </a:lnTo>
+                <a:lnTo>
+                  <a:pt x="1037189" y="73935"/>
+                </a:lnTo>
+                <a:lnTo>
+                  <a:pt x="1071762" y="66584"/>
+                </a:lnTo>
+                <a:lnTo>
+                  <a:pt x="1106335" y="60016"/>
+                </a:lnTo>
+                <a:lnTo>
+                  <a:pt x="1140908" y="54138"/>
+                </a:lnTo>
+                <a:lnTo>
+                  <a:pt x="1175481" y="48870"/>
+                </a:lnTo>
+                <a:lnTo>
+                  <a:pt x="1210054" y="44142"/>
+                </a:lnTo>
+                <a:lnTo>
+                  <a:pt x="1244627" y="39893"/>
+                </a:lnTo>
+                <a:lnTo>
+                  <a:pt x="1279200" y="36070"/>
+                </a:lnTo>
+                <a:lnTo>
+                  <a:pt x="1313773" y="32625"/>
+                </a:lnTo>
+                <a:lnTo>
+                  <a:pt x="1348346" y="29518"/>
+                </a:lnTo>
+                <a:lnTo>
+                  <a:pt x="1382919" y="26713"/>
+                </a:lnTo>
+                <a:lnTo>
+                  <a:pt x="1417491" y="24177"/>
+                </a:lnTo>
+                <a:lnTo>
+                  <a:pt x="1452064" y="21884"/>
+                </a:lnTo>
+                <a:lnTo>
+                  <a:pt x="1486637" y="19807"/>
+                </a:lnTo>
+                <a:lnTo>
+                  <a:pt x="1521210" y="17926"/>
+                </a:lnTo>
+                <a:lnTo>
+                  <a:pt x="1555783" y="16220"/>
+                </a:lnTo>
+                <a:lnTo>
+                  <a:pt x="1590356" y="14673"/>
+                </a:lnTo>
+                <a:lnTo>
+                  <a:pt x="1624929" y="13268"/>
+                </a:lnTo>
+                <a:lnTo>
+                  <a:pt x="1659502" y="11992"/>
+                </a:lnTo>
+                <a:lnTo>
+                  <a:pt x="1694075" y="10833"/>
+                </a:lnTo>
+                <a:lnTo>
+                  <a:pt x="1728648" y="9780"/>
+                </a:lnTo>
+                <a:lnTo>
+                  <a:pt x="1763221" y="8822"/>
+                </a:lnTo>
+                <a:lnTo>
+                  <a:pt x="1797794" y="7952"/>
+                </a:lnTo>
+                <a:lnTo>
+                  <a:pt x="1832367" y="7160"/>
+                </a:lnTo>
+                <a:lnTo>
+                  <a:pt x="1866940" y="6440"/>
+                </a:lnTo>
+                <a:lnTo>
+                  <a:pt x="1901513" y="5786"/>
+                </a:lnTo>
+                <a:lnTo>
+                  <a:pt x="1936086" y="5191"/>
+                </a:lnTo>
+                <a:lnTo>
+                  <a:pt x="1970659" y="4650"/>
+                </a:lnTo>
+                <a:lnTo>
+                  <a:pt x="2005232" y="4159"/>
+                </a:lnTo>
+                <a:lnTo>
+                  <a:pt x="2039805" y="3713"/>
+                </a:lnTo>
+                <a:lnTo>
+                  <a:pt x="2074378" y="3308"/>
+                </a:lnTo>
+                <a:lnTo>
+                  <a:pt x="2108951" y="2941"/>
+                </a:lnTo>
+                <a:lnTo>
+                  <a:pt x="2143524" y="2608"/>
+                </a:lnTo>
+                <a:lnTo>
+                  <a:pt x="2178097" y="2307"/>
+                </a:lnTo>
+                <a:lnTo>
+                  <a:pt x="2212670" y="2034"/>
+                </a:lnTo>
+                <a:lnTo>
+                  <a:pt x="2247243" y="1788"/>
+                </a:lnTo>
+                <a:lnTo>
+                  <a:pt x="2281816" y="1567"/>
+                </a:lnTo>
+                <a:lnTo>
+                  <a:pt x="2316389" y="1367"/>
+                </a:lnTo>
+                <a:lnTo>
+                  <a:pt x="2350961" y="1187"/>
+                </a:lnTo>
+                <a:lnTo>
+                  <a:pt x="2385534" y="1026"/>
+                </a:lnTo>
+                <a:lnTo>
+                  <a:pt x="2420107" y="882"/>
+                </a:lnTo>
+                <a:lnTo>
+                  <a:pt x="2454680" y="754"/>
+                </a:lnTo>
+                <a:lnTo>
+                  <a:pt x="2489253" y="640"/>
+                </a:lnTo>
+                <a:lnTo>
+                  <a:pt x="2523826" y="539"/>
+                </a:lnTo>
+                <a:lnTo>
+                  <a:pt x="2558399" y="449"/>
+                </a:lnTo>
+                <a:lnTo>
+                  <a:pt x="2592972" y="371"/>
+                </a:lnTo>
+                <a:lnTo>
+                  <a:pt x="2627545" y="302"/>
+                </a:lnTo>
+                <a:lnTo>
+                  <a:pt x="2662118" y="243"/>
+                </a:lnTo>
+                <a:lnTo>
+                  <a:pt x="2696691" y="192"/>
+                </a:lnTo>
+                <a:lnTo>
+                  <a:pt x="2731264" y="148"/>
+                </a:lnTo>
+                <a:lnTo>
+                  <a:pt x="2765837" y="112"/>
+                </a:lnTo>
+                <a:lnTo>
+                  <a:pt x="2800410" y="81"/>
+                </a:lnTo>
+                <a:lnTo>
+                  <a:pt x="2834983" y="57"/>
+                </a:lnTo>
+                <a:lnTo>
+                  <a:pt x="2869556" y="37"/>
+                </a:lnTo>
+                <a:lnTo>
+                  <a:pt x="2904129" y="22"/>
+                </a:lnTo>
+                <a:lnTo>
+                  <a:pt x="2938702" y="11"/>
+                </a:lnTo>
+                <a:lnTo>
+                  <a:pt x="2973275" y="4"/>
+                </a:lnTo>
+                <a:lnTo>
+                  <a:pt x="3007848" y="1"/>
+                </a:lnTo>
+                <a:lnTo>
+                  <a:pt x="3042421" y="0"/>
+                </a:lnTo>
+                <a:lnTo>
+                  <a:pt x="3076994" y="2"/>
+                </a:lnTo>
+                <a:lnTo>
+                  <a:pt x="3111567" y="7"/>
+                </a:lnTo>
+                <a:lnTo>
+                  <a:pt x="3146140" y="13"/>
+                </a:lnTo>
+                <a:lnTo>
+                  <a:pt x="3180713" y="22"/>
+                </a:lnTo>
+                <a:lnTo>
+                  <a:pt x="3215286" y="32"/>
+                </a:lnTo>
+                <a:lnTo>
+                  <a:pt x="3249859" y="43"/>
+                </a:lnTo>
+                <a:lnTo>
+                  <a:pt x="3284432" y="56"/>
+                </a:lnTo>
+                <a:lnTo>
+                  <a:pt x="3319004" y="69"/>
+                </a:lnTo>
+                <a:lnTo>
+                  <a:pt x="3353577" y="83"/>
+                </a:lnTo>
+                <a:lnTo>
+                  <a:pt x="3388150" y="98"/>
+                </a:lnTo>
+                <a:lnTo>
+                  <a:pt x="3422723" y="113"/>
+                </a:lnTo>
+                <a:lnTo>
+                  <a:pt x="3457296" y="128"/>
+                </a:lnTo>
+                <a:lnTo>
+                  <a:pt x="3491869" y="144"/>
+                </a:lnTo>
+                <a:lnTo>
+                  <a:pt x="3526442" y="159"/>
+                </a:lnTo>
+                <a:lnTo>
+                  <a:pt x="3561015" y="175"/>
+                </a:lnTo>
+                <a:lnTo>
+                  <a:pt x="3595588" y="190"/>
+                </a:lnTo>
+                <a:lnTo>
+                  <a:pt x="3630161" y="205"/>
+                </a:lnTo>
+                <a:lnTo>
+                  <a:pt x="3664734" y="220"/>
+                </a:lnTo>
+                <a:lnTo>
+                  <a:pt x="3699307" y="234"/>
+                </a:lnTo>
+                <a:lnTo>
+                  <a:pt x="3733880" y="247"/>
+                </a:lnTo>
+                <a:lnTo>
+                  <a:pt x="3768453" y="260"/>
+                </a:lnTo>
+                <a:lnTo>
+                  <a:pt x="3803026" y="273"/>
+                </a:lnTo>
+                <a:lnTo>
+                  <a:pt x="3837599" y="284"/>
+                </a:lnTo>
+                <a:lnTo>
+                  <a:pt x="3872172" y="295"/>
+                </a:lnTo>
+                <a:lnTo>
+                  <a:pt x="3906745" y="305"/>
+                </a:lnTo>
+                <a:lnTo>
+                  <a:pt x="3941318" y="314"/>
+                </a:lnTo>
+                <a:lnTo>
+                  <a:pt x="3975891" y="322"/>
+                </a:lnTo>
+                <a:lnTo>
+                  <a:pt x="4010464" y="329"/>
+                </a:lnTo>
+                <a:lnTo>
+                  <a:pt x="4045037" y="335"/>
+                </a:lnTo>
+                <a:lnTo>
+                  <a:pt x="4079610" y="340"/>
+                </a:lnTo>
+                <a:lnTo>
+                  <a:pt x="4114183" y="345"/>
+                </a:lnTo>
+                <a:lnTo>
+                  <a:pt x="4148756" y="348"/>
+                </a:lnTo>
+                <a:lnTo>
+                  <a:pt x="4183329" y="350"/>
+                </a:lnTo>
+                <a:lnTo>
+                  <a:pt x="4217902" y="351"/>
+                </a:lnTo>
+                <a:lnTo>
+                  <a:pt x="4252474" y="351"/>
+                </a:lnTo>
+                <a:lnTo>
+                  <a:pt x="4287047" y="350"/>
+                </a:lnTo>
+                <a:lnTo>
+                  <a:pt x="4321620" y="347"/>
+                </a:lnTo>
+                <a:lnTo>
+                  <a:pt x="4356193" y="344"/>
+                </a:lnTo>
+                <a:lnTo>
+                  <a:pt x="4390766" y="340"/>
+                </a:lnTo>
+                <a:lnTo>
+                  <a:pt x="4425339" y="335"/>
+                </a:lnTo>
+                <a:lnTo>
+                  <a:pt x="4459912" y="328"/>
+                </a:lnTo>
+                <a:lnTo>
+                  <a:pt x="4494485" y="321"/>
+                </a:lnTo>
+                <a:lnTo>
+                  <a:pt x="4529058" y="313"/>
+                </a:lnTo>
+                <a:lnTo>
+                  <a:pt x="4563631" y="304"/>
+                </a:lnTo>
+                <a:lnTo>
+                  <a:pt x="4598204" y="294"/>
+                </a:lnTo>
+                <a:lnTo>
+                  <a:pt x="4632777" y="283"/>
+                </a:lnTo>
+                <a:lnTo>
+                  <a:pt x="4667350" y="271"/>
+                </a:lnTo>
+                <a:lnTo>
+                  <a:pt x="4701923" y="259"/>
+                </a:lnTo>
+                <a:lnTo>
+                  <a:pt x="4736496" y="246"/>
+                </a:lnTo>
+                <a:lnTo>
+                  <a:pt x="4771069" y="232"/>
+                </a:lnTo>
+                <a:lnTo>
+                  <a:pt x="4805642" y="218"/>
+                </a:lnTo>
+                <a:lnTo>
+                  <a:pt x="4840215" y="204"/>
+                </a:lnTo>
+                <a:lnTo>
+                  <a:pt x="4874788" y="189"/>
+                </a:lnTo>
+                <a:lnTo>
+                  <a:pt x="4909361" y="173"/>
+                </a:lnTo>
+                <a:lnTo>
+                  <a:pt x="4922943" y="167"/>
+                </a:lnTo>
+              </a:path>
+            </a:pathLst>
+          </a:custGeom>
+          <a:noFill/>
+          <a:ln w="20320">
+            <a:solidFill>
+              <a:srgbClr val="FFFFFF"/>
+            </a:solidFill>
+            <a:prstDash val="dash"/>
+          </a:ln>
+          <a:effectLst/>
+        </p:spPr>
+        <p:txBody>
+          <a:bodyPr rtlCol="0" anchor="ctr"/>
+          <a:lstStyle/>
+          <a:p>
+            <a:pPr algn="ctr"/>
+          </a:p>
+        </p:txBody>
+      </p:sp>
+      <p:sp>
+        <p:nvSpPr>
+          <p:cNvPr id="35" name="C1-E29 text 33" descr="sci-ppt:o033"/>
+          <p:cNvSpPr txBox="1"/>
+          <p:nvPr/>
+        </p:nvSpPr>
+        <p:spPr>
+          <a:xfrm>
+            <a:off x="7095744" y="1407261"/>
+            <a:ext cx="4754880" cy="216153"/>
+          </a:xfrm>
+          <a:prstGeom prst="rect">
+            <a:avLst/>
+          </a:prstGeom>
+          <a:noFill/>
+          <a:effectLst/>
+        </p:spPr>
+        <p:txBody>
+          <a:bodyPr wrap="none" lIns="18288" rIns="18288" tIns="18288" bIns="18288" anchor="t">
+            <a:spAutoFit/>
+          </a:bodyPr>
+          <a:lstStyle/>
+          <a:p>
+            <a:pPr algn="l">
+              <a:spcAft>
+                <a:spcPts val="0"/>
+              </a:spcAft>
+            </a:pPr>
+            <a:r>
+              <a:rPr sz="1100" b="0" i="0">
+                <a:solidFill>
+                  <a:srgbClr val="E7F0F3"/>
+                </a:solidFill>
+                <a:latin typeface="Arial"/>
+              </a:rPr>
+              <a:t>solid: left side, dashed: right side; relative gap 1e-05</a:t>
+            </a:r>
+          </a:p>
+        </p:txBody>
+      </p:sp>
+      <p:sp>
+        <p:nvSpPr>
+          <p:cNvPr id="36" name="C1-E29 round_rect 34" descr="sci-ppt:o034"/>
+          <p:cNvSpPr/>
+          <p:nvPr/>
+        </p:nvSpPr>
+        <p:spPr>
+          <a:xfrm>
             <a:off x="365760" y="914400"/>
-            <a:ext cx="5486400" cy="4937760"/>
+            <a:ext cx="5669280" cy="4937760"/>
           </a:xfrm>
           <a:prstGeom prst="roundRect">
             <a:avLst/>
@@ -3170,14 +4991,14 @@
       </p:sp>
       <p:sp>
         <p:nvSpPr>
-          <p:cNvPr id="4" name="C1-E29 text 2" descr="sci-ppt:o002"/>
+          <p:cNvPr id="37" name="C1-E29 text 35" descr="sci-ppt:o035"/>
           <p:cNvSpPr txBox="1"/>
           <p:nvPr/>
         </p:nvSpPr>
         <p:spPr>
           <a:xfrm>
             <a:off x="475488" y="969264"/>
-            <a:ext cx="5266944" cy="254889"/>
+            <a:ext cx="5449824" cy="254889"/>
           </a:xfrm>
           <a:prstGeom prst="rect">
             <a:avLst/>
@@ -3203,302 +5024,21 @@
                 </a:solidFill>
                 <a:latin typeface="Arial"/>
               </a:rPr>
-              <a:t>A shape that is not a sphere</a:t>
-            </a:r>
-          </a:p>
-        </p:txBody>
-      </p:sp>
-      <p:sp>
-        <p:nvSpPr>
-          <p:cNvPr id="5" name="C1-E29 polygon 3" descr="sci-ppt:o003"/>
-          <p:cNvSpPr/>
-          <p:nvPr/>
-        </p:nvSpPr>
-        <p:spPr>
-          <a:xfrm>
-            <a:off x="1685048" y="2628162"/>
-            <a:ext cx="3152676" cy="1510235"/>
-          </a:xfrm>
-          <a:custGeom>
-            <a:avLst/>
-            <a:gdLst/>
-            <a:ahLst/>
-            <a:cxnLst/>
-            <a:rect l="l" t="t" r="r" b="b"/>
-            <a:pathLst>
-              <a:path w="3152676" h="1510235">
-                <a:moveTo>
-                  <a:pt x="3152676" y="755118"/>
-                </a:moveTo>
-                <a:lnTo>
-                  <a:pt x="3142764" y="653859"/>
-                </a:lnTo>
-                <a:lnTo>
-                  <a:pt x="3113333" y="554796"/>
-                </a:lnTo>
-                <a:lnTo>
-                  <a:pt x="3065286" y="460027"/>
-                </a:lnTo>
-                <a:lnTo>
-                  <a:pt x="3000076" y="371460"/>
-                </a:lnTo>
-                <a:lnTo>
-                  <a:pt x="2919636" y="290738"/>
-                </a:lnTo>
-                <a:lnTo>
-                  <a:pt x="2826287" y="219163"/>
-                </a:lnTo>
-                <a:lnTo>
-                  <a:pt x="2722620" y="157652"/>
-                </a:lnTo>
-                <a:lnTo>
-                  <a:pt x="2611377" y="106709"/>
-                </a:lnTo>
-                <a:lnTo>
-                  <a:pt x="2495317" y="66415"/>
-                </a:lnTo>
-                <a:lnTo>
-                  <a:pt x="2377091" y="36444"/>
-                </a:lnTo>
-                <a:lnTo>
-                  <a:pt x="2259126" y="16100"/>
-                </a:lnTo>
-                <a:lnTo>
-                  <a:pt x="2143517" y="4370"/>
-                </a:lnTo>
-                <a:lnTo>
-                  <a:pt x="2031947" y="0"/>
-                </a:lnTo>
-                <a:lnTo>
-                  <a:pt x="1925628" y="1567"/>
-                </a:lnTo>
-                <a:lnTo>
-                  <a:pt x="1825274" y="7579"/>
-                </a:lnTo>
-                <a:lnTo>
-                  <a:pt x="1731097" y="16558"/>
-                </a:lnTo>
-                <a:lnTo>
-                  <a:pt x="1642835" y="27128"/>
-                </a:lnTo>
-                <a:lnTo>
-                  <a:pt x="1559811" y="38100"/>
-                </a:lnTo>
-                <a:lnTo>
-                  <a:pt x="1481003" y="48531"/>
-                </a:lnTo>
-                <a:lnTo>
-                  <a:pt x="1405150" y="57780"/>
-                </a:lnTo>
-                <a:lnTo>
-                  <a:pt x="1330852" y="65538"/>
-                </a:lnTo>
-                <a:lnTo>
-                  <a:pt x="1256693" y="71837"/>
-                </a:lnTo>
-                <a:lnTo>
-                  <a:pt x="1181351" y="77041"/>
-                </a:lnTo>
-                <a:lnTo>
-                  <a:pt x="1103709" y="81818"/>
-                </a:lnTo>
-                <a:lnTo>
-                  <a:pt x="1022946" y="87087"/>
-                </a:lnTo>
-                <a:lnTo>
-                  <a:pt x="938617" y="93960"/>
-                </a:lnTo>
-                <a:lnTo>
-                  <a:pt x="850701" y="103658"/>
-                </a:lnTo>
-                <a:lnTo>
-                  <a:pt x="759630" y="117436"/>
-                </a:lnTo>
-                <a:lnTo>
-                  <a:pt x="666282" y="136495"/>
-                </a:lnTo>
-                <a:lnTo>
-                  <a:pt x="571959" y="161898"/>
-                </a:lnTo>
-                <a:lnTo>
-                  <a:pt x="478324" y="194498"/>
-                </a:lnTo>
-                <a:lnTo>
-                  <a:pt x="387331" y="234875"/>
-                </a:lnTo>
-                <a:lnTo>
-                  <a:pt x="301117" y="283286"/>
-                </a:lnTo>
-                <a:lnTo>
-                  <a:pt x="221907" y="339636"/>
-                </a:lnTo>
-                <a:lnTo>
-                  <a:pt x="151885" y="403475"/>
-                </a:lnTo>
-                <a:lnTo>
-                  <a:pt x="93089" y="474001"/>
-                </a:lnTo>
-                <a:lnTo>
-                  <a:pt x="47298" y="550094"/>
-                </a:lnTo>
-                <a:lnTo>
-                  <a:pt x="15937" y="630371"/>
-                </a:lnTo>
-                <a:lnTo>
-                  <a:pt x="0" y="713242"/>
-                </a:lnTo>
-                <a:lnTo>
-                  <a:pt x="0" y="796993"/>
-                </a:lnTo>
-                <a:lnTo>
-                  <a:pt x="15937" y="879864"/>
-                </a:lnTo>
-                <a:lnTo>
-                  <a:pt x="47298" y="960141"/>
-                </a:lnTo>
-                <a:lnTo>
-                  <a:pt x="93089" y="1036234"/>
-                </a:lnTo>
-                <a:lnTo>
-                  <a:pt x="151885" y="1106760"/>
-                </a:lnTo>
-                <a:lnTo>
-                  <a:pt x="221907" y="1170599"/>
-                </a:lnTo>
-                <a:lnTo>
-                  <a:pt x="301117" y="1226949"/>
-                </a:lnTo>
-                <a:lnTo>
-                  <a:pt x="387331" y="1275360"/>
-                </a:lnTo>
-                <a:lnTo>
-                  <a:pt x="478324" y="1315737"/>
-                </a:lnTo>
-                <a:lnTo>
-                  <a:pt x="571959" y="1348337"/>
-                </a:lnTo>
-                <a:lnTo>
-                  <a:pt x="666282" y="1373740"/>
-                </a:lnTo>
-                <a:lnTo>
-                  <a:pt x="759630" y="1392799"/>
-                </a:lnTo>
-                <a:lnTo>
-                  <a:pt x="850701" y="1406577"/>
-                </a:lnTo>
-                <a:lnTo>
-                  <a:pt x="938617" y="1416275"/>
-                </a:lnTo>
-                <a:lnTo>
-                  <a:pt x="1022946" y="1423148"/>
-                </a:lnTo>
-                <a:lnTo>
-                  <a:pt x="1103709" y="1428417"/>
-                </a:lnTo>
-                <a:lnTo>
-                  <a:pt x="1181351" y="1433194"/>
-                </a:lnTo>
-                <a:lnTo>
-                  <a:pt x="1256693" y="1438398"/>
-                </a:lnTo>
-                <a:lnTo>
-                  <a:pt x="1330852" y="1444697"/>
-                </a:lnTo>
-                <a:lnTo>
-                  <a:pt x="1405150" y="1452455"/>
-                </a:lnTo>
-                <a:lnTo>
-                  <a:pt x="1481003" y="1461704"/>
-                </a:lnTo>
-                <a:lnTo>
-                  <a:pt x="1559811" y="1472135"/>
-                </a:lnTo>
-                <a:lnTo>
-                  <a:pt x="1642835" y="1483107"/>
-                </a:lnTo>
-                <a:lnTo>
-                  <a:pt x="1731097" y="1493677"/>
-                </a:lnTo>
-                <a:lnTo>
-                  <a:pt x="1825274" y="1502656"/>
-                </a:lnTo>
-                <a:lnTo>
-                  <a:pt x="1925628" y="1508668"/>
-                </a:lnTo>
-                <a:lnTo>
-                  <a:pt x="2031947" y="1510235"/>
-                </a:lnTo>
-                <a:lnTo>
-                  <a:pt x="2143517" y="1505865"/>
-                </a:lnTo>
-                <a:lnTo>
-                  <a:pt x="2259126" y="1494135"/>
-                </a:lnTo>
-                <a:lnTo>
-                  <a:pt x="2377091" y="1473791"/>
-                </a:lnTo>
-                <a:lnTo>
-                  <a:pt x="2495317" y="1443820"/>
-                </a:lnTo>
-                <a:lnTo>
-                  <a:pt x="2611377" y="1403526"/>
-                </a:lnTo>
-                <a:lnTo>
-                  <a:pt x="2722620" y="1352583"/>
-                </a:lnTo>
-                <a:lnTo>
-                  <a:pt x="2826287" y="1291072"/>
-                </a:lnTo>
-                <a:lnTo>
-                  <a:pt x="2919636" y="1219497"/>
-                </a:lnTo>
-                <a:lnTo>
-                  <a:pt x="3000076" y="1138775"/>
-                </a:lnTo>
-                <a:lnTo>
-                  <a:pt x="3065286" y="1050208"/>
-                </a:lnTo>
-                <a:lnTo>
-                  <a:pt x="3113333" y="955439"/>
-                </a:lnTo>
-                <a:lnTo>
-                  <a:pt x="3142764" y="856376"/>
-                </a:lnTo>
-                <a:lnTo>
-                  <a:pt x="3152676" y="755118"/>
-                </a:lnTo>
-                <a:close/>
-              </a:path>
-            </a:pathLst>
-          </a:custGeom>
-          <a:solidFill>
-            <a:srgbClr val="0C1820"/>
-          </a:solidFill>
-          <a:ln w="30480">
-            <a:solidFill>
-              <a:srgbClr val="F2B880"/>
-            </a:solidFill>
-          </a:ln>
-          <a:effectLst/>
-        </p:spPr>
-        <p:txBody>
-          <a:bodyPr rtlCol="0" anchor="ctr"/>
-          <a:lstStyle/>
-          <a:p>
-            <a:pPr algn="ctr"/>
-          </a:p>
-        </p:txBody>
-      </p:sp>
-      <p:sp>
-        <p:nvSpPr>
-          <p:cNvPr id="6" name="C1-E29 text 4" descr="sci-ppt:o004"/>
+              <a:t>The general closure contains the sphere</a:t>
+            </a:r>
+          </a:p>
+        </p:txBody>
+      </p:sp>
+      <p:sp>
+        <p:nvSpPr>
+          <p:cNvPr id="38" name="C1-E29 text 36" descr="sci-ppt:o036"/>
           <p:cNvSpPr txBox="1"/>
           <p:nvPr/>
         </p:nvSpPr>
         <p:spPr>
           <a:xfrm>
-            <a:off x="2743200" y="3291840"/>
-            <a:ext cx="731520" cy="355599"/>
+            <a:off x="548640" y="1371600"/>
+            <a:ext cx="5303520" cy="239395"/>
           </a:xfrm>
           <a:prstGeom prst="rect">
             <a:avLst/>
@@ -3512,781 +5052,33 @@
           </a:bodyPr>
           <a:lstStyle/>
           <a:p>
-            <a:pPr algn="ctr">
+            <a:pPr algn="l">
               <a:spcAft>
                 <a:spcPts val="0"/>
               </a:spcAft>
             </a:pPr>
             <a:r>
-              <a:rPr sz="2000" b="1" i="0">
+              <a:rPr sz="1250" b="1" i="0">
                 <a:solidFill>
-                  <a:srgbClr val="F2B880"/>
+                  <a:srgbClr val="8EDBD4"/>
                 </a:solidFill>
                 <a:latin typeface="Arial"/>
               </a:rPr>
-              <a:t>Γ</a:t>
-            </a:r>
-          </a:p>
-        </p:txBody>
-      </p:sp>
-      <p:sp>
-        <p:nvSpPr>
-          <p:cNvPr id="7" name="C1-E29 rect 5" descr="sci-ppt:o005"/>
-          <p:cNvSpPr/>
-          <p:nvPr/>
-        </p:nvSpPr>
-        <p:spPr>
-          <a:xfrm>
-            <a:off x="731520" y="5394960"/>
-            <a:ext cx="4754880" cy="237744"/>
-          </a:xfrm>
-          <a:prstGeom prst="rect">
-            <a:avLst/>
-          </a:prstGeom>
-          <a:solidFill>
-            <a:srgbClr val="3A5362"/>
-          </a:solidFill>
-          <a:ln w="16510">
-            <a:solidFill>
-              <a:srgbClr val="B4C7D2"/>
-            </a:solidFill>
-          </a:ln>
-          <a:effectLst/>
-        </p:spPr>
-        <p:txBody>
-          <a:bodyPr rtlCol="0" anchor="ctr"/>
-          <a:lstStyle/>
-          <a:p>
-            <a:pPr algn="ctr"/>
-          </a:p>
-        </p:txBody>
-      </p:sp>
-      <p:cxnSp>
-        <p:nvCxnSpPr>
-          <p:cNvPr id="8" name="C1-E29 line 6" descr="sci-ppt:o006"/>
-          <p:cNvCxnSpPr/>
-          <p:nvPr/>
-        </p:nvCxnSpPr>
-        <p:spPr>
-          <a:xfrm>
-            <a:off x="749808" y="5632704"/>
-            <a:ext cx="137160" cy="155448"/>
-          </a:xfrm>
-          <a:prstGeom prst="line">
-            <a:avLst/>
-          </a:prstGeom>
-          <a:ln w="12700">
-            <a:solidFill>
-              <a:srgbClr val="B4C7D2"/>
-            </a:solidFill>
-          </a:ln>
-          <a:effectLst/>
-        </p:spPr>
-      </p:cxnSp>
-      <p:cxnSp>
-        <p:nvCxnSpPr>
-          <p:cNvPr id="9" name="C1-E29 line 7" descr="sci-ppt:o007"/>
-          <p:cNvCxnSpPr/>
-          <p:nvPr/>
-        </p:nvCxnSpPr>
-        <p:spPr>
-          <a:xfrm>
-            <a:off x="932688" y="5632704"/>
-            <a:ext cx="137160" cy="155448"/>
-          </a:xfrm>
-          <a:prstGeom prst="line">
-            <a:avLst/>
-          </a:prstGeom>
-          <a:ln w="12700">
-            <a:solidFill>
-              <a:srgbClr val="B4C7D2"/>
-            </a:solidFill>
-          </a:ln>
-          <a:effectLst/>
-        </p:spPr>
-      </p:cxnSp>
-      <p:cxnSp>
-        <p:nvCxnSpPr>
-          <p:cNvPr id="10" name="C1-E29 line 8" descr="sci-ppt:o008"/>
-          <p:cNvCxnSpPr/>
-          <p:nvPr/>
-        </p:nvCxnSpPr>
-        <p:spPr>
-          <a:xfrm>
-            <a:off x="1115568" y="5632704"/>
-            <a:ext cx="137160" cy="155448"/>
-          </a:xfrm>
-          <a:prstGeom prst="line">
-            <a:avLst/>
-          </a:prstGeom>
-          <a:ln w="12700">
-            <a:solidFill>
-              <a:srgbClr val="B4C7D2"/>
-            </a:solidFill>
-          </a:ln>
-          <a:effectLst/>
-        </p:spPr>
-      </p:cxnSp>
-      <p:cxnSp>
-        <p:nvCxnSpPr>
-          <p:cNvPr id="11" name="C1-E29 line 9" descr="sci-ppt:o009"/>
-          <p:cNvCxnSpPr/>
-          <p:nvPr/>
-        </p:nvCxnSpPr>
-        <p:spPr>
-          <a:xfrm>
-            <a:off x="1298448" y="5632704"/>
-            <a:ext cx="137160" cy="155448"/>
-          </a:xfrm>
-          <a:prstGeom prst="line">
-            <a:avLst/>
-          </a:prstGeom>
-          <a:ln w="12700">
-            <a:solidFill>
-              <a:srgbClr val="B4C7D2"/>
-            </a:solidFill>
-          </a:ln>
-          <a:effectLst/>
-        </p:spPr>
-      </p:cxnSp>
-      <p:cxnSp>
-        <p:nvCxnSpPr>
-          <p:cNvPr id="12" name="C1-E29 line 10" descr="sci-ppt:o010"/>
-          <p:cNvCxnSpPr/>
-          <p:nvPr/>
-        </p:nvCxnSpPr>
-        <p:spPr>
-          <a:xfrm>
-            <a:off x="1481328" y="5632704"/>
-            <a:ext cx="137160" cy="155448"/>
-          </a:xfrm>
-          <a:prstGeom prst="line">
-            <a:avLst/>
-          </a:prstGeom>
-          <a:ln w="12700">
-            <a:solidFill>
-              <a:srgbClr val="B4C7D2"/>
-            </a:solidFill>
-          </a:ln>
-          <a:effectLst/>
-        </p:spPr>
-      </p:cxnSp>
-      <p:cxnSp>
-        <p:nvCxnSpPr>
-          <p:cNvPr id="13" name="C1-E29 line 11" descr="sci-ppt:o011"/>
-          <p:cNvCxnSpPr/>
-          <p:nvPr/>
-        </p:nvCxnSpPr>
-        <p:spPr>
-          <a:xfrm>
-            <a:off x="1664208" y="5632704"/>
-            <a:ext cx="137160" cy="155448"/>
-          </a:xfrm>
-          <a:prstGeom prst="line">
-            <a:avLst/>
-          </a:prstGeom>
-          <a:ln w="12700">
-            <a:solidFill>
-              <a:srgbClr val="B4C7D2"/>
-            </a:solidFill>
-          </a:ln>
-          <a:effectLst/>
-        </p:spPr>
-      </p:cxnSp>
-      <p:cxnSp>
-        <p:nvCxnSpPr>
-          <p:cNvPr id="14" name="C1-E29 line 12" descr="sci-ppt:o012"/>
-          <p:cNvCxnSpPr/>
-          <p:nvPr/>
-        </p:nvCxnSpPr>
-        <p:spPr>
-          <a:xfrm>
-            <a:off x="1847088" y="5632704"/>
-            <a:ext cx="137160" cy="155448"/>
-          </a:xfrm>
-          <a:prstGeom prst="line">
-            <a:avLst/>
-          </a:prstGeom>
-          <a:ln w="12700">
-            <a:solidFill>
-              <a:srgbClr val="B4C7D2"/>
-            </a:solidFill>
-          </a:ln>
-          <a:effectLst/>
-        </p:spPr>
-      </p:cxnSp>
-      <p:cxnSp>
-        <p:nvCxnSpPr>
-          <p:cNvPr id="15" name="C1-E29 line 13" descr="sci-ppt:o013"/>
-          <p:cNvCxnSpPr/>
-          <p:nvPr/>
-        </p:nvCxnSpPr>
-        <p:spPr>
-          <a:xfrm>
-            <a:off x="2029968" y="5632704"/>
-            <a:ext cx="137160" cy="155448"/>
-          </a:xfrm>
-          <a:prstGeom prst="line">
-            <a:avLst/>
-          </a:prstGeom>
-          <a:ln w="12700">
-            <a:solidFill>
-              <a:srgbClr val="B4C7D2"/>
-            </a:solidFill>
-          </a:ln>
-          <a:effectLst/>
-        </p:spPr>
-      </p:cxnSp>
-      <p:cxnSp>
-        <p:nvCxnSpPr>
-          <p:cNvPr id="16" name="C1-E29 line 14" descr="sci-ppt:o014"/>
-          <p:cNvCxnSpPr/>
-          <p:nvPr/>
-        </p:nvCxnSpPr>
-        <p:spPr>
-          <a:xfrm>
-            <a:off x="2212848" y="5632704"/>
-            <a:ext cx="137160" cy="155448"/>
-          </a:xfrm>
-          <a:prstGeom prst="line">
-            <a:avLst/>
-          </a:prstGeom>
-          <a:ln w="12700">
-            <a:solidFill>
-              <a:srgbClr val="B4C7D2"/>
-            </a:solidFill>
-          </a:ln>
-          <a:effectLst/>
-        </p:spPr>
-      </p:cxnSp>
-      <p:cxnSp>
-        <p:nvCxnSpPr>
-          <p:cNvPr id="17" name="C1-E29 line 15" descr="sci-ppt:o015"/>
-          <p:cNvCxnSpPr/>
-          <p:nvPr/>
-        </p:nvCxnSpPr>
-        <p:spPr>
-          <a:xfrm>
-            <a:off x="2395728" y="5632704"/>
-            <a:ext cx="137160" cy="155448"/>
-          </a:xfrm>
-          <a:prstGeom prst="line">
-            <a:avLst/>
-          </a:prstGeom>
-          <a:ln w="12700">
-            <a:solidFill>
-              <a:srgbClr val="B4C7D2"/>
-            </a:solidFill>
-          </a:ln>
-          <a:effectLst/>
-        </p:spPr>
-      </p:cxnSp>
-      <p:cxnSp>
-        <p:nvCxnSpPr>
-          <p:cNvPr id="18" name="C1-E29 line 16" descr="sci-ppt:o016"/>
-          <p:cNvCxnSpPr/>
-          <p:nvPr/>
-        </p:nvCxnSpPr>
-        <p:spPr>
-          <a:xfrm>
-            <a:off x="2578608" y="5632704"/>
-            <a:ext cx="137160" cy="155448"/>
-          </a:xfrm>
-          <a:prstGeom prst="line">
-            <a:avLst/>
-          </a:prstGeom>
-          <a:ln w="12700">
-            <a:solidFill>
-              <a:srgbClr val="B4C7D2"/>
-            </a:solidFill>
-          </a:ln>
-          <a:effectLst/>
-        </p:spPr>
-      </p:cxnSp>
-      <p:cxnSp>
-        <p:nvCxnSpPr>
-          <p:cNvPr id="19" name="C1-E29 line 17" descr="sci-ppt:o017"/>
-          <p:cNvCxnSpPr/>
-          <p:nvPr/>
-        </p:nvCxnSpPr>
-        <p:spPr>
-          <a:xfrm>
-            <a:off x="2761488" y="5632704"/>
-            <a:ext cx="137160" cy="155448"/>
-          </a:xfrm>
-          <a:prstGeom prst="line">
-            <a:avLst/>
-          </a:prstGeom>
-          <a:ln w="12700">
-            <a:solidFill>
-              <a:srgbClr val="B4C7D2"/>
-            </a:solidFill>
-          </a:ln>
-          <a:effectLst/>
-        </p:spPr>
-      </p:cxnSp>
-      <p:cxnSp>
-        <p:nvCxnSpPr>
-          <p:cNvPr id="20" name="C1-E29 line 18" descr="sci-ppt:o018"/>
-          <p:cNvCxnSpPr/>
-          <p:nvPr/>
-        </p:nvCxnSpPr>
-        <p:spPr>
-          <a:xfrm>
-            <a:off x="2944368" y="5632704"/>
-            <a:ext cx="137160" cy="155448"/>
-          </a:xfrm>
-          <a:prstGeom prst="line">
-            <a:avLst/>
-          </a:prstGeom>
-          <a:ln w="12700">
-            <a:solidFill>
-              <a:srgbClr val="B4C7D2"/>
-            </a:solidFill>
-          </a:ln>
-          <a:effectLst/>
-        </p:spPr>
-      </p:cxnSp>
-      <p:cxnSp>
-        <p:nvCxnSpPr>
-          <p:cNvPr id="21" name="C1-E29 line 19" descr="sci-ppt:o019"/>
-          <p:cNvCxnSpPr/>
-          <p:nvPr/>
-        </p:nvCxnSpPr>
-        <p:spPr>
-          <a:xfrm>
-            <a:off x="3127248" y="5632704"/>
-            <a:ext cx="137160" cy="155448"/>
-          </a:xfrm>
-          <a:prstGeom prst="line">
-            <a:avLst/>
-          </a:prstGeom>
-          <a:ln w="12700">
-            <a:solidFill>
-              <a:srgbClr val="B4C7D2"/>
-            </a:solidFill>
-          </a:ln>
-          <a:effectLst/>
-        </p:spPr>
-      </p:cxnSp>
-      <p:cxnSp>
-        <p:nvCxnSpPr>
-          <p:cNvPr id="22" name="C1-E29 line 20" descr="sci-ppt:o020"/>
-          <p:cNvCxnSpPr/>
-          <p:nvPr/>
-        </p:nvCxnSpPr>
-        <p:spPr>
-          <a:xfrm>
-            <a:off x="3310128" y="5632704"/>
-            <a:ext cx="137160" cy="155448"/>
-          </a:xfrm>
-          <a:prstGeom prst="line">
-            <a:avLst/>
-          </a:prstGeom>
-          <a:ln w="12700">
-            <a:solidFill>
-              <a:srgbClr val="B4C7D2"/>
-            </a:solidFill>
-          </a:ln>
-          <a:effectLst/>
-        </p:spPr>
-      </p:cxnSp>
-      <p:cxnSp>
-        <p:nvCxnSpPr>
-          <p:cNvPr id="23" name="C1-E29 line 21" descr="sci-ppt:o021"/>
-          <p:cNvCxnSpPr/>
-          <p:nvPr/>
-        </p:nvCxnSpPr>
-        <p:spPr>
-          <a:xfrm>
-            <a:off x="3493008" y="5632704"/>
-            <a:ext cx="137160" cy="155448"/>
-          </a:xfrm>
-          <a:prstGeom prst="line">
-            <a:avLst/>
-          </a:prstGeom>
-          <a:ln w="12700">
-            <a:solidFill>
-              <a:srgbClr val="B4C7D2"/>
-            </a:solidFill>
-          </a:ln>
-          <a:effectLst/>
-        </p:spPr>
-      </p:cxnSp>
-      <p:cxnSp>
-        <p:nvCxnSpPr>
-          <p:cNvPr id="24" name="C1-E29 line 22" descr="sci-ppt:o022"/>
-          <p:cNvCxnSpPr/>
-          <p:nvPr/>
-        </p:nvCxnSpPr>
-        <p:spPr>
-          <a:xfrm>
-            <a:off x="3675887" y="5632704"/>
-            <a:ext cx="137161" cy="155448"/>
-          </a:xfrm>
-          <a:prstGeom prst="line">
-            <a:avLst/>
-          </a:prstGeom>
-          <a:ln w="12700">
-            <a:solidFill>
-              <a:srgbClr val="B4C7D2"/>
-            </a:solidFill>
-          </a:ln>
-          <a:effectLst/>
-        </p:spPr>
-      </p:cxnSp>
-      <p:cxnSp>
-        <p:nvCxnSpPr>
-          <p:cNvPr id="25" name="C1-E29 line 23" descr="sci-ppt:o023"/>
-          <p:cNvCxnSpPr/>
-          <p:nvPr/>
-        </p:nvCxnSpPr>
-        <p:spPr>
-          <a:xfrm>
-            <a:off x="3858768" y="5632704"/>
-            <a:ext cx="137160" cy="155448"/>
-          </a:xfrm>
-          <a:prstGeom prst="line">
-            <a:avLst/>
-          </a:prstGeom>
-          <a:ln w="12700">
-            <a:solidFill>
-              <a:srgbClr val="B4C7D2"/>
-            </a:solidFill>
-          </a:ln>
-          <a:effectLst/>
-        </p:spPr>
-      </p:cxnSp>
-      <p:cxnSp>
-        <p:nvCxnSpPr>
-          <p:cNvPr id="26" name="C1-E29 line 24" descr="sci-ppt:o024"/>
-          <p:cNvCxnSpPr/>
-          <p:nvPr/>
-        </p:nvCxnSpPr>
-        <p:spPr>
-          <a:xfrm>
-            <a:off x="4041648" y="5632704"/>
-            <a:ext cx="137160" cy="155448"/>
-          </a:xfrm>
-          <a:prstGeom prst="line">
-            <a:avLst/>
-          </a:prstGeom>
-          <a:ln w="12700">
-            <a:solidFill>
-              <a:srgbClr val="B4C7D2"/>
-            </a:solidFill>
-          </a:ln>
-          <a:effectLst/>
-        </p:spPr>
-      </p:cxnSp>
-      <p:cxnSp>
-        <p:nvCxnSpPr>
-          <p:cNvPr id="27" name="C1-E29 line 25" descr="sci-ppt:o025"/>
-          <p:cNvCxnSpPr/>
-          <p:nvPr/>
-        </p:nvCxnSpPr>
-        <p:spPr>
-          <a:xfrm>
-            <a:off x="4224528" y="5632704"/>
-            <a:ext cx="137160" cy="155448"/>
-          </a:xfrm>
-          <a:prstGeom prst="line">
-            <a:avLst/>
-          </a:prstGeom>
-          <a:ln w="12700">
-            <a:solidFill>
-              <a:srgbClr val="B4C7D2"/>
-            </a:solidFill>
-          </a:ln>
-          <a:effectLst/>
-        </p:spPr>
-      </p:cxnSp>
-      <p:cxnSp>
-        <p:nvCxnSpPr>
-          <p:cNvPr id="28" name="C1-E29 line 26" descr="sci-ppt:o026"/>
-          <p:cNvCxnSpPr/>
-          <p:nvPr/>
-        </p:nvCxnSpPr>
-        <p:spPr>
-          <a:xfrm>
-            <a:off x="4407407" y="5632704"/>
-            <a:ext cx="137161" cy="155448"/>
-          </a:xfrm>
-          <a:prstGeom prst="line">
-            <a:avLst/>
-          </a:prstGeom>
-          <a:ln w="12700">
-            <a:solidFill>
-              <a:srgbClr val="B4C7D2"/>
-            </a:solidFill>
-          </a:ln>
-          <a:effectLst/>
-        </p:spPr>
-      </p:cxnSp>
-      <p:cxnSp>
-        <p:nvCxnSpPr>
-          <p:cNvPr id="29" name="C1-E29 line 27" descr="sci-ppt:o027"/>
-          <p:cNvCxnSpPr/>
-          <p:nvPr/>
-        </p:nvCxnSpPr>
-        <p:spPr>
-          <a:xfrm>
-            <a:off x="4590288" y="5632704"/>
-            <a:ext cx="137160" cy="155448"/>
-          </a:xfrm>
-          <a:prstGeom prst="line">
-            <a:avLst/>
-          </a:prstGeom>
-          <a:ln w="12700">
-            <a:solidFill>
-              <a:srgbClr val="B4C7D2"/>
-            </a:solidFill>
-          </a:ln>
-          <a:effectLst/>
-        </p:spPr>
-      </p:cxnSp>
-      <p:cxnSp>
-        <p:nvCxnSpPr>
-          <p:cNvPr id="30" name="C1-E29 line 28" descr="sci-ppt:o028"/>
-          <p:cNvCxnSpPr/>
-          <p:nvPr/>
-        </p:nvCxnSpPr>
-        <p:spPr>
-          <a:xfrm>
-            <a:off x="4773168" y="5632704"/>
-            <a:ext cx="137160" cy="155448"/>
-          </a:xfrm>
-          <a:prstGeom prst="line">
-            <a:avLst/>
-          </a:prstGeom>
-          <a:ln w="12700">
-            <a:solidFill>
-              <a:srgbClr val="B4C7D2"/>
-            </a:solidFill>
-          </a:ln>
-          <a:effectLst/>
-        </p:spPr>
-      </p:cxnSp>
-      <p:cxnSp>
-        <p:nvCxnSpPr>
-          <p:cNvPr id="31" name="C1-E29 line 29" descr="sci-ppt:o029"/>
-          <p:cNvCxnSpPr/>
-          <p:nvPr/>
-        </p:nvCxnSpPr>
-        <p:spPr>
-          <a:xfrm>
-            <a:off x="4956048" y="5632704"/>
-            <a:ext cx="137160" cy="155448"/>
-          </a:xfrm>
-          <a:prstGeom prst="line">
-            <a:avLst/>
-          </a:prstGeom>
-          <a:ln w="12700">
-            <a:solidFill>
-              <a:srgbClr val="B4C7D2"/>
-            </a:solidFill>
-          </a:ln>
-          <a:effectLst/>
-        </p:spPr>
-      </p:cxnSp>
-      <p:cxnSp>
-        <p:nvCxnSpPr>
-          <p:cNvPr id="32" name="C1-E29 line 30" descr="sci-ppt:o030"/>
-          <p:cNvCxnSpPr/>
-          <p:nvPr/>
-        </p:nvCxnSpPr>
-        <p:spPr>
-          <a:xfrm>
-            <a:off x="5138928" y="5632704"/>
-            <a:ext cx="137160" cy="155448"/>
-          </a:xfrm>
-          <a:prstGeom prst="line">
-            <a:avLst/>
-          </a:prstGeom>
-          <a:ln w="12700">
-            <a:solidFill>
-              <a:srgbClr val="B4C7D2"/>
-            </a:solidFill>
-          </a:ln>
-          <a:effectLst/>
-        </p:spPr>
-      </p:cxnSp>
-      <p:cxnSp>
-        <p:nvCxnSpPr>
-          <p:cNvPr id="33" name="C1-E29 line 31" descr="sci-ppt:o031"/>
-          <p:cNvCxnSpPr/>
-          <p:nvPr/>
-        </p:nvCxnSpPr>
-        <p:spPr>
-          <a:xfrm>
-            <a:off x="5321807" y="5632704"/>
-            <a:ext cx="137161" cy="155448"/>
-          </a:xfrm>
-          <a:prstGeom prst="line">
-            <a:avLst/>
-          </a:prstGeom>
-          <a:ln w="12700">
-            <a:solidFill>
-              <a:srgbClr val="B4C7D2"/>
-            </a:solidFill>
-          </a:ln>
-          <a:effectLst/>
-        </p:spPr>
-      </p:cxnSp>
-      <p:cxnSp>
-        <p:nvCxnSpPr>
-          <p:cNvPr id="34" name="C1-E29 arrow 32" descr="sci-ppt:o032"/>
-          <p:cNvCxnSpPr/>
-          <p:nvPr/>
-        </p:nvCxnSpPr>
-        <p:spPr>
-          <a:xfrm>
-            <a:off x="4837724" y="3383280"/>
-            <a:ext cx="502920" cy="0"/>
-          </a:xfrm>
-          <a:prstGeom prst="line">
-            <a:avLst/>
-          </a:prstGeom>
-          <a:ln w="27940">
-            <a:solidFill>
-              <a:srgbClr val="8EDBD4"/>
-            </a:solidFill>
-            <a:headEnd type="none" w="med" len="med"/>
-            <a:tailEnd type="triangle" w="med" len="med"/>
-          </a:ln>
-          <a:effectLst/>
-        </p:spPr>
-      </p:cxnSp>
-      <p:cxnSp>
-        <p:nvCxnSpPr>
-          <p:cNvPr id="35" name="C1-E29 arrow 33" descr="sci-ppt:o033"/>
-          <p:cNvCxnSpPr/>
-          <p:nvPr/>
-        </p:nvCxnSpPr>
-        <p:spPr>
-          <a:xfrm flipV="1">
-            <a:off x="3698885" y="2192509"/>
-            <a:ext cx="251460" cy="435542"/>
-          </a:xfrm>
-          <a:prstGeom prst="line">
-            <a:avLst/>
-          </a:prstGeom>
-          <a:ln w="27940">
-            <a:solidFill>
-              <a:srgbClr val="8EDBD4"/>
-            </a:solidFill>
-            <a:headEnd type="none" w="med" len="med"/>
-            <a:tailEnd type="triangle" w="med" len="med"/>
-          </a:ln>
-          <a:effectLst/>
-        </p:spPr>
-      </p:cxnSp>
-      <p:cxnSp>
-        <p:nvCxnSpPr>
-          <p:cNvPr id="36" name="C1-E29 arrow 34" descr="sci-ppt:o034"/>
-          <p:cNvCxnSpPr/>
-          <p:nvPr/>
-        </p:nvCxnSpPr>
-        <p:spPr>
-          <a:xfrm flipH="1" flipV="1">
-            <a:off x="2343287" y="2289437"/>
-            <a:ext cx="251460" cy="435541"/>
-          </a:xfrm>
-          <a:prstGeom prst="line">
-            <a:avLst/>
-          </a:prstGeom>
-          <a:ln w="27940">
-            <a:solidFill>
-              <a:srgbClr val="8EDBD4"/>
-            </a:solidFill>
-            <a:headEnd type="none" w="med" len="med"/>
-            <a:tailEnd type="triangle" w="med" len="med"/>
-          </a:ln>
-          <a:effectLst/>
-        </p:spPr>
-      </p:cxnSp>
-      <p:cxnSp>
-        <p:nvCxnSpPr>
-          <p:cNvPr id="37" name="C1-E29 arrow 35" descr="sci-ppt:o035"/>
-          <p:cNvCxnSpPr/>
-          <p:nvPr/>
-        </p:nvCxnSpPr>
-        <p:spPr>
-          <a:xfrm flipH="1">
-            <a:off x="1180124" y="3383280"/>
-            <a:ext cx="502920" cy="0"/>
-          </a:xfrm>
-          <a:prstGeom prst="line">
-            <a:avLst/>
-          </a:prstGeom>
-          <a:ln w="27940">
-            <a:solidFill>
-              <a:srgbClr val="8EDBD4"/>
-            </a:solidFill>
-            <a:headEnd type="none" w="med" len="med"/>
-            <a:tailEnd type="triangle" w="med" len="med"/>
-          </a:ln>
-          <a:effectLst/>
-        </p:spPr>
-      </p:cxnSp>
-      <p:cxnSp>
-        <p:nvCxnSpPr>
-          <p:cNvPr id="38" name="C1-E29 arrow 36" descr="sci-ppt:o036"/>
-          <p:cNvCxnSpPr/>
-          <p:nvPr/>
-        </p:nvCxnSpPr>
-        <p:spPr>
-          <a:xfrm flipH="1">
-            <a:off x="2343287" y="4041581"/>
-            <a:ext cx="251460" cy="435541"/>
-          </a:xfrm>
-          <a:prstGeom prst="line">
-            <a:avLst/>
-          </a:prstGeom>
-          <a:ln w="27940">
-            <a:solidFill>
-              <a:srgbClr val="8EDBD4"/>
-            </a:solidFill>
-            <a:headEnd type="none" w="med" len="med"/>
-            <a:tailEnd type="triangle" w="med" len="med"/>
-          </a:ln>
-          <a:effectLst/>
-        </p:spPr>
-      </p:cxnSp>
-      <p:cxnSp>
-        <p:nvCxnSpPr>
-          <p:cNvPr id="39" name="C1-E29 arrow 37" descr="sci-ppt:o037"/>
-          <p:cNvCxnSpPr/>
-          <p:nvPr/>
-        </p:nvCxnSpPr>
-        <p:spPr>
-          <a:xfrm>
-            <a:off x="3698885" y="4138508"/>
-            <a:ext cx="251460" cy="435542"/>
-          </a:xfrm>
-          <a:prstGeom prst="line">
-            <a:avLst/>
-          </a:prstGeom>
-          <a:ln w="27940">
-            <a:solidFill>
-              <a:srgbClr val="8EDBD4"/>
-            </a:solidFill>
-            <a:headEnd type="none" w="med" len="med"/>
-            <a:tailEnd type="triangle" w="med" len="med"/>
-          </a:ln>
-          <a:effectLst/>
-        </p:spPr>
-      </p:cxnSp>
-      <p:sp>
-        <p:nvSpPr>
-          <p:cNvPr id="40" name="C1-E29 text 38" descr="sci-ppt:o038"/>
+              <a:t>General closure, Eq. C1-E28</a:t>
+            </a:r>
+          </a:p>
+        </p:txBody>
+      </p:sp>
+      <p:sp>
+        <p:nvSpPr>
+          <p:cNvPr id="39" name="C1-E29 text 37" descr="sci-ppt:o037"/>
           <p:cNvSpPr txBox="1"/>
           <p:nvPr/>
         </p:nvSpPr>
         <p:spPr>
           <a:xfrm>
-            <a:off x="502920" y="4846320"/>
-            <a:ext cx="5212080" cy="417576"/>
+            <a:off x="777240" y="1664208"/>
+            <a:ext cx="5120640" cy="239395"/>
           </a:xfrm>
           <a:prstGeom prst="rect">
             <a:avLst/>
@@ -4306,266 +5098,26 @@
               </a:spcAft>
             </a:pPr>
             <a:r>
-              <a:rPr sz="1200" b="0" i="0">
+              <a:rPr sz="1250" b="0" i="0">
                 <a:solidFill>
                   <a:srgbClr val="E7F0F3"/>
                 </a:solidFill>
                 <a:latin typeface="Arial"/>
               </a:rPr>
-              <a:t>Surface velocity u = ∇φ differs from point to point; the shape</a:t>
-            </a:r>
-          </a:p>
-          <a:p>
-            <a:pPr algn="l">
-              <a:spcAft>
-                <a:spcPts val="0"/>
-              </a:spcAft>
-            </a:pPr>
-            <a:r>
-              <a:rPr sz="1200" b="0" i="0">
-                <a:solidFill>
-                  <a:srgbClr val="E7F0F3"/>
-                </a:solidFill>
-                <a:latin typeface="Arial"/>
-              </a:rPr>
-              <a:t>changes as it is carried along.</a:t>
-            </a:r>
-          </a:p>
-        </p:txBody>
-      </p:sp>
-      <p:sp>
-        <p:nvSpPr>
-          <p:cNvPr id="41" name="C1-E29 text 39" descr="sci-ppt:o039"/>
-          <p:cNvSpPr txBox="1"/>
-          <p:nvPr/>
-        </p:nvSpPr>
-        <p:spPr>
-          <a:xfrm>
-            <a:off x="6126480" y="914400"/>
-            <a:ext cx="5669280" cy="262636"/>
-          </a:xfrm>
-          <a:prstGeom prst="rect">
-            <a:avLst/>
-          </a:prstGeom>
-          <a:noFill/>
-          <a:effectLst/>
-        </p:spPr>
-        <p:txBody>
-          <a:bodyPr wrap="none" lIns="18288" rIns="18288" tIns="18288" bIns="18288" anchor="t">
-            <a:spAutoFit/>
-          </a:bodyPr>
-          <a:lstStyle/>
-          <a:p>
-            <a:pPr algn="l">
-              <a:spcAft>
-                <a:spcPts val="0"/>
-              </a:spcAft>
-            </a:pPr>
-            <a:r>
-              <a:rPr sz="1400" b="1" i="0">
-                <a:solidFill>
-                  <a:srgbClr val="8EDBD4"/>
-                </a:solidFill>
-                <a:latin typeface="Arial"/>
-              </a:rPr>
-              <a:t>Closure loop (inviscid, before impact)</a:t>
-            </a:r>
-          </a:p>
-        </p:txBody>
-      </p:sp>
-      <p:sp>
-        <p:nvSpPr>
-          <p:cNvPr id="42" name="C1-E29 round_rect 40" descr="sci-ppt:o040"/>
-          <p:cNvSpPr/>
-          <p:nvPr/>
-        </p:nvSpPr>
-        <p:spPr>
-          <a:xfrm>
-            <a:off x="6126480" y="1371600"/>
-            <a:ext cx="5715000" cy="914400"/>
-          </a:xfrm>
-          <a:prstGeom prst="roundRect">
-            <a:avLst/>
-          </a:prstGeom>
-          <a:solidFill>
-            <a:srgbClr val="213E4B"/>
-          </a:solidFill>
-          <a:ln w="20320">
-            <a:solidFill>
-              <a:srgbClr val="8EDBD4"/>
-            </a:solidFill>
-          </a:ln>
-          <a:effectLst/>
-        </p:spPr>
-        <p:txBody>
-          <a:bodyPr rtlCol="0" anchor="ctr"/>
-          <a:lstStyle/>
-          <a:p>
-            <a:pPr algn="ctr"/>
-          </a:p>
-        </p:txBody>
-      </p:sp>
-      <p:sp>
-        <p:nvSpPr>
-          <p:cNvPr id="43" name="C1-E29 ellipse 41" descr="sci-ppt:o041"/>
-          <p:cNvSpPr/>
-          <p:nvPr/>
-        </p:nvSpPr>
-        <p:spPr>
-          <a:xfrm>
-            <a:off x="6227064" y="1609344"/>
-            <a:ext cx="438912" cy="438912"/>
-          </a:xfrm>
-          <a:prstGeom prst="ellipse">
-            <a:avLst/>
-          </a:prstGeom>
-          <a:solidFill>
-            <a:srgbClr val="8EDBD4"/>
-          </a:solidFill>
-          <a:ln w="12700">
-            <a:solidFill>
-              <a:srgbClr val="8EDBD4"/>
-            </a:solidFill>
-          </a:ln>
-          <a:effectLst/>
-        </p:spPr>
-        <p:txBody>
-          <a:bodyPr rtlCol="0" anchor="ctr"/>
-          <a:lstStyle/>
-          <a:p>
-            <a:pPr algn="ctr"/>
-          </a:p>
-        </p:txBody>
-      </p:sp>
-      <p:sp>
-        <p:nvSpPr>
-          <p:cNvPr id="44" name="C1-E29 text 42" descr="sci-ppt:o042"/>
-          <p:cNvSpPr txBox="1"/>
-          <p:nvPr/>
-        </p:nvSpPr>
-        <p:spPr>
-          <a:xfrm>
-            <a:off x="6336792" y="1645920"/>
-            <a:ext cx="228600" cy="247142"/>
-          </a:xfrm>
-          <a:prstGeom prst="rect">
-            <a:avLst/>
-          </a:prstGeom>
-          <a:noFill/>
-          <a:effectLst/>
-        </p:spPr>
-        <p:txBody>
-          <a:bodyPr wrap="none" lIns="18288" rIns="18288" tIns="18288" bIns="18288" anchor="t">
-            <a:spAutoFit/>
-          </a:bodyPr>
-          <a:lstStyle/>
-          <a:p>
-            <a:pPr algn="ctr">
-              <a:spcAft>
-                <a:spcPts val="0"/>
-              </a:spcAft>
-            </a:pPr>
-            <a:r>
-              <a:rPr sz="1300" b="1" i="0">
-                <a:solidFill>
-                  <a:srgbClr val="142632"/>
-                </a:solidFill>
-                <a:latin typeface="Arial"/>
-              </a:rPr>
-              <a:t>1</a:t>
-            </a:r>
-          </a:p>
-        </p:txBody>
-      </p:sp>
-      <p:sp>
-        <p:nvSpPr>
-          <p:cNvPr id="45" name="C1-E29 text 43" descr="sci-ppt:o043"/>
-          <p:cNvSpPr txBox="1"/>
-          <p:nvPr/>
-        </p:nvSpPr>
-        <p:spPr>
-          <a:xfrm>
-            <a:off x="6858000" y="1444752"/>
-            <a:ext cx="4892040" cy="247142"/>
-          </a:xfrm>
-          <a:prstGeom prst="rect">
-            <a:avLst/>
-          </a:prstGeom>
-          <a:noFill/>
-          <a:effectLst/>
-        </p:spPr>
-        <p:txBody>
-          <a:bodyPr wrap="none" lIns="18288" rIns="18288" tIns="18288" bIns="18288" anchor="t">
-            <a:spAutoFit/>
-          </a:bodyPr>
-          <a:lstStyle/>
-          <a:p>
-            <a:pPr algn="l">
-              <a:spcAft>
-                <a:spcPts val="0"/>
-              </a:spcAft>
-            </a:pPr>
-            <a:r>
-              <a:rPr sz="1300" b="1" i="0">
-                <a:solidFill>
-                  <a:srgbClr val="8EDBD4"/>
-                </a:solidFill>
-                <a:latin typeface="Arial"/>
-              </a:rPr>
-              <a:t>Known φ on Γ</a:t>
-            </a:r>
-          </a:p>
-        </p:txBody>
-      </p:sp>
-      <p:sp>
-        <p:nvSpPr>
-          <p:cNvPr id="46" name="C1-E29 text 44" descr="sci-ppt:o044"/>
-          <p:cNvSpPr txBox="1"/>
-          <p:nvPr/>
-        </p:nvSpPr>
-        <p:spPr>
-          <a:xfrm>
-            <a:off x="6858000" y="1828800"/>
-            <a:ext cx="4892040" cy="223900"/>
-          </a:xfrm>
-          <a:prstGeom prst="rect">
-            <a:avLst/>
-          </a:prstGeom>
-          <a:noFill/>
-          <a:effectLst/>
-        </p:spPr>
-        <p:txBody>
-          <a:bodyPr wrap="none" lIns="18288" rIns="18288" tIns="18288" bIns="18288" anchor="t">
-            <a:spAutoFit/>
-          </a:bodyPr>
-          <a:lstStyle/>
-          <a:p>
-            <a:pPr algn="l">
-              <a:spcAft>
-                <a:spcPts val="0"/>
-              </a:spcAft>
-            </a:pPr>
-            <a:r>
-              <a:rPr sz="1150" b="0" i="0">
-                <a:solidFill>
-                  <a:srgbClr val="E7F0F3"/>
-                </a:solidFill>
-                <a:latin typeface="Arial"/>
-              </a:rPr>
-              <a:t>solve ∇²φ = 0 in the liquid</a:t>
+              <a:t>D φ/Dt = ½|u|² + (p∞ − p_b − σκ)/ρ</a:t>
             </a:r>
           </a:p>
         </p:txBody>
       </p:sp>
       <p:cxnSp>
         <p:nvCxnSpPr>
-          <p:cNvPr id="47" name="C1-E29 arrow 45" descr="sci-ppt:o045"/>
+          <p:cNvPr id="40" name="C1-E29 arrow 38" descr="sci-ppt:o038"/>
           <p:cNvCxnSpPr/>
           <p:nvPr/>
         </p:nvCxnSpPr>
         <p:spPr>
           <a:xfrm>
-            <a:off x="8961120" y="2286000"/>
+            <a:off x="3108960" y="1976755"/>
             <a:ext cx="0" cy="182880"/>
           </a:xfrm>
           <a:prstGeom prst="line">
@@ -4583,78 +5135,14 @@
       </p:cxnSp>
       <p:sp>
         <p:nvSpPr>
-          <p:cNvPr id="48" name="C1-E29 round_rect 46" descr="sci-ppt:o046"/>
-          <p:cNvSpPr/>
-          <p:nvPr/>
-        </p:nvSpPr>
-        <p:spPr>
-          <a:xfrm>
-            <a:off x="6126480" y="2468880"/>
-            <a:ext cx="5715000" cy="914400"/>
-          </a:xfrm>
-          <a:prstGeom prst="roundRect">
-            <a:avLst/>
-          </a:prstGeom>
-          <a:solidFill>
-            <a:srgbClr val="213E4B"/>
-          </a:solidFill>
-          <a:ln w="20320">
-            <a:solidFill>
-              <a:srgbClr val="7FC8F8"/>
-            </a:solidFill>
-          </a:ln>
-          <a:effectLst/>
-        </p:spPr>
-        <p:txBody>
-          <a:bodyPr rtlCol="0" anchor="ctr"/>
-          <a:lstStyle/>
-          <a:p>
-            <a:pPr algn="ctr"/>
-          </a:p>
-        </p:txBody>
-      </p:sp>
-      <p:sp>
-        <p:nvSpPr>
-          <p:cNvPr id="49" name="C1-E29 ellipse 47" descr="sci-ppt:o047"/>
-          <p:cNvSpPr/>
-          <p:nvPr/>
-        </p:nvSpPr>
-        <p:spPr>
-          <a:xfrm>
-            <a:off x="6227064" y="2706624"/>
-            <a:ext cx="438912" cy="438912"/>
-          </a:xfrm>
-          <a:prstGeom prst="ellipse">
-            <a:avLst/>
-          </a:prstGeom>
-          <a:solidFill>
-            <a:srgbClr val="7FC8F8"/>
-          </a:solidFill>
-          <a:ln w="12700">
-            <a:solidFill>
-              <a:srgbClr val="7FC8F8"/>
-            </a:solidFill>
-          </a:ln>
-          <a:effectLst/>
-        </p:spPr>
-        <p:txBody>
-          <a:bodyPr rtlCol="0" anchor="ctr"/>
-          <a:lstStyle/>
-          <a:p>
-            <a:pPr algn="ctr"/>
-          </a:p>
-        </p:txBody>
-      </p:sp>
-      <p:sp>
-        <p:nvSpPr>
-          <p:cNvPr id="50" name="C1-E29 text 48" descr="sci-ppt:o048"/>
+          <p:cNvPr id="41" name="C1-E29 text 39" descr="sci-ppt:o039"/>
           <p:cNvSpPr txBox="1"/>
           <p:nvPr/>
         </p:nvSpPr>
         <p:spPr>
           <a:xfrm>
-            <a:off x="6336792" y="2743200"/>
-            <a:ext cx="228600" cy="247142"/>
+            <a:off x="548640" y="2214499"/>
+            <a:ext cx="5303520" cy="239395"/>
           </a:xfrm>
           <a:prstGeom prst="rect">
             <a:avLst/>
@@ -4668,33 +5156,33 @@
           </a:bodyPr>
           <a:lstStyle/>
           <a:p>
-            <a:pPr algn="ctr">
+            <a:pPr algn="l">
               <a:spcAft>
                 <a:spcPts val="0"/>
               </a:spcAft>
             </a:pPr>
             <a:r>
-              <a:rPr sz="1300" b="1" i="0">
+              <a:rPr sz="1250" b="1" i="0">
                 <a:solidFill>
-                  <a:srgbClr val="142632"/>
+                  <a:srgbClr val="F2B880"/>
                 </a:solidFill>
                 <a:latin typeface="Arial"/>
               </a:rPr>
-              <a:t>2</a:t>
-            </a:r>
-          </a:p>
-        </p:txBody>
-      </p:sp>
-      <p:sp>
-        <p:nvSpPr>
-          <p:cNvPr id="51" name="C1-E29 text 49" descr="sci-ppt:o049"/>
+              <a:t>Insert the sphere</a:t>
+            </a:r>
+          </a:p>
+        </p:txBody>
+      </p:sp>
+      <p:sp>
+        <p:nvSpPr>
+          <p:cNvPr id="42" name="C1-E29 text 40" descr="sci-ppt:o040"/>
           <p:cNvSpPr txBox="1"/>
           <p:nvPr/>
         </p:nvSpPr>
         <p:spPr>
           <a:xfrm>
-            <a:off x="6858000" y="2542032"/>
-            <a:ext cx="4892040" cy="247142"/>
+            <a:off x="777240" y="2507107"/>
+            <a:ext cx="5120640" cy="239395"/>
           </a:xfrm>
           <a:prstGeom prst="rect">
             <a:avLst/>
@@ -4714,66 +5202,26 @@
               </a:spcAft>
             </a:pPr>
             <a:r>
-              <a:rPr sz="1300" b="1" i="0">
-                <a:solidFill>
-                  <a:srgbClr val="7FC8F8"/>
-                </a:solidFill>
-                <a:latin typeface="Arial"/>
-              </a:rPr>
-              <a:t>u = ∇φ at the surface</a:t>
-            </a:r>
-          </a:p>
-        </p:txBody>
-      </p:sp>
-      <p:sp>
-        <p:nvSpPr>
-          <p:cNvPr id="52" name="C1-E29 text 50" descr="sci-ppt:o050"/>
-          <p:cNvSpPr txBox="1"/>
-          <p:nvPr/>
-        </p:nvSpPr>
-        <p:spPr>
-          <a:xfrm>
-            <a:off x="6858000" y="2926080"/>
-            <a:ext cx="4892040" cy="223900"/>
-          </a:xfrm>
-          <a:prstGeom prst="rect">
-            <a:avLst/>
-          </a:prstGeom>
-          <a:noFill/>
-          <a:effectLst/>
-        </p:spPr>
-        <p:txBody>
-          <a:bodyPr wrap="none" lIns="18288" rIns="18288" tIns="18288" bIns="18288" anchor="t">
-            <a:spAutoFit/>
-          </a:bodyPr>
-          <a:lstStyle/>
-          <a:p>
-            <a:pPr algn="l">
-              <a:spcAft>
-                <a:spcPts val="0"/>
-              </a:spcAft>
-            </a:pPr>
-            <a:r>
-              <a:rPr sz="1150" b="0" i="0">
+              <a:rPr sz="1250" b="0" i="0">
                 <a:solidFill>
                   <a:srgbClr val="E7F0F3"/>
                 </a:solidFill>
                 <a:latin typeface="Arial"/>
               </a:rPr>
-              <a:t>normal speed Vₙ = ∂φ/∂n</a:t>
+              <a:t>φ_Γ = −RṘ,   κ = −2/R</a:t>
             </a:r>
           </a:p>
         </p:txBody>
       </p:sp>
       <p:cxnSp>
         <p:nvCxnSpPr>
-          <p:cNvPr id="53" name="C1-E29 arrow 51" descr="sci-ppt:o051"/>
+          <p:cNvPr id="43" name="C1-E29 arrow 41" descr="sci-ppt:o041"/>
           <p:cNvCxnSpPr/>
           <p:nvPr/>
         </p:nvCxnSpPr>
         <p:spPr>
           <a:xfrm>
-            <a:off x="8961120" y="3383280"/>
+            <a:off x="3108960" y="2819654"/>
             <a:ext cx="0" cy="182880"/>
           </a:xfrm>
           <a:prstGeom prst="line">
@@ -4791,78 +5239,14 @@
       </p:cxnSp>
       <p:sp>
         <p:nvSpPr>
-          <p:cNvPr id="54" name="C1-E29 round_rect 52" descr="sci-ppt:o052"/>
-          <p:cNvSpPr/>
-          <p:nvPr/>
-        </p:nvSpPr>
-        <p:spPr>
-          <a:xfrm>
-            <a:off x="6126480" y="3566160"/>
-            <a:ext cx="5715000" cy="914400"/>
-          </a:xfrm>
-          <a:prstGeom prst="roundRect">
-            <a:avLst/>
-          </a:prstGeom>
-          <a:solidFill>
-            <a:srgbClr val="213E4B"/>
-          </a:solidFill>
-          <a:ln w="20320">
-            <a:solidFill>
-              <a:srgbClr val="F2B880"/>
-            </a:solidFill>
-          </a:ln>
-          <a:effectLst/>
-        </p:spPr>
-        <p:txBody>
-          <a:bodyPr rtlCol="0" anchor="ctr"/>
-          <a:lstStyle/>
-          <a:p>
-            <a:pPr algn="ctr"/>
-          </a:p>
-        </p:txBody>
-      </p:sp>
-      <p:sp>
-        <p:nvSpPr>
-          <p:cNvPr id="55" name="C1-E29 ellipse 53" descr="sci-ppt:o053"/>
-          <p:cNvSpPr/>
-          <p:nvPr/>
-        </p:nvSpPr>
-        <p:spPr>
-          <a:xfrm>
-            <a:off x="6227064" y="3803904"/>
-            <a:ext cx="438912" cy="438912"/>
-          </a:xfrm>
-          <a:prstGeom prst="ellipse">
-            <a:avLst/>
-          </a:prstGeom>
-          <a:solidFill>
-            <a:srgbClr val="F2B880"/>
-          </a:solidFill>
-          <a:ln w="12700">
-            <a:solidFill>
-              <a:srgbClr val="F2B880"/>
-            </a:solidFill>
-          </a:ln>
-          <a:effectLst/>
-        </p:spPr>
-        <p:txBody>
-          <a:bodyPr rtlCol="0" anchor="ctr"/>
-          <a:lstStyle/>
-          <a:p>
-            <a:pPr algn="ctr"/>
-          </a:p>
-        </p:txBody>
-      </p:sp>
-      <p:sp>
-        <p:nvSpPr>
-          <p:cNvPr id="56" name="C1-E29 text 54" descr="sci-ppt:o054"/>
+          <p:cNvPr id="44" name="C1-E29 text 42" descr="sci-ppt:o042"/>
           <p:cNvSpPr txBox="1"/>
           <p:nvPr/>
         </p:nvSpPr>
         <p:spPr>
           <a:xfrm>
-            <a:off x="6336792" y="3840480"/>
-            <a:ext cx="228600" cy="247142"/>
+            <a:off x="548640" y="3057398"/>
+            <a:ext cx="5303520" cy="239395"/>
           </a:xfrm>
           <a:prstGeom prst="rect">
             <a:avLst/>
@@ -4876,33 +5260,33 @@
           </a:bodyPr>
           <a:lstStyle/>
           <a:p>
-            <a:pPr algn="ctr">
+            <a:pPr algn="l">
               <a:spcAft>
                 <a:spcPts val="0"/>
               </a:spcAft>
             </a:pPr>
             <a:r>
-              <a:rPr sz="1300" b="1" i="0">
+              <a:rPr sz="1250" b="1" i="0">
                 <a:solidFill>
-                  <a:srgbClr val="142632"/>
+                  <a:srgbClr val="7FC8F8"/>
                 </a:solidFill>
                 <a:latin typeface="Arial"/>
               </a:rPr>
-              <a:t>3</a:t>
-            </a:r>
-          </a:p>
-        </p:txBody>
-      </p:sp>
-      <p:sp>
-        <p:nvSpPr>
-          <p:cNvPr id="57" name="C1-E29 text 55" descr="sci-ppt:o055"/>
+              <a:t>Differentiate along the wall</a:t>
+            </a:r>
+          </a:p>
+        </p:txBody>
+      </p:sp>
+      <p:sp>
+        <p:nvSpPr>
+          <p:cNvPr id="45" name="C1-E29 text 43" descr="sci-ppt:o043"/>
           <p:cNvSpPr txBox="1"/>
           <p:nvPr/>
         </p:nvSpPr>
         <p:spPr>
           <a:xfrm>
-            <a:off x="6858000" y="3639312"/>
-            <a:ext cx="4892040" cy="247142"/>
+            <a:off x="777240" y="3350006"/>
+            <a:ext cx="5120640" cy="239395"/>
           </a:xfrm>
           <a:prstGeom prst="rect">
             <a:avLst/>
@@ -4922,66 +5306,26 @@
               </a:spcAft>
             </a:pPr>
             <a:r>
-              <a:rPr sz="1300" b="1" i="0">
-                <a:solidFill>
-                  <a:srgbClr val="F2B880"/>
-                </a:solidFill>
-                <a:latin typeface="Arial"/>
-              </a:rPr>
-              <a:t>Advect: dX/dt = u(X, t)</a:t>
-            </a:r>
-          </a:p>
-        </p:txBody>
-      </p:sp>
-      <p:sp>
-        <p:nvSpPr>
-          <p:cNvPr id="58" name="C1-E29 text 56" descr="sci-ppt:o056"/>
-          <p:cNvSpPr txBox="1"/>
-          <p:nvPr/>
-        </p:nvSpPr>
-        <p:spPr>
-          <a:xfrm>
-            <a:off x="6858000" y="4023360"/>
-            <a:ext cx="4892040" cy="223900"/>
-          </a:xfrm>
-          <a:prstGeom prst="rect">
-            <a:avLst/>
-          </a:prstGeom>
-          <a:noFill/>
-          <a:effectLst/>
-        </p:spPr>
-        <p:txBody>
-          <a:bodyPr wrap="none" lIns="18288" rIns="18288" tIns="18288" bIns="18288" anchor="t">
-            <a:spAutoFit/>
-          </a:bodyPr>
-          <a:lstStyle/>
-          <a:p>
-            <a:pPr algn="l">
-              <a:spcAft>
-                <a:spcPts val="0"/>
-              </a:spcAft>
-            </a:pPr>
-            <a:r>
-              <a:rPr sz="1150" b="0" i="0">
+              <a:rPr sz="1250" b="0" i="0">
                 <a:solidFill>
                   <a:srgbClr val="E7F0F3"/>
                 </a:solidFill>
                 <a:latin typeface="Arial"/>
               </a:rPr>
-              <a:t>new shape Γ(t + dt), new curvature κ</a:t>
+              <a:t>−Ṙ² − RR̈ = (p∞ − p_b + 2σ/R)/ρ + ½Ṙ²</a:t>
             </a:r>
           </a:p>
         </p:txBody>
       </p:sp>
       <p:cxnSp>
         <p:nvCxnSpPr>
-          <p:cNvPr id="59" name="C1-E29 arrow 57" descr="sci-ppt:o057"/>
+          <p:cNvPr id="46" name="C1-E29 arrow 44" descr="sci-ppt:o044"/>
           <p:cNvCxnSpPr/>
           <p:nvPr/>
         </p:nvCxnSpPr>
         <p:spPr>
           <a:xfrm>
-            <a:off x="8961120" y="4480560"/>
+            <a:off x="3108960" y="3662552"/>
             <a:ext cx="0" cy="182880"/>
           </a:xfrm>
           <a:prstGeom prst="line">
@@ -4999,78 +5343,14 @@
       </p:cxnSp>
       <p:sp>
         <p:nvSpPr>
-          <p:cNvPr id="60" name="C1-E29 round_rect 58" descr="sci-ppt:o058"/>
-          <p:cNvSpPr/>
-          <p:nvPr/>
-        </p:nvSpPr>
-        <p:spPr>
-          <a:xfrm>
-            <a:off x="6126480" y="4663440"/>
-            <a:ext cx="5715000" cy="914400"/>
-          </a:xfrm>
-          <a:prstGeom prst="roundRect">
-            <a:avLst/>
-          </a:prstGeom>
-          <a:solidFill>
-            <a:srgbClr val="213E4B"/>
-          </a:solidFill>
-          <a:ln w="20320">
-            <a:solidFill>
-              <a:srgbClr val="F28BA0"/>
-            </a:solidFill>
-          </a:ln>
-          <a:effectLst/>
-        </p:spPr>
-        <p:txBody>
-          <a:bodyPr rtlCol="0" anchor="ctr"/>
-          <a:lstStyle/>
-          <a:p>
-            <a:pPr algn="ctr"/>
-          </a:p>
-        </p:txBody>
-      </p:sp>
-      <p:sp>
-        <p:nvSpPr>
-          <p:cNvPr id="61" name="C1-E29 ellipse 59" descr="sci-ppt:o059"/>
-          <p:cNvSpPr/>
-          <p:nvPr/>
-        </p:nvSpPr>
-        <p:spPr>
-          <a:xfrm>
-            <a:off x="6227064" y="4901184"/>
-            <a:ext cx="438912" cy="438912"/>
-          </a:xfrm>
-          <a:prstGeom prst="ellipse">
-            <a:avLst/>
-          </a:prstGeom>
-          <a:solidFill>
-            <a:srgbClr val="F28BA0"/>
-          </a:solidFill>
-          <a:ln w="12700">
-            <a:solidFill>
-              <a:srgbClr val="F28BA0"/>
-            </a:solidFill>
-          </a:ln>
-          <a:effectLst/>
-        </p:spPr>
-        <p:txBody>
-          <a:bodyPr rtlCol="0" anchor="ctr"/>
-          <a:lstStyle/>
-          <a:p>
-            <a:pPr algn="ctr"/>
-          </a:p>
-        </p:txBody>
-      </p:sp>
-      <p:sp>
-        <p:nvSpPr>
-          <p:cNvPr id="62" name="C1-E29 text 60" descr="sci-ppt:o060"/>
+          <p:cNvPr id="47" name="C1-E29 text 45" descr="sci-ppt:o045"/>
           <p:cNvSpPr txBox="1"/>
           <p:nvPr/>
         </p:nvSpPr>
         <p:spPr>
           <a:xfrm>
-            <a:off x="6336792" y="4937760"/>
-            <a:ext cx="228600" cy="247142"/>
+            <a:off x="548640" y="3900296"/>
+            <a:ext cx="5303520" cy="239395"/>
           </a:xfrm>
           <a:prstGeom prst="rect">
             <a:avLst/>
@@ -5084,33 +5364,33 @@
           </a:bodyPr>
           <a:lstStyle/>
           <a:p>
-            <a:pPr algn="ctr">
+            <a:pPr algn="l">
               <a:spcAft>
                 <a:spcPts val="0"/>
               </a:spcAft>
             </a:pPr>
             <a:r>
-              <a:rPr sz="1300" b="1" i="0">
+              <a:rPr sz="1250" b="1" i="0">
                 <a:solidFill>
-                  <a:srgbClr val="142632"/>
+                  <a:srgbClr val="F28BA0"/>
                 </a:solidFill>
                 <a:latin typeface="Arial"/>
               </a:rPr>
-              <a:t>4</a:t>
-            </a:r>
-          </a:p>
-        </p:txBody>
-      </p:sp>
-      <p:sp>
-        <p:nvSpPr>
-          <p:cNvPr id="63" name="C1-E29 text 61" descr="sci-ppt:o061"/>
+              <a:t>Rearrange</a:t>
+            </a:r>
+          </a:p>
+        </p:txBody>
+      </p:sp>
+      <p:sp>
+        <p:nvSpPr>
+          <p:cNvPr id="48" name="C1-E29 text 46" descr="sci-ppt:o046"/>
           <p:cNvSpPr txBox="1"/>
           <p:nvPr/>
         </p:nvSpPr>
         <p:spPr>
           <a:xfrm>
-            <a:off x="6858000" y="4736592"/>
-            <a:ext cx="4892040" cy="247142"/>
+            <a:off x="777240" y="4192904"/>
+            <a:ext cx="5120640" cy="239395"/>
           </a:xfrm>
           <a:prstGeom prst="rect">
             <a:avLst/>
@@ -5130,27 +5410,27 @@
               </a:spcAft>
             </a:pPr>
             <a:r>
-              <a:rPr sz="1300" b="1" i="0">
+              <a:rPr sz="1250" b="0" i="0">
                 <a:solidFill>
-                  <a:srgbClr val="F28BA0"/>
+                  <a:srgbClr val="E7F0F3"/>
                 </a:solidFill>
                 <a:latin typeface="Arial"/>
               </a:rPr>
-              <a:t>Update φ on Γ</a:t>
-            </a:r>
-          </a:p>
-        </p:txBody>
-      </p:sp>
-      <p:sp>
-        <p:nvSpPr>
-          <p:cNvPr id="64" name="C1-E29 text 62" descr="sci-ppt:o062"/>
+              <a:t>ρ(RR̈ + 3Ṙ²/2) = p_b − p∞ − 2σ/R</a:t>
+            </a:r>
+          </a:p>
+        </p:txBody>
+      </p:sp>
+      <p:sp>
+        <p:nvSpPr>
+          <p:cNvPr id="49" name="C1-E29 text 47" descr="sci-ppt:o047"/>
           <p:cNvSpPr txBox="1"/>
           <p:nvPr/>
         </p:nvSpPr>
         <p:spPr>
           <a:xfrm>
-            <a:off x="6858000" y="5120640"/>
-            <a:ext cx="4892040" cy="223900"/>
+            <a:off x="548640" y="5074920"/>
+            <a:ext cx="5303520" cy="417576"/>
           </a:xfrm>
           <a:prstGeom prst="rect">
             <a:avLst/>
@@ -5170,39 +5450,71 @@
               </a:spcAft>
             </a:pPr>
             <a:r>
-              <a:rPr sz="1150" b="0" i="0">
+              <a:rPr sz="1200" b="0" i="0">
+                <a:solidFill>
+                  <a:srgbClr val="B4C7D2"/>
+                </a:solidFill>
+                <a:latin typeface="Arial"/>
+              </a:rPr>
+              <a:t>This is the Rayleigh–Plesset equation without viscosity: the</a:t>
+            </a:r>
+          </a:p>
+          <a:p>
+            <a:pPr algn="l">
+              <a:spcAft>
+                <a:spcPts val="0"/>
+              </a:spcAft>
+            </a:pPr>
+            <a:r>
+              <a:rPr sz="1200" b="0" i="0">
+                <a:solidFill>
+                  <a:srgbClr val="B4C7D2"/>
+                </a:solidFill>
+                <a:latin typeface="Arial"/>
+              </a:rPr>
+              <a:t>spatial theory returns the spherical model in its own limit.</a:t>
+            </a:r>
+          </a:p>
+        </p:txBody>
+      </p:sp>
+      <p:sp>
+        <p:nvSpPr>
+          <p:cNvPr id="50" name="C1-E29 text 48" descr="sci-ppt:o048"/>
+          <p:cNvSpPr txBox="1"/>
+          <p:nvPr/>
+        </p:nvSpPr>
+        <p:spPr>
+          <a:xfrm>
+            <a:off x="6858000" y="5669280"/>
+            <a:ext cx="4937760" cy="433070"/>
+          </a:xfrm>
+          <a:prstGeom prst="rect">
+            <a:avLst/>
+          </a:prstGeom>
+          <a:noFill/>
+          <a:effectLst/>
+        </p:spPr>
+        <p:txBody>
+          <a:bodyPr wrap="none" lIns="18288" rIns="18288" tIns="18288" bIns="18288" anchor="t">
+            <a:spAutoFit/>
+          </a:bodyPr>
+          <a:lstStyle/>
+          <a:p>
+            <a:pPr algn="l">
+              <a:spcAft>
+                <a:spcPts val="0"/>
+              </a:spcAft>
+            </a:pPr>
+            <a:r>
+              <a:rPr sz="1250" b="0" i="0">
                 <a:solidFill>
                   <a:srgbClr val="E7F0F3"/>
                 </a:solidFill>
                 <a:latin typeface="Arial"/>
               </a:rPr>
-              <a:t>Dφ/Dt = ½|u|² + (p∞ − p_b − σκ)/ρ</a:t>
-            </a:r>
-          </a:p>
-        </p:txBody>
-      </p:sp>
-      <p:sp>
-        <p:nvSpPr>
-          <p:cNvPr id="65" name="C1-E29 text 63" descr="sci-ppt:o063"/>
-          <p:cNvSpPr txBox="1"/>
-          <p:nvPr/>
-        </p:nvSpPr>
-        <p:spPr>
-          <a:xfrm>
-            <a:off x="6126480" y="5806440"/>
-            <a:ext cx="5669280" cy="433070"/>
-          </a:xfrm>
-          <a:prstGeom prst="rect">
-            <a:avLst/>
-          </a:prstGeom>
-          <a:noFill/>
-          <a:effectLst/>
-        </p:spPr>
-        <p:txBody>
-          <a:bodyPr wrap="none" lIns="18288" rIns="18288" tIns="18288" bIns="18288" anchor="t">
-            <a:spAutoFit/>
-          </a:bodyPr>
-          <a:lstStyle/>
+              <a:t>Check: R(t) from the solution, R̈ by finite differences.</a:t>
+            </a:r>
+          </a:p>
           <a:p>
             <a:pPr algn="l">
               <a:spcAft>
@@ -5212,34 +5524,18 @@
             <a:r>
               <a:rPr sz="1250" b="0" i="0">
                 <a:solidFill>
-                  <a:srgbClr val="F2B880"/>
+                  <a:srgbClr val="E7F0F3"/>
                 </a:solidFill>
                 <a:latin typeface="Arial"/>
               </a:rPr>
-              <a:t>The shape and the potential evolve together; changing geometry is</a:t>
-            </a:r>
-          </a:p>
-          <a:p>
-            <a:pPr algn="l">
-              <a:spcAft>
-                <a:spcPts val="0"/>
-              </a:spcAft>
-            </a:pPr>
-            <a:r>
-              <a:rPr sz="1250" b="0" i="0">
-                <a:solidFill>
-                  <a:srgbClr val="F2B880"/>
-                </a:solidFill>
-                <a:latin typeface="Arial"/>
-              </a:rPr>
-              <a:t>what creates focusing.</a:t>
-            </a:r>
-          </a:p>
-        </p:txBody>
-      </p:sp>
-      <p:sp>
-        <p:nvSpPr>
-          <p:cNvPr id="66" name="C1-E29 text 64" descr="sci-ppt:o064"/>
+              <a:t>The two sides coincide, so the algebra above is exact.</a:t>
+            </a:r>
+          </a:p>
+        </p:txBody>
+      </p:sp>
+      <p:sp>
+        <p:nvSpPr>
+          <p:cNvPr id="51" name="C1-E29 text 49" descr="sci-ppt:o049"/>
           <p:cNvSpPr txBox="1"/>
           <p:nvPr/>
         </p:nvSpPr>
@@ -5272,7 +5568,7 @@
                 </a:solidFill>
                 <a:latin typeface="Arial"/>
               </a:rPr>
-              <a:t>Schematic of the loop of Eq. C1-E29; the deformed shape is illustrative.</a:t>
+              <a:t>Inviscid Rayleigh–Plesset run: R₀ = 5 µm, p_g0 = 1 MPa, γ = 1.4, σ = 0.072 N/m.</a:t>
             </a:r>
           </a:p>
         </p:txBody>
